--- a/Лекции/ООП 2 лек 6.pptx
+++ b/Лекции/ООП 2 лек 6.pptx
@@ -5,7 +5,7 @@
     <p:sldMasterId id="2147483674" r:id="rId1"/>
   </p:sldMasterIdLst>
   <p:notesMasterIdLst>
-    <p:notesMasterId r:id="rId13"/>
+    <p:notesMasterId r:id="rId32"/>
   </p:notesMasterIdLst>
   <p:sldIdLst>
     <p:sldId id="273" r:id="rId2"/>
@@ -18,7 +18,26 @@
     <p:sldId id="1154" r:id="rId9"/>
     <p:sldId id="1155" r:id="rId10"/>
     <p:sldId id="1156" r:id="rId11"/>
-    <p:sldId id="1157" r:id="rId12"/>
+    <p:sldId id="1158" r:id="rId12"/>
+    <p:sldId id="1157" r:id="rId13"/>
+    <p:sldId id="1159" r:id="rId14"/>
+    <p:sldId id="1160" r:id="rId15"/>
+    <p:sldId id="1161" r:id="rId16"/>
+    <p:sldId id="1162" r:id="rId17"/>
+    <p:sldId id="1163" r:id="rId18"/>
+    <p:sldId id="1171" r:id="rId19"/>
+    <p:sldId id="1172" r:id="rId20"/>
+    <p:sldId id="1173" r:id="rId21"/>
+    <p:sldId id="1174" r:id="rId22"/>
+    <p:sldId id="1175" r:id="rId23"/>
+    <p:sldId id="1176" r:id="rId24"/>
+    <p:sldId id="1177" r:id="rId25"/>
+    <p:sldId id="1178" r:id="rId26"/>
+    <p:sldId id="1179" r:id="rId27"/>
+    <p:sldId id="1180" r:id="rId28"/>
+    <p:sldId id="1181" r:id="rId29"/>
+    <p:sldId id="1182" r:id="rId30"/>
+    <p:sldId id="1183" r:id="rId31"/>
   </p:sldIdLst>
   <p:sldSz cx="12192000" cy="6858000"/>
   <p:notesSz cx="6858000" cy="9144000"/>
@@ -222,7 +241,7 @@
             <a:fld id="{AA2F9473-F066-431E-A6E8-1D478C995A6B}" type="datetimeFigureOut">
               <a:rPr lang="en-US" smtClean="0"/>
               <a:pPr/>
-              <a:t>2/16/2026</a:t>
+              <a:t>2/17/2026</a:t>
             </a:fld>
             <a:endParaRPr lang="en-US"/>
           </a:p>
@@ -751,7 +770,727 @@
     </p:spTree>
     <p:extLst>
       <p:ext uri="{BB962C8B-B14F-4D97-AF65-F5344CB8AC3E}">
+        <p14:creationId xmlns:p14="http://schemas.microsoft.com/office/powerpoint/2010/main" val="2065409967"/>
+      </p:ext>
+    </p:extLst>
+  </p:cSld>
+  <p:clrMapOvr>
+    <a:masterClrMapping/>
+  </p:clrMapOvr>
+</p:notes>
+</file>
+
+<file path=ppt/notesSlides/notesSlide12.xml><?xml version="1.0" encoding="utf-8"?>
+<p:notes xmlns:a="http://schemas.openxmlformats.org/drawingml/2006/main" xmlns:r="http://schemas.openxmlformats.org/officeDocument/2006/relationships" xmlns:p="http://schemas.openxmlformats.org/presentationml/2006/main">
+  <p:cSld>
+    <p:spTree>
+      <p:nvGrpSpPr>
+        <p:cNvPr id="1" name=""/>
+        <p:cNvGrpSpPr/>
+        <p:nvPr/>
+      </p:nvGrpSpPr>
+      <p:grpSpPr>
+        <a:xfrm>
+          <a:off x="0" y="0"/>
+          <a:ext cx="0" cy="0"/>
+          <a:chOff x="0" y="0"/>
+          <a:chExt cx="0" cy="0"/>
+        </a:xfrm>
+      </p:grpSpPr>
+      <p:sp>
+        <p:nvSpPr>
+          <p:cNvPr id="2" name="Образ слайда 1"/>
+          <p:cNvSpPr>
+            <a:spLocks noGrp="1" noRot="1" noChangeAspect="1"/>
+          </p:cNvSpPr>
+          <p:nvPr>
+            <p:ph type="sldImg"/>
+          </p:nvPr>
+        </p:nvSpPr>
+        <p:spPr>
+          <a:xfrm>
+            <a:off x="685800" y="1143000"/>
+            <a:ext cx="5486400" cy="3086100"/>
+          </a:xfrm>
+        </p:spPr>
+      </p:sp>
+      <p:sp>
+        <p:nvSpPr>
+          <p:cNvPr id="3" name="Заметки 2"/>
+          <p:cNvSpPr>
+            <a:spLocks noGrp="1"/>
+          </p:cNvSpPr>
+          <p:nvPr>
+            <p:ph type="body" idx="1"/>
+          </p:nvPr>
+        </p:nvSpPr>
+        <p:spPr/>
+        <p:txBody>
+          <a:bodyPr/>
+          <a:lstStyle/>
+          <a:p>
+            <a:endParaRPr lang="ru-RU"/>
+          </a:p>
+        </p:txBody>
+      </p:sp>
+      <p:sp>
+        <p:nvSpPr>
+          <p:cNvPr id="4" name="Номер слайда 3"/>
+          <p:cNvSpPr>
+            <a:spLocks noGrp="1"/>
+          </p:cNvSpPr>
+          <p:nvPr>
+            <p:ph type="sldNum" sz="quarter" idx="10"/>
+          </p:nvPr>
+        </p:nvSpPr>
+        <p:spPr/>
+        <p:txBody>
+          <a:bodyPr/>
+          <a:lstStyle/>
+          <a:p>
+            <a:fld id="{F0F4E2F1-1521-4C3A-A563-2F7D19AB6E0B}" type="slidenum">
+              <a:rPr lang="en-US" smtClean="0"/>
+              <a:pPr/>
+              <a:t>12</a:t>
+            </a:fld>
+            <a:endParaRPr lang="en-US"/>
+          </a:p>
+        </p:txBody>
+      </p:sp>
+    </p:spTree>
+    <p:extLst>
+      <p:ext uri="{BB962C8B-B14F-4D97-AF65-F5344CB8AC3E}">
         <p14:creationId xmlns:p14="http://schemas.microsoft.com/office/powerpoint/2010/main" val="171398274"/>
+      </p:ext>
+    </p:extLst>
+  </p:cSld>
+  <p:clrMapOvr>
+    <a:masterClrMapping/>
+  </p:clrMapOvr>
+</p:notes>
+</file>
+
+<file path=ppt/notesSlides/notesSlide13.xml><?xml version="1.0" encoding="utf-8"?>
+<p:notes xmlns:a="http://schemas.openxmlformats.org/drawingml/2006/main" xmlns:r="http://schemas.openxmlformats.org/officeDocument/2006/relationships" xmlns:p="http://schemas.openxmlformats.org/presentationml/2006/main">
+  <p:cSld>
+    <p:spTree>
+      <p:nvGrpSpPr>
+        <p:cNvPr id="1" name=""/>
+        <p:cNvGrpSpPr/>
+        <p:nvPr/>
+      </p:nvGrpSpPr>
+      <p:grpSpPr>
+        <a:xfrm>
+          <a:off x="0" y="0"/>
+          <a:ext cx="0" cy="0"/>
+          <a:chOff x="0" y="0"/>
+          <a:chExt cx="0" cy="0"/>
+        </a:xfrm>
+      </p:grpSpPr>
+      <p:sp>
+        <p:nvSpPr>
+          <p:cNvPr id="2" name="Образ слайда 1"/>
+          <p:cNvSpPr>
+            <a:spLocks noGrp="1" noRot="1" noChangeAspect="1"/>
+          </p:cNvSpPr>
+          <p:nvPr>
+            <p:ph type="sldImg"/>
+          </p:nvPr>
+        </p:nvSpPr>
+        <p:spPr>
+          <a:xfrm>
+            <a:off x="685800" y="1143000"/>
+            <a:ext cx="5486400" cy="3086100"/>
+          </a:xfrm>
+        </p:spPr>
+      </p:sp>
+      <p:sp>
+        <p:nvSpPr>
+          <p:cNvPr id="3" name="Заметки 2"/>
+          <p:cNvSpPr>
+            <a:spLocks noGrp="1"/>
+          </p:cNvSpPr>
+          <p:nvPr>
+            <p:ph type="body" idx="1"/>
+          </p:nvPr>
+        </p:nvSpPr>
+        <p:spPr/>
+        <p:txBody>
+          <a:bodyPr/>
+          <a:lstStyle/>
+          <a:p>
+            <a:endParaRPr lang="ru-RU"/>
+          </a:p>
+        </p:txBody>
+      </p:sp>
+      <p:sp>
+        <p:nvSpPr>
+          <p:cNvPr id="4" name="Номер слайда 3"/>
+          <p:cNvSpPr>
+            <a:spLocks noGrp="1"/>
+          </p:cNvSpPr>
+          <p:nvPr>
+            <p:ph type="sldNum" sz="quarter" idx="10"/>
+          </p:nvPr>
+        </p:nvSpPr>
+        <p:spPr/>
+        <p:txBody>
+          <a:bodyPr/>
+          <a:lstStyle/>
+          <a:p>
+            <a:fld id="{F0F4E2F1-1521-4C3A-A563-2F7D19AB6E0B}" type="slidenum">
+              <a:rPr lang="en-US" smtClean="0"/>
+              <a:pPr/>
+              <a:t>13</a:t>
+            </a:fld>
+            <a:endParaRPr lang="en-US"/>
+          </a:p>
+        </p:txBody>
+      </p:sp>
+    </p:spTree>
+    <p:extLst>
+      <p:ext uri="{BB962C8B-B14F-4D97-AF65-F5344CB8AC3E}">
+        <p14:creationId xmlns:p14="http://schemas.microsoft.com/office/powerpoint/2010/main" val="3314558987"/>
+      </p:ext>
+    </p:extLst>
+  </p:cSld>
+  <p:clrMapOvr>
+    <a:masterClrMapping/>
+  </p:clrMapOvr>
+</p:notes>
+</file>
+
+<file path=ppt/notesSlides/notesSlide14.xml><?xml version="1.0" encoding="utf-8"?>
+<p:notes xmlns:a="http://schemas.openxmlformats.org/drawingml/2006/main" xmlns:r="http://schemas.openxmlformats.org/officeDocument/2006/relationships" xmlns:p="http://schemas.openxmlformats.org/presentationml/2006/main">
+  <p:cSld>
+    <p:spTree>
+      <p:nvGrpSpPr>
+        <p:cNvPr id="1" name=""/>
+        <p:cNvGrpSpPr/>
+        <p:nvPr/>
+      </p:nvGrpSpPr>
+      <p:grpSpPr>
+        <a:xfrm>
+          <a:off x="0" y="0"/>
+          <a:ext cx="0" cy="0"/>
+          <a:chOff x="0" y="0"/>
+          <a:chExt cx="0" cy="0"/>
+        </a:xfrm>
+      </p:grpSpPr>
+      <p:sp>
+        <p:nvSpPr>
+          <p:cNvPr id="2" name="Образ слайда 1"/>
+          <p:cNvSpPr>
+            <a:spLocks noGrp="1" noRot="1" noChangeAspect="1"/>
+          </p:cNvSpPr>
+          <p:nvPr>
+            <p:ph type="sldImg"/>
+          </p:nvPr>
+        </p:nvSpPr>
+        <p:spPr>
+          <a:xfrm>
+            <a:off x="685800" y="1143000"/>
+            <a:ext cx="5486400" cy="3086100"/>
+          </a:xfrm>
+        </p:spPr>
+      </p:sp>
+      <p:sp>
+        <p:nvSpPr>
+          <p:cNvPr id="3" name="Заметки 2"/>
+          <p:cNvSpPr>
+            <a:spLocks noGrp="1"/>
+          </p:cNvSpPr>
+          <p:nvPr>
+            <p:ph type="body" idx="1"/>
+          </p:nvPr>
+        </p:nvSpPr>
+        <p:spPr/>
+        <p:txBody>
+          <a:bodyPr/>
+          <a:lstStyle/>
+          <a:p>
+            <a:endParaRPr lang="ru-RU"/>
+          </a:p>
+        </p:txBody>
+      </p:sp>
+      <p:sp>
+        <p:nvSpPr>
+          <p:cNvPr id="4" name="Номер слайда 3"/>
+          <p:cNvSpPr>
+            <a:spLocks noGrp="1"/>
+          </p:cNvSpPr>
+          <p:nvPr>
+            <p:ph type="sldNum" sz="quarter" idx="10"/>
+          </p:nvPr>
+        </p:nvSpPr>
+        <p:spPr/>
+        <p:txBody>
+          <a:bodyPr/>
+          <a:lstStyle/>
+          <a:p>
+            <a:fld id="{F0F4E2F1-1521-4C3A-A563-2F7D19AB6E0B}" type="slidenum">
+              <a:rPr lang="en-US" smtClean="0"/>
+              <a:pPr/>
+              <a:t>14</a:t>
+            </a:fld>
+            <a:endParaRPr lang="en-US"/>
+          </a:p>
+        </p:txBody>
+      </p:sp>
+    </p:spTree>
+    <p:extLst>
+      <p:ext uri="{BB962C8B-B14F-4D97-AF65-F5344CB8AC3E}">
+        <p14:creationId xmlns:p14="http://schemas.microsoft.com/office/powerpoint/2010/main" val="968804453"/>
+      </p:ext>
+    </p:extLst>
+  </p:cSld>
+  <p:clrMapOvr>
+    <a:masterClrMapping/>
+  </p:clrMapOvr>
+</p:notes>
+</file>
+
+<file path=ppt/notesSlides/notesSlide15.xml><?xml version="1.0" encoding="utf-8"?>
+<p:notes xmlns:a="http://schemas.openxmlformats.org/drawingml/2006/main" xmlns:r="http://schemas.openxmlformats.org/officeDocument/2006/relationships" xmlns:p="http://schemas.openxmlformats.org/presentationml/2006/main">
+  <p:cSld>
+    <p:spTree>
+      <p:nvGrpSpPr>
+        <p:cNvPr id="1" name=""/>
+        <p:cNvGrpSpPr/>
+        <p:nvPr/>
+      </p:nvGrpSpPr>
+      <p:grpSpPr>
+        <a:xfrm>
+          <a:off x="0" y="0"/>
+          <a:ext cx="0" cy="0"/>
+          <a:chOff x="0" y="0"/>
+          <a:chExt cx="0" cy="0"/>
+        </a:xfrm>
+      </p:grpSpPr>
+      <p:sp>
+        <p:nvSpPr>
+          <p:cNvPr id="2" name="Образ слайда 1"/>
+          <p:cNvSpPr>
+            <a:spLocks noGrp="1" noRot="1" noChangeAspect="1"/>
+          </p:cNvSpPr>
+          <p:nvPr>
+            <p:ph type="sldImg"/>
+          </p:nvPr>
+        </p:nvSpPr>
+        <p:spPr>
+          <a:xfrm>
+            <a:off x="685800" y="1143000"/>
+            <a:ext cx="5486400" cy="3086100"/>
+          </a:xfrm>
+        </p:spPr>
+      </p:sp>
+      <p:sp>
+        <p:nvSpPr>
+          <p:cNvPr id="3" name="Заметки 2"/>
+          <p:cNvSpPr>
+            <a:spLocks noGrp="1"/>
+          </p:cNvSpPr>
+          <p:nvPr>
+            <p:ph type="body" idx="1"/>
+          </p:nvPr>
+        </p:nvSpPr>
+        <p:spPr/>
+        <p:txBody>
+          <a:bodyPr/>
+          <a:lstStyle/>
+          <a:p>
+            <a:endParaRPr lang="ru-RU"/>
+          </a:p>
+        </p:txBody>
+      </p:sp>
+      <p:sp>
+        <p:nvSpPr>
+          <p:cNvPr id="4" name="Номер слайда 3"/>
+          <p:cNvSpPr>
+            <a:spLocks noGrp="1"/>
+          </p:cNvSpPr>
+          <p:nvPr>
+            <p:ph type="sldNum" sz="quarter" idx="10"/>
+          </p:nvPr>
+        </p:nvSpPr>
+        <p:spPr/>
+        <p:txBody>
+          <a:bodyPr/>
+          <a:lstStyle/>
+          <a:p>
+            <a:fld id="{F0F4E2F1-1521-4C3A-A563-2F7D19AB6E0B}" type="slidenum">
+              <a:rPr lang="en-US" smtClean="0"/>
+              <a:pPr/>
+              <a:t>15</a:t>
+            </a:fld>
+            <a:endParaRPr lang="en-US"/>
+          </a:p>
+        </p:txBody>
+      </p:sp>
+    </p:spTree>
+    <p:extLst>
+      <p:ext uri="{BB962C8B-B14F-4D97-AF65-F5344CB8AC3E}">
+        <p14:creationId xmlns:p14="http://schemas.microsoft.com/office/powerpoint/2010/main" val="3307431547"/>
+      </p:ext>
+    </p:extLst>
+  </p:cSld>
+  <p:clrMapOvr>
+    <a:masterClrMapping/>
+  </p:clrMapOvr>
+</p:notes>
+</file>
+
+<file path=ppt/notesSlides/notesSlide16.xml><?xml version="1.0" encoding="utf-8"?>
+<p:notes xmlns:a="http://schemas.openxmlformats.org/drawingml/2006/main" xmlns:r="http://schemas.openxmlformats.org/officeDocument/2006/relationships" xmlns:p="http://schemas.openxmlformats.org/presentationml/2006/main">
+  <p:cSld>
+    <p:spTree>
+      <p:nvGrpSpPr>
+        <p:cNvPr id="1" name=""/>
+        <p:cNvGrpSpPr/>
+        <p:nvPr/>
+      </p:nvGrpSpPr>
+      <p:grpSpPr>
+        <a:xfrm>
+          <a:off x="0" y="0"/>
+          <a:ext cx="0" cy="0"/>
+          <a:chOff x="0" y="0"/>
+          <a:chExt cx="0" cy="0"/>
+        </a:xfrm>
+      </p:grpSpPr>
+      <p:sp>
+        <p:nvSpPr>
+          <p:cNvPr id="2" name="Образ слайда 1"/>
+          <p:cNvSpPr>
+            <a:spLocks noGrp="1" noRot="1" noChangeAspect="1"/>
+          </p:cNvSpPr>
+          <p:nvPr>
+            <p:ph type="sldImg"/>
+          </p:nvPr>
+        </p:nvSpPr>
+        <p:spPr>
+          <a:xfrm>
+            <a:off x="685800" y="1143000"/>
+            <a:ext cx="5486400" cy="3086100"/>
+          </a:xfrm>
+        </p:spPr>
+      </p:sp>
+      <p:sp>
+        <p:nvSpPr>
+          <p:cNvPr id="3" name="Заметки 2"/>
+          <p:cNvSpPr>
+            <a:spLocks noGrp="1"/>
+          </p:cNvSpPr>
+          <p:nvPr>
+            <p:ph type="body" idx="1"/>
+          </p:nvPr>
+        </p:nvSpPr>
+        <p:spPr/>
+        <p:txBody>
+          <a:bodyPr/>
+          <a:lstStyle/>
+          <a:p>
+            <a:endParaRPr lang="ru-RU"/>
+          </a:p>
+        </p:txBody>
+      </p:sp>
+      <p:sp>
+        <p:nvSpPr>
+          <p:cNvPr id="4" name="Номер слайда 3"/>
+          <p:cNvSpPr>
+            <a:spLocks noGrp="1"/>
+          </p:cNvSpPr>
+          <p:nvPr>
+            <p:ph type="sldNum" sz="quarter" idx="10"/>
+          </p:nvPr>
+        </p:nvSpPr>
+        <p:spPr/>
+        <p:txBody>
+          <a:bodyPr/>
+          <a:lstStyle/>
+          <a:p>
+            <a:fld id="{F0F4E2F1-1521-4C3A-A563-2F7D19AB6E0B}" type="slidenum">
+              <a:rPr lang="en-US" smtClean="0"/>
+              <a:pPr/>
+              <a:t>16</a:t>
+            </a:fld>
+            <a:endParaRPr lang="en-US"/>
+          </a:p>
+        </p:txBody>
+      </p:sp>
+    </p:spTree>
+    <p:extLst>
+      <p:ext uri="{BB962C8B-B14F-4D97-AF65-F5344CB8AC3E}">
+        <p14:creationId xmlns:p14="http://schemas.microsoft.com/office/powerpoint/2010/main" val="683340580"/>
+      </p:ext>
+    </p:extLst>
+  </p:cSld>
+  <p:clrMapOvr>
+    <a:masterClrMapping/>
+  </p:clrMapOvr>
+</p:notes>
+</file>
+
+<file path=ppt/notesSlides/notesSlide17.xml><?xml version="1.0" encoding="utf-8"?>
+<p:notes xmlns:a="http://schemas.openxmlformats.org/drawingml/2006/main" xmlns:r="http://schemas.openxmlformats.org/officeDocument/2006/relationships" xmlns:p="http://schemas.openxmlformats.org/presentationml/2006/main">
+  <p:cSld>
+    <p:spTree>
+      <p:nvGrpSpPr>
+        <p:cNvPr id="1" name=""/>
+        <p:cNvGrpSpPr/>
+        <p:nvPr/>
+      </p:nvGrpSpPr>
+      <p:grpSpPr>
+        <a:xfrm>
+          <a:off x="0" y="0"/>
+          <a:ext cx="0" cy="0"/>
+          <a:chOff x="0" y="0"/>
+          <a:chExt cx="0" cy="0"/>
+        </a:xfrm>
+      </p:grpSpPr>
+      <p:sp>
+        <p:nvSpPr>
+          <p:cNvPr id="2" name="Образ слайда 1"/>
+          <p:cNvSpPr>
+            <a:spLocks noGrp="1" noRot="1" noChangeAspect="1"/>
+          </p:cNvSpPr>
+          <p:nvPr>
+            <p:ph type="sldImg"/>
+          </p:nvPr>
+        </p:nvSpPr>
+        <p:spPr>
+          <a:xfrm>
+            <a:off x="685800" y="1143000"/>
+            <a:ext cx="5486400" cy="3086100"/>
+          </a:xfrm>
+        </p:spPr>
+      </p:sp>
+      <p:sp>
+        <p:nvSpPr>
+          <p:cNvPr id="3" name="Заметки 2"/>
+          <p:cNvSpPr>
+            <a:spLocks noGrp="1"/>
+          </p:cNvSpPr>
+          <p:nvPr>
+            <p:ph type="body" idx="1"/>
+          </p:nvPr>
+        </p:nvSpPr>
+        <p:spPr/>
+        <p:txBody>
+          <a:bodyPr/>
+          <a:lstStyle/>
+          <a:p>
+            <a:endParaRPr lang="ru-RU"/>
+          </a:p>
+        </p:txBody>
+      </p:sp>
+      <p:sp>
+        <p:nvSpPr>
+          <p:cNvPr id="4" name="Номер слайда 3"/>
+          <p:cNvSpPr>
+            <a:spLocks noGrp="1"/>
+          </p:cNvSpPr>
+          <p:nvPr>
+            <p:ph type="sldNum" sz="quarter" idx="10"/>
+          </p:nvPr>
+        </p:nvSpPr>
+        <p:spPr/>
+        <p:txBody>
+          <a:bodyPr/>
+          <a:lstStyle/>
+          <a:p>
+            <a:fld id="{F0F4E2F1-1521-4C3A-A563-2F7D19AB6E0B}" type="slidenum">
+              <a:rPr lang="en-US" smtClean="0"/>
+              <a:pPr/>
+              <a:t>17</a:t>
+            </a:fld>
+            <a:endParaRPr lang="en-US"/>
+          </a:p>
+        </p:txBody>
+      </p:sp>
+    </p:spTree>
+    <p:extLst>
+      <p:ext uri="{BB962C8B-B14F-4D97-AF65-F5344CB8AC3E}">
+        <p14:creationId xmlns:p14="http://schemas.microsoft.com/office/powerpoint/2010/main" val="2730136808"/>
+      </p:ext>
+    </p:extLst>
+  </p:cSld>
+  <p:clrMapOvr>
+    <a:masterClrMapping/>
+  </p:clrMapOvr>
+</p:notes>
+</file>
+
+<file path=ppt/notesSlides/notesSlide18.xml><?xml version="1.0" encoding="utf-8"?>
+<p:notes xmlns:a="http://schemas.openxmlformats.org/drawingml/2006/main" xmlns:r="http://schemas.openxmlformats.org/officeDocument/2006/relationships" xmlns:p="http://schemas.openxmlformats.org/presentationml/2006/main">
+  <p:cSld>
+    <p:spTree>
+      <p:nvGrpSpPr>
+        <p:cNvPr id="1" name=""/>
+        <p:cNvGrpSpPr/>
+        <p:nvPr/>
+      </p:nvGrpSpPr>
+      <p:grpSpPr>
+        <a:xfrm>
+          <a:off x="0" y="0"/>
+          <a:ext cx="0" cy="0"/>
+          <a:chOff x="0" y="0"/>
+          <a:chExt cx="0" cy="0"/>
+        </a:xfrm>
+      </p:grpSpPr>
+      <p:sp>
+        <p:nvSpPr>
+          <p:cNvPr id="2" name="Образ слайда 1"/>
+          <p:cNvSpPr>
+            <a:spLocks noGrp="1" noRot="1" noChangeAspect="1"/>
+          </p:cNvSpPr>
+          <p:nvPr>
+            <p:ph type="sldImg"/>
+          </p:nvPr>
+        </p:nvSpPr>
+        <p:spPr>
+          <a:xfrm>
+            <a:off x="685800" y="1143000"/>
+            <a:ext cx="5486400" cy="3086100"/>
+          </a:xfrm>
+        </p:spPr>
+      </p:sp>
+      <p:sp>
+        <p:nvSpPr>
+          <p:cNvPr id="3" name="Заметки 2"/>
+          <p:cNvSpPr>
+            <a:spLocks noGrp="1"/>
+          </p:cNvSpPr>
+          <p:nvPr>
+            <p:ph type="body" idx="1"/>
+          </p:nvPr>
+        </p:nvSpPr>
+        <p:spPr/>
+        <p:txBody>
+          <a:bodyPr/>
+          <a:lstStyle/>
+          <a:p>
+            <a:endParaRPr lang="ru-RU"/>
+          </a:p>
+        </p:txBody>
+      </p:sp>
+      <p:sp>
+        <p:nvSpPr>
+          <p:cNvPr id="4" name="Номер слайда 3"/>
+          <p:cNvSpPr>
+            <a:spLocks noGrp="1"/>
+          </p:cNvSpPr>
+          <p:nvPr>
+            <p:ph type="sldNum" sz="quarter" idx="10"/>
+          </p:nvPr>
+        </p:nvSpPr>
+        <p:spPr/>
+        <p:txBody>
+          <a:bodyPr/>
+          <a:lstStyle/>
+          <a:p>
+            <a:fld id="{F0F4E2F1-1521-4C3A-A563-2F7D19AB6E0B}" type="slidenum">
+              <a:rPr lang="en-US" smtClean="0"/>
+              <a:pPr/>
+              <a:t>18</a:t>
+            </a:fld>
+            <a:endParaRPr lang="en-US"/>
+          </a:p>
+        </p:txBody>
+      </p:sp>
+    </p:spTree>
+    <p:extLst>
+      <p:ext uri="{BB962C8B-B14F-4D97-AF65-F5344CB8AC3E}">
+        <p14:creationId xmlns:p14="http://schemas.microsoft.com/office/powerpoint/2010/main" val="3224685376"/>
+      </p:ext>
+    </p:extLst>
+  </p:cSld>
+  <p:clrMapOvr>
+    <a:masterClrMapping/>
+  </p:clrMapOvr>
+</p:notes>
+</file>
+
+<file path=ppt/notesSlides/notesSlide19.xml><?xml version="1.0" encoding="utf-8"?>
+<p:notes xmlns:a="http://schemas.openxmlformats.org/drawingml/2006/main" xmlns:r="http://schemas.openxmlformats.org/officeDocument/2006/relationships" xmlns:p="http://schemas.openxmlformats.org/presentationml/2006/main">
+  <p:cSld>
+    <p:spTree>
+      <p:nvGrpSpPr>
+        <p:cNvPr id="1" name=""/>
+        <p:cNvGrpSpPr/>
+        <p:nvPr/>
+      </p:nvGrpSpPr>
+      <p:grpSpPr>
+        <a:xfrm>
+          <a:off x="0" y="0"/>
+          <a:ext cx="0" cy="0"/>
+          <a:chOff x="0" y="0"/>
+          <a:chExt cx="0" cy="0"/>
+        </a:xfrm>
+      </p:grpSpPr>
+      <p:sp>
+        <p:nvSpPr>
+          <p:cNvPr id="2" name="Образ слайда 1"/>
+          <p:cNvSpPr>
+            <a:spLocks noGrp="1" noRot="1" noChangeAspect="1"/>
+          </p:cNvSpPr>
+          <p:nvPr>
+            <p:ph type="sldImg"/>
+          </p:nvPr>
+        </p:nvSpPr>
+        <p:spPr>
+          <a:xfrm>
+            <a:off x="685800" y="1143000"/>
+            <a:ext cx="5486400" cy="3086100"/>
+          </a:xfrm>
+        </p:spPr>
+      </p:sp>
+      <p:sp>
+        <p:nvSpPr>
+          <p:cNvPr id="3" name="Заметки 2"/>
+          <p:cNvSpPr>
+            <a:spLocks noGrp="1"/>
+          </p:cNvSpPr>
+          <p:nvPr>
+            <p:ph type="body" idx="1"/>
+          </p:nvPr>
+        </p:nvSpPr>
+        <p:spPr/>
+        <p:txBody>
+          <a:bodyPr/>
+          <a:lstStyle/>
+          <a:p>
+            <a:endParaRPr lang="ru-RU"/>
+          </a:p>
+        </p:txBody>
+      </p:sp>
+      <p:sp>
+        <p:nvSpPr>
+          <p:cNvPr id="4" name="Номер слайда 3"/>
+          <p:cNvSpPr>
+            <a:spLocks noGrp="1"/>
+          </p:cNvSpPr>
+          <p:nvPr>
+            <p:ph type="sldNum" sz="quarter" idx="10"/>
+          </p:nvPr>
+        </p:nvSpPr>
+        <p:spPr/>
+        <p:txBody>
+          <a:bodyPr/>
+          <a:lstStyle/>
+          <a:p>
+            <a:fld id="{F0F4E2F1-1521-4C3A-A563-2F7D19AB6E0B}" type="slidenum">
+              <a:rPr lang="en-US" smtClean="0"/>
+              <a:pPr/>
+              <a:t>19</a:t>
+            </a:fld>
+            <a:endParaRPr lang="en-US"/>
+          </a:p>
+        </p:txBody>
+      </p:sp>
+    </p:spTree>
+    <p:extLst>
+      <p:ext uri="{BB962C8B-B14F-4D97-AF65-F5344CB8AC3E}">
+        <p14:creationId xmlns:p14="http://schemas.microsoft.com/office/powerpoint/2010/main" val="3229158456"/>
       </p:ext>
     </p:extLst>
   </p:cSld>
@@ -851,6 +1590,906 @@
 </p:notes>
 </file>
 
+<file path=ppt/notesSlides/notesSlide20.xml><?xml version="1.0" encoding="utf-8"?>
+<p:notes xmlns:a="http://schemas.openxmlformats.org/drawingml/2006/main" xmlns:r="http://schemas.openxmlformats.org/officeDocument/2006/relationships" xmlns:p="http://schemas.openxmlformats.org/presentationml/2006/main">
+  <p:cSld>
+    <p:spTree>
+      <p:nvGrpSpPr>
+        <p:cNvPr id="1" name=""/>
+        <p:cNvGrpSpPr/>
+        <p:nvPr/>
+      </p:nvGrpSpPr>
+      <p:grpSpPr>
+        <a:xfrm>
+          <a:off x="0" y="0"/>
+          <a:ext cx="0" cy="0"/>
+          <a:chOff x="0" y="0"/>
+          <a:chExt cx="0" cy="0"/>
+        </a:xfrm>
+      </p:grpSpPr>
+      <p:sp>
+        <p:nvSpPr>
+          <p:cNvPr id="2" name="Образ слайда 1"/>
+          <p:cNvSpPr>
+            <a:spLocks noGrp="1" noRot="1" noChangeAspect="1"/>
+          </p:cNvSpPr>
+          <p:nvPr>
+            <p:ph type="sldImg"/>
+          </p:nvPr>
+        </p:nvSpPr>
+        <p:spPr>
+          <a:xfrm>
+            <a:off x="685800" y="1143000"/>
+            <a:ext cx="5486400" cy="3086100"/>
+          </a:xfrm>
+        </p:spPr>
+      </p:sp>
+      <p:sp>
+        <p:nvSpPr>
+          <p:cNvPr id="3" name="Заметки 2"/>
+          <p:cNvSpPr>
+            <a:spLocks noGrp="1"/>
+          </p:cNvSpPr>
+          <p:nvPr>
+            <p:ph type="body" idx="1"/>
+          </p:nvPr>
+        </p:nvSpPr>
+        <p:spPr/>
+        <p:txBody>
+          <a:bodyPr/>
+          <a:lstStyle/>
+          <a:p>
+            <a:endParaRPr lang="ru-RU"/>
+          </a:p>
+        </p:txBody>
+      </p:sp>
+      <p:sp>
+        <p:nvSpPr>
+          <p:cNvPr id="4" name="Номер слайда 3"/>
+          <p:cNvSpPr>
+            <a:spLocks noGrp="1"/>
+          </p:cNvSpPr>
+          <p:nvPr>
+            <p:ph type="sldNum" sz="quarter" idx="10"/>
+          </p:nvPr>
+        </p:nvSpPr>
+        <p:spPr/>
+        <p:txBody>
+          <a:bodyPr/>
+          <a:lstStyle/>
+          <a:p>
+            <a:fld id="{F0F4E2F1-1521-4C3A-A563-2F7D19AB6E0B}" type="slidenum">
+              <a:rPr lang="en-US" smtClean="0"/>
+              <a:pPr/>
+              <a:t>20</a:t>
+            </a:fld>
+            <a:endParaRPr lang="en-US"/>
+          </a:p>
+        </p:txBody>
+      </p:sp>
+    </p:spTree>
+    <p:extLst>
+      <p:ext uri="{BB962C8B-B14F-4D97-AF65-F5344CB8AC3E}">
+        <p14:creationId xmlns:p14="http://schemas.microsoft.com/office/powerpoint/2010/main" val="2779556295"/>
+      </p:ext>
+    </p:extLst>
+  </p:cSld>
+  <p:clrMapOvr>
+    <a:masterClrMapping/>
+  </p:clrMapOvr>
+</p:notes>
+</file>
+
+<file path=ppt/notesSlides/notesSlide21.xml><?xml version="1.0" encoding="utf-8"?>
+<p:notes xmlns:a="http://schemas.openxmlformats.org/drawingml/2006/main" xmlns:r="http://schemas.openxmlformats.org/officeDocument/2006/relationships" xmlns:p="http://schemas.openxmlformats.org/presentationml/2006/main">
+  <p:cSld>
+    <p:spTree>
+      <p:nvGrpSpPr>
+        <p:cNvPr id="1" name=""/>
+        <p:cNvGrpSpPr/>
+        <p:nvPr/>
+      </p:nvGrpSpPr>
+      <p:grpSpPr>
+        <a:xfrm>
+          <a:off x="0" y="0"/>
+          <a:ext cx="0" cy="0"/>
+          <a:chOff x="0" y="0"/>
+          <a:chExt cx="0" cy="0"/>
+        </a:xfrm>
+      </p:grpSpPr>
+      <p:sp>
+        <p:nvSpPr>
+          <p:cNvPr id="2" name="Образ слайда 1"/>
+          <p:cNvSpPr>
+            <a:spLocks noGrp="1" noRot="1" noChangeAspect="1"/>
+          </p:cNvSpPr>
+          <p:nvPr>
+            <p:ph type="sldImg"/>
+          </p:nvPr>
+        </p:nvSpPr>
+        <p:spPr>
+          <a:xfrm>
+            <a:off x="685800" y="1143000"/>
+            <a:ext cx="5486400" cy="3086100"/>
+          </a:xfrm>
+        </p:spPr>
+      </p:sp>
+      <p:sp>
+        <p:nvSpPr>
+          <p:cNvPr id="3" name="Заметки 2"/>
+          <p:cNvSpPr>
+            <a:spLocks noGrp="1"/>
+          </p:cNvSpPr>
+          <p:nvPr>
+            <p:ph type="body" idx="1"/>
+          </p:nvPr>
+        </p:nvSpPr>
+        <p:spPr/>
+        <p:txBody>
+          <a:bodyPr/>
+          <a:lstStyle/>
+          <a:p>
+            <a:endParaRPr lang="ru-RU"/>
+          </a:p>
+        </p:txBody>
+      </p:sp>
+      <p:sp>
+        <p:nvSpPr>
+          <p:cNvPr id="4" name="Номер слайда 3"/>
+          <p:cNvSpPr>
+            <a:spLocks noGrp="1"/>
+          </p:cNvSpPr>
+          <p:nvPr>
+            <p:ph type="sldNum" sz="quarter" idx="10"/>
+          </p:nvPr>
+        </p:nvSpPr>
+        <p:spPr/>
+        <p:txBody>
+          <a:bodyPr/>
+          <a:lstStyle/>
+          <a:p>
+            <a:fld id="{F0F4E2F1-1521-4C3A-A563-2F7D19AB6E0B}" type="slidenum">
+              <a:rPr lang="en-US" smtClean="0"/>
+              <a:pPr/>
+              <a:t>21</a:t>
+            </a:fld>
+            <a:endParaRPr lang="en-US"/>
+          </a:p>
+        </p:txBody>
+      </p:sp>
+    </p:spTree>
+    <p:extLst>
+      <p:ext uri="{BB962C8B-B14F-4D97-AF65-F5344CB8AC3E}">
+        <p14:creationId xmlns:p14="http://schemas.microsoft.com/office/powerpoint/2010/main" val="2386722809"/>
+      </p:ext>
+    </p:extLst>
+  </p:cSld>
+  <p:clrMapOvr>
+    <a:masterClrMapping/>
+  </p:clrMapOvr>
+</p:notes>
+</file>
+
+<file path=ppt/notesSlides/notesSlide22.xml><?xml version="1.0" encoding="utf-8"?>
+<p:notes xmlns:a="http://schemas.openxmlformats.org/drawingml/2006/main" xmlns:r="http://schemas.openxmlformats.org/officeDocument/2006/relationships" xmlns:p="http://schemas.openxmlformats.org/presentationml/2006/main">
+  <p:cSld>
+    <p:spTree>
+      <p:nvGrpSpPr>
+        <p:cNvPr id="1" name=""/>
+        <p:cNvGrpSpPr/>
+        <p:nvPr/>
+      </p:nvGrpSpPr>
+      <p:grpSpPr>
+        <a:xfrm>
+          <a:off x="0" y="0"/>
+          <a:ext cx="0" cy="0"/>
+          <a:chOff x="0" y="0"/>
+          <a:chExt cx="0" cy="0"/>
+        </a:xfrm>
+      </p:grpSpPr>
+      <p:sp>
+        <p:nvSpPr>
+          <p:cNvPr id="2" name="Образ слайда 1"/>
+          <p:cNvSpPr>
+            <a:spLocks noGrp="1" noRot="1" noChangeAspect="1"/>
+          </p:cNvSpPr>
+          <p:nvPr>
+            <p:ph type="sldImg"/>
+          </p:nvPr>
+        </p:nvSpPr>
+        <p:spPr>
+          <a:xfrm>
+            <a:off x="685800" y="1143000"/>
+            <a:ext cx="5486400" cy="3086100"/>
+          </a:xfrm>
+        </p:spPr>
+      </p:sp>
+      <p:sp>
+        <p:nvSpPr>
+          <p:cNvPr id="3" name="Заметки 2"/>
+          <p:cNvSpPr>
+            <a:spLocks noGrp="1"/>
+          </p:cNvSpPr>
+          <p:nvPr>
+            <p:ph type="body" idx="1"/>
+          </p:nvPr>
+        </p:nvSpPr>
+        <p:spPr/>
+        <p:txBody>
+          <a:bodyPr/>
+          <a:lstStyle/>
+          <a:p>
+            <a:endParaRPr lang="ru-RU"/>
+          </a:p>
+        </p:txBody>
+      </p:sp>
+      <p:sp>
+        <p:nvSpPr>
+          <p:cNvPr id="4" name="Номер слайда 3"/>
+          <p:cNvSpPr>
+            <a:spLocks noGrp="1"/>
+          </p:cNvSpPr>
+          <p:nvPr>
+            <p:ph type="sldNum" sz="quarter" idx="10"/>
+          </p:nvPr>
+        </p:nvSpPr>
+        <p:spPr/>
+        <p:txBody>
+          <a:bodyPr/>
+          <a:lstStyle/>
+          <a:p>
+            <a:fld id="{F0F4E2F1-1521-4C3A-A563-2F7D19AB6E0B}" type="slidenum">
+              <a:rPr lang="en-US" smtClean="0"/>
+              <a:pPr/>
+              <a:t>22</a:t>
+            </a:fld>
+            <a:endParaRPr lang="en-US"/>
+          </a:p>
+        </p:txBody>
+      </p:sp>
+    </p:spTree>
+    <p:extLst>
+      <p:ext uri="{BB962C8B-B14F-4D97-AF65-F5344CB8AC3E}">
+        <p14:creationId xmlns:p14="http://schemas.microsoft.com/office/powerpoint/2010/main" val="4007908099"/>
+      </p:ext>
+    </p:extLst>
+  </p:cSld>
+  <p:clrMapOvr>
+    <a:masterClrMapping/>
+  </p:clrMapOvr>
+</p:notes>
+</file>
+
+<file path=ppt/notesSlides/notesSlide23.xml><?xml version="1.0" encoding="utf-8"?>
+<p:notes xmlns:a="http://schemas.openxmlformats.org/drawingml/2006/main" xmlns:r="http://schemas.openxmlformats.org/officeDocument/2006/relationships" xmlns:p="http://schemas.openxmlformats.org/presentationml/2006/main">
+  <p:cSld>
+    <p:spTree>
+      <p:nvGrpSpPr>
+        <p:cNvPr id="1" name=""/>
+        <p:cNvGrpSpPr/>
+        <p:nvPr/>
+      </p:nvGrpSpPr>
+      <p:grpSpPr>
+        <a:xfrm>
+          <a:off x="0" y="0"/>
+          <a:ext cx="0" cy="0"/>
+          <a:chOff x="0" y="0"/>
+          <a:chExt cx="0" cy="0"/>
+        </a:xfrm>
+      </p:grpSpPr>
+      <p:sp>
+        <p:nvSpPr>
+          <p:cNvPr id="2" name="Образ слайда 1"/>
+          <p:cNvSpPr>
+            <a:spLocks noGrp="1" noRot="1" noChangeAspect="1"/>
+          </p:cNvSpPr>
+          <p:nvPr>
+            <p:ph type="sldImg"/>
+          </p:nvPr>
+        </p:nvSpPr>
+        <p:spPr>
+          <a:xfrm>
+            <a:off x="685800" y="1143000"/>
+            <a:ext cx="5486400" cy="3086100"/>
+          </a:xfrm>
+        </p:spPr>
+      </p:sp>
+      <p:sp>
+        <p:nvSpPr>
+          <p:cNvPr id="3" name="Заметки 2"/>
+          <p:cNvSpPr>
+            <a:spLocks noGrp="1"/>
+          </p:cNvSpPr>
+          <p:nvPr>
+            <p:ph type="body" idx="1"/>
+          </p:nvPr>
+        </p:nvSpPr>
+        <p:spPr/>
+        <p:txBody>
+          <a:bodyPr/>
+          <a:lstStyle/>
+          <a:p>
+            <a:endParaRPr lang="ru-RU"/>
+          </a:p>
+        </p:txBody>
+      </p:sp>
+      <p:sp>
+        <p:nvSpPr>
+          <p:cNvPr id="4" name="Номер слайда 3"/>
+          <p:cNvSpPr>
+            <a:spLocks noGrp="1"/>
+          </p:cNvSpPr>
+          <p:nvPr>
+            <p:ph type="sldNum" sz="quarter" idx="10"/>
+          </p:nvPr>
+        </p:nvSpPr>
+        <p:spPr/>
+        <p:txBody>
+          <a:bodyPr/>
+          <a:lstStyle/>
+          <a:p>
+            <a:fld id="{F0F4E2F1-1521-4C3A-A563-2F7D19AB6E0B}" type="slidenum">
+              <a:rPr lang="en-US" smtClean="0"/>
+              <a:pPr/>
+              <a:t>23</a:t>
+            </a:fld>
+            <a:endParaRPr lang="en-US"/>
+          </a:p>
+        </p:txBody>
+      </p:sp>
+    </p:spTree>
+    <p:extLst>
+      <p:ext uri="{BB962C8B-B14F-4D97-AF65-F5344CB8AC3E}">
+        <p14:creationId xmlns:p14="http://schemas.microsoft.com/office/powerpoint/2010/main" val="4036591434"/>
+      </p:ext>
+    </p:extLst>
+  </p:cSld>
+  <p:clrMapOvr>
+    <a:masterClrMapping/>
+  </p:clrMapOvr>
+</p:notes>
+</file>
+
+<file path=ppt/notesSlides/notesSlide24.xml><?xml version="1.0" encoding="utf-8"?>
+<p:notes xmlns:a="http://schemas.openxmlformats.org/drawingml/2006/main" xmlns:r="http://schemas.openxmlformats.org/officeDocument/2006/relationships" xmlns:p="http://schemas.openxmlformats.org/presentationml/2006/main">
+  <p:cSld>
+    <p:spTree>
+      <p:nvGrpSpPr>
+        <p:cNvPr id="1" name=""/>
+        <p:cNvGrpSpPr/>
+        <p:nvPr/>
+      </p:nvGrpSpPr>
+      <p:grpSpPr>
+        <a:xfrm>
+          <a:off x="0" y="0"/>
+          <a:ext cx="0" cy="0"/>
+          <a:chOff x="0" y="0"/>
+          <a:chExt cx="0" cy="0"/>
+        </a:xfrm>
+      </p:grpSpPr>
+      <p:sp>
+        <p:nvSpPr>
+          <p:cNvPr id="2" name="Образ слайда 1"/>
+          <p:cNvSpPr>
+            <a:spLocks noGrp="1" noRot="1" noChangeAspect="1"/>
+          </p:cNvSpPr>
+          <p:nvPr>
+            <p:ph type="sldImg"/>
+          </p:nvPr>
+        </p:nvSpPr>
+        <p:spPr>
+          <a:xfrm>
+            <a:off x="685800" y="1143000"/>
+            <a:ext cx="5486400" cy="3086100"/>
+          </a:xfrm>
+        </p:spPr>
+      </p:sp>
+      <p:sp>
+        <p:nvSpPr>
+          <p:cNvPr id="3" name="Заметки 2"/>
+          <p:cNvSpPr>
+            <a:spLocks noGrp="1"/>
+          </p:cNvSpPr>
+          <p:nvPr>
+            <p:ph type="body" idx="1"/>
+          </p:nvPr>
+        </p:nvSpPr>
+        <p:spPr/>
+        <p:txBody>
+          <a:bodyPr/>
+          <a:lstStyle/>
+          <a:p>
+            <a:endParaRPr lang="ru-RU"/>
+          </a:p>
+        </p:txBody>
+      </p:sp>
+      <p:sp>
+        <p:nvSpPr>
+          <p:cNvPr id="4" name="Номер слайда 3"/>
+          <p:cNvSpPr>
+            <a:spLocks noGrp="1"/>
+          </p:cNvSpPr>
+          <p:nvPr>
+            <p:ph type="sldNum" sz="quarter" idx="10"/>
+          </p:nvPr>
+        </p:nvSpPr>
+        <p:spPr/>
+        <p:txBody>
+          <a:bodyPr/>
+          <a:lstStyle/>
+          <a:p>
+            <a:fld id="{F0F4E2F1-1521-4C3A-A563-2F7D19AB6E0B}" type="slidenum">
+              <a:rPr lang="en-US" smtClean="0"/>
+              <a:pPr/>
+              <a:t>24</a:t>
+            </a:fld>
+            <a:endParaRPr lang="en-US"/>
+          </a:p>
+        </p:txBody>
+      </p:sp>
+    </p:spTree>
+    <p:extLst>
+      <p:ext uri="{BB962C8B-B14F-4D97-AF65-F5344CB8AC3E}">
+        <p14:creationId xmlns:p14="http://schemas.microsoft.com/office/powerpoint/2010/main" val="2767394975"/>
+      </p:ext>
+    </p:extLst>
+  </p:cSld>
+  <p:clrMapOvr>
+    <a:masterClrMapping/>
+  </p:clrMapOvr>
+</p:notes>
+</file>
+
+<file path=ppt/notesSlides/notesSlide25.xml><?xml version="1.0" encoding="utf-8"?>
+<p:notes xmlns:a="http://schemas.openxmlformats.org/drawingml/2006/main" xmlns:r="http://schemas.openxmlformats.org/officeDocument/2006/relationships" xmlns:p="http://schemas.openxmlformats.org/presentationml/2006/main">
+  <p:cSld>
+    <p:spTree>
+      <p:nvGrpSpPr>
+        <p:cNvPr id="1" name=""/>
+        <p:cNvGrpSpPr/>
+        <p:nvPr/>
+      </p:nvGrpSpPr>
+      <p:grpSpPr>
+        <a:xfrm>
+          <a:off x="0" y="0"/>
+          <a:ext cx="0" cy="0"/>
+          <a:chOff x="0" y="0"/>
+          <a:chExt cx="0" cy="0"/>
+        </a:xfrm>
+      </p:grpSpPr>
+      <p:sp>
+        <p:nvSpPr>
+          <p:cNvPr id="2" name="Образ слайда 1"/>
+          <p:cNvSpPr>
+            <a:spLocks noGrp="1" noRot="1" noChangeAspect="1"/>
+          </p:cNvSpPr>
+          <p:nvPr>
+            <p:ph type="sldImg"/>
+          </p:nvPr>
+        </p:nvSpPr>
+        <p:spPr>
+          <a:xfrm>
+            <a:off x="685800" y="1143000"/>
+            <a:ext cx="5486400" cy="3086100"/>
+          </a:xfrm>
+        </p:spPr>
+      </p:sp>
+      <p:sp>
+        <p:nvSpPr>
+          <p:cNvPr id="3" name="Заметки 2"/>
+          <p:cNvSpPr>
+            <a:spLocks noGrp="1"/>
+          </p:cNvSpPr>
+          <p:nvPr>
+            <p:ph type="body" idx="1"/>
+          </p:nvPr>
+        </p:nvSpPr>
+        <p:spPr/>
+        <p:txBody>
+          <a:bodyPr/>
+          <a:lstStyle/>
+          <a:p>
+            <a:endParaRPr lang="ru-RU"/>
+          </a:p>
+        </p:txBody>
+      </p:sp>
+      <p:sp>
+        <p:nvSpPr>
+          <p:cNvPr id="4" name="Номер слайда 3"/>
+          <p:cNvSpPr>
+            <a:spLocks noGrp="1"/>
+          </p:cNvSpPr>
+          <p:nvPr>
+            <p:ph type="sldNum" sz="quarter" idx="10"/>
+          </p:nvPr>
+        </p:nvSpPr>
+        <p:spPr/>
+        <p:txBody>
+          <a:bodyPr/>
+          <a:lstStyle/>
+          <a:p>
+            <a:fld id="{F0F4E2F1-1521-4C3A-A563-2F7D19AB6E0B}" type="slidenum">
+              <a:rPr lang="en-US" smtClean="0"/>
+              <a:pPr/>
+              <a:t>25</a:t>
+            </a:fld>
+            <a:endParaRPr lang="en-US"/>
+          </a:p>
+        </p:txBody>
+      </p:sp>
+    </p:spTree>
+    <p:extLst>
+      <p:ext uri="{BB962C8B-B14F-4D97-AF65-F5344CB8AC3E}">
+        <p14:creationId xmlns:p14="http://schemas.microsoft.com/office/powerpoint/2010/main" val="4007332049"/>
+      </p:ext>
+    </p:extLst>
+  </p:cSld>
+  <p:clrMapOvr>
+    <a:masterClrMapping/>
+  </p:clrMapOvr>
+</p:notes>
+</file>
+
+<file path=ppt/notesSlides/notesSlide26.xml><?xml version="1.0" encoding="utf-8"?>
+<p:notes xmlns:a="http://schemas.openxmlformats.org/drawingml/2006/main" xmlns:r="http://schemas.openxmlformats.org/officeDocument/2006/relationships" xmlns:p="http://schemas.openxmlformats.org/presentationml/2006/main">
+  <p:cSld>
+    <p:spTree>
+      <p:nvGrpSpPr>
+        <p:cNvPr id="1" name=""/>
+        <p:cNvGrpSpPr/>
+        <p:nvPr/>
+      </p:nvGrpSpPr>
+      <p:grpSpPr>
+        <a:xfrm>
+          <a:off x="0" y="0"/>
+          <a:ext cx="0" cy="0"/>
+          <a:chOff x="0" y="0"/>
+          <a:chExt cx="0" cy="0"/>
+        </a:xfrm>
+      </p:grpSpPr>
+      <p:sp>
+        <p:nvSpPr>
+          <p:cNvPr id="2" name="Образ слайда 1"/>
+          <p:cNvSpPr>
+            <a:spLocks noGrp="1" noRot="1" noChangeAspect="1"/>
+          </p:cNvSpPr>
+          <p:nvPr>
+            <p:ph type="sldImg"/>
+          </p:nvPr>
+        </p:nvSpPr>
+        <p:spPr>
+          <a:xfrm>
+            <a:off x="685800" y="1143000"/>
+            <a:ext cx="5486400" cy="3086100"/>
+          </a:xfrm>
+        </p:spPr>
+      </p:sp>
+      <p:sp>
+        <p:nvSpPr>
+          <p:cNvPr id="3" name="Заметки 2"/>
+          <p:cNvSpPr>
+            <a:spLocks noGrp="1"/>
+          </p:cNvSpPr>
+          <p:nvPr>
+            <p:ph type="body" idx="1"/>
+          </p:nvPr>
+        </p:nvSpPr>
+        <p:spPr/>
+        <p:txBody>
+          <a:bodyPr/>
+          <a:lstStyle/>
+          <a:p>
+            <a:endParaRPr lang="ru-RU"/>
+          </a:p>
+        </p:txBody>
+      </p:sp>
+      <p:sp>
+        <p:nvSpPr>
+          <p:cNvPr id="4" name="Номер слайда 3"/>
+          <p:cNvSpPr>
+            <a:spLocks noGrp="1"/>
+          </p:cNvSpPr>
+          <p:nvPr>
+            <p:ph type="sldNum" sz="quarter" idx="10"/>
+          </p:nvPr>
+        </p:nvSpPr>
+        <p:spPr/>
+        <p:txBody>
+          <a:bodyPr/>
+          <a:lstStyle/>
+          <a:p>
+            <a:fld id="{F0F4E2F1-1521-4C3A-A563-2F7D19AB6E0B}" type="slidenum">
+              <a:rPr lang="en-US" smtClean="0"/>
+              <a:pPr/>
+              <a:t>26</a:t>
+            </a:fld>
+            <a:endParaRPr lang="en-US"/>
+          </a:p>
+        </p:txBody>
+      </p:sp>
+    </p:spTree>
+    <p:extLst>
+      <p:ext uri="{BB962C8B-B14F-4D97-AF65-F5344CB8AC3E}">
+        <p14:creationId xmlns:p14="http://schemas.microsoft.com/office/powerpoint/2010/main" val="982358159"/>
+      </p:ext>
+    </p:extLst>
+  </p:cSld>
+  <p:clrMapOvr>
+    <a:masterClrMapping/>
+  </p:clrMapOvr>
+</p:notes>
+</file>
+
+<file path=ppt/notesSlides/notesSlide27.xml><?xml version="1.0" encoding="utf-8"?>
+<p:notes xmlns:a="http://schemas.openxmlformats.org/drawingml/2006/main" xmlns:r="http://schemas.openxmlformats.org/officeDocument/2006/relationships" xmlns:p="http://schemas.openxmlformats.org/presentationml/2006/main">
+  <p:cSld>
+    <p:spTree>
+      <p:nvGrpSpPr>
+        <p:cNvPr id="1" name=""/>
+        <p:cNvGrpSpPr/>
+        <p:nvPr/>
+      </p:nvGrpSpPr>
+      <p:grpSpPr>
+        <a:xfrm>
+          <a:off x="0" y="0"/>
+          <a:ext cx="0" cy="0"/>
+          <a:chOff x="0" y="0"/>
+          <a:chExt cx="0" cy="0"/>
+        </a:xfrm>
+      </p:grpSpPr>
+      <p:sp>
+        <p:nvSpPr>
+          <p:cNvPr id="2" name="Образ слайда 1"/>
+          <p:cNvSpPr>
+            <a:spLocks noGrp="1" noRot="1" noChangeAspect="1"/>
+          </p:cNvSpPr>
+          <p:nvPr>
+            <p:ph type="sldImg"/>
+          </p:nvPr>
+        </p:nvSpPr>
+        <p:spPr>
+          <a:xfrm>
+            <a:off x="685800" y="1143000"/>
+            <a:ext cx="5486400" cy="3086100"/>
+          </a:xfrm>
+        </p:spPr>
+      </p:sp>
+      <p:sp>
+        <p:nvSpPr>
+          <p:cNvPr id="3" name="Заметки 2"/>
+          <p:cNvSpPr>
+            <a:spLocks noGrp="1"/>
+          </p:cNvSpPr>
+          <p:nvPr>
+            <p:ph type="body" idx="1"/>
+          </p:nvPr>
+        </p:nvSpPr>
+        <p:spPr/>
+        <p:txBody>
+          <a:bodyPr/>
+          <a:lstStyle/>
+          <a:p>
+            <a:endParaRPr lang="ru-RU"/>
+          </a:p>
+        </p:txBody>
+      </p:sp>
+      <p:sp>
+        <p:nvSpPr>
+          <p:cNvPr id="4" name="Номер слайда 3"/>
+          <p:cNvSpPr>
+            <a:spLocks noGrp="1"/>
+          </p:cNvSpPr>
+          <p:nvPr>
+            <p:ph type="sldNum" sz="quarter" idx="10"/>
+          </p:nvPr>
+        </p:nvSpPr>
+        <p:spPr/>
+        <p:txBody>
+          <a:bodyPr/>
+          <a:lstStyle/>
+          <a:p>
+            <a:fld id="{F0F4E2F1-1521-4C3A-A563-2F7D19AB6E0B}" type="slidenum">
+              <a:rPr lang="en-US" smtClean="0"/>
+              <a:pPr/>
+              <a:t>27</a:t>
+            </a:fld>
+            <a:endParaRPr lang="en-US"/>
+          </a:p>
+        </p:txBody>
+      </p:sp>
+    </p:spTree>
+    <p:extLst>
+      <p:ext uri="{BB962C8B-B14F-4D97-AF65-F5344CB8AC3E}">
+        <p14:creationId xmlns:p14="http://schemas.microsoft.com/office/powerpoint/2010/main" val="2690457418"/>
+      </p:ext>
+    </p:extLst>
+  </p:cSld>
+  <p:clrMapOvr>
+    <a:masterClrMapping/>
+  </p:clrMapOvr>
+</p:notes>
+</file>
+
+<file path=ppt/notesSlides/notesSlide28.xml><?xml version="1.0" encoding="utf-8"?>
+<p:notes xmlns:a="http://schemas.openxmlformats.org/drawingml/2006/main" xmlns:r="http://schemas.openxmlformats.org/officeDocument/2006/relationships" xmlns:p="http://schemas.openxmlformats.org/presentationml/2006/main">
+  <p:cSld>
+    <p:spTree>
+      <p:nvGrpSpPr>
+        <p:cNvPr id="1" name=""/>
+        <p:cNvGrpSpPr/>
+        <p:nvPr/>
+      </p:nvGrpSpPr>
+      <p:grpSpPr>
+        <a:xfrm>
+          <a:off x="0" y="0"/>
+          <a:ext cx="0" cy="0"/>
+          <a:chOff x="0" y="0"/>
+          <a:chExt cx="0" cy="0"/>
+        </a:xfrm>
+      </p:grpSpPr>
+      <p:sp>
+        <p:nvSpPr>
+          <p:cNvPr id="2" name="Образ слайда 1"/>
+          <p:cNvSpPr>
+            <a:spLocks noGrp="1" noRot="1" noChangeAspect="1"/>
+          </p:cNvSpPr>
+          <p:nvPr>
+            <p:ph type="sldImg"/>
+          </p:nvPr>
+        </p:nvSpPr>
+        <p:spPr>
+          <a:xfrm>
+            <a:off x="685800" y="1143000"/>
+            <a:ext cx="5486400" cy="3086100"/>
+          </a:xfrm>
+        </p:spPr>
+      </p:sp>
+      <p:sp>
+        <p:nvSpPr>
+          <p:cNvPr id="3" name="Заметки 2"/>
+          <p:cNvSpPr>
+            <a:spLocks noGrp="1"/>
+          </p:cNvSpPr>
+          <p:nvPr>
+            <p:ph type="body" idx="1"/>
+          </p:nvPr>
+        </p:nvSpPr>
+        <p:spPr/>
+        <p:txBody>
+          <a:bodyPr/>
+          <a:lstStyle/>
+          <a:p>
+            <a:endParaRPr lang="ru-RU"/>
+          </a:p>
+        </p:txBody>
+      </p:sp>
+      <p:sp>
+        <p:nvSpPr>
+          <p:cNvPr id="4" name="Номер слайда 3"/>
+          <p:cNvSpPr>
+            <a:spLocks noGrp="1"/>
+          </p:cNvSpPr>
+          <p:nvPr>
+            <p:ph type="sldNum" sz="quarter" idx="10"/>
+          </p:nvPr>
+        </p:nvSpPr>
+        <p:spPr/>
+        <p:txBody>
+          <a:bodyPr/>
+          <a:lstStyle/>
+          <a:p>
+            <a:fld id="{F0F4E2F1-1521-4C3A-A563-2F7D19AB6E0B}" type="slidenum">
+              <a:rPr lang="en-US" smtClean="0"/>
+              <a:pPr/>
+              <a:t>28</a:t>
+            </a:fld>
+            <a:endParaRPr lang="en-US"/>
+          </a:p>
+        </p:txBody>
+      </p:sp>
+    </p:spTree>
+    <p:extLst>
+      <p:ext uri="{BB962C8B-B14F-4D97-AF65-F5344CB8AC3E}">
+        <p14:creationId xmlns:p14="http://schemas.microsoft.com/office/powerpoint/2010/main" val="464693557"/>
+      </p:ext>
+    </p:extLst>
+  </p:cSld>
+  <p:clrMapOvr>
+    <a:masterClrMapping/>
+  </p:clrMapOvr>
+</p:notes>
+</file>
+
+<file path=ppt/notesSlides/notesSlide29.xml><?xml version="1.0" encoding="utf-8"?>
+<p:notes xmlns:a="http://schemas.openxmlformats.org/drawingml/2006/main" xmlns:r="http://schemas.openxmlformats.org/officeDocument/2006/relationships" xmlns:p="http://schemas.openxmlformats.org/presentationml/2006/main">
+  <p:cSld>
+    <p:spTree>
+      <p:nvGrpSpPr>
+        <p:cNvPr id="1" name=""/>
+        <p:cNvGrpSpPr/>
+        <p:nvPr/>
+      </p:nvGrpSpPr>
+      <p:grpSpPr>
+        <a:xfrm>
+          <a:off x="0" y="0"/>
+          <a:ext cx="0" cy="0"/>
+          <a:chOff x="0" y="0"/>
+          <a:chExt cx="0" cy="0"/>
+        </a:xfrm>
+      </p:grpSpPr>
+      <p:sp>
+        <p:nvSpPr>
+          <p:cNvPr id="2" name="Образ слайда 1"/>
+          <p:cNvSpPr>
+            <a:spLocks noGrp="1" noRot="1" noChangeAspect="1"/>
+          </p:cNvSpPr>
+          <p:nvPr>
+            <p:ph type="sldImg"/>
+          </p:nvPr>
+        </p:nvSpPr>
+        <p:spPr>
+          <a:xfrm>
+            <a:off x="685800" y="1143000"/>
+            <a:ext cx="5486400" cy="3086100"/>
+          </a:xfrm>
+        </p:spPr>
+      </p:sp>
+      <p:sp>
+        <p:nvSpPr>
+          <p:cNvPr id="3" name="Заметки 2"/>
+          <p:cNvSpPr>
+            <a:spLocks noGrp="1"/>
+          </p:cNvSpPr>
+          <p:nvPr>
+            <p:ph type="body" idx="1"/>
+          </p:nvPr>
+        </p:nvSpPr>
+        <p:spPr/>
+        <p:txBody>
+          <a:bodyPr/>
+          <a:lstStyle/>
+          <a:p>
+            <a:endParaRPr lang="ru-RU"/>
+          </a:p>
+        </p:txBody>
+      </p:sp>
+      <p:sp>
+        <p:nvSpPr>
+          <p:cNvPr id="4" name="Номер слайда 3"/>
+          <p:cNvSpPr>
+            <a:spLocks noGrp="1"/>
+          </p:cNvSpPr>
+          <p:nvPr>
+            <p:ph type="sldNum" sz="quarter" idx="10"/>
+          </p:nvPr>
+        </p:nvSpPr>
+        <p:spPr/>
+        <p:txBody>
+          <a:bodyPr/>
+          <a:lstStyle/>
+          <a:p>
+            <a:fld id="{F0F4E2F1-1521-4C3A-A563-2F7D19AB6E0B}" type="slidenum">
+              <a:rPr lang="en-US" smtClean="0"/>
+              <a:pPr/>
+              <a:t>29</a:t>
+            </a:fld>
+            <a:endParaRPr lang="en-US"/>
+          </a:p>
+        </p:txBody>
+      </p:sp>
+    </p:spTree>
+    <p:extLst>
+      <p:ext uri="{BB962C8B-B14F-4D97-AF65-F5344CB8AC3E}">
+        <p14:creationId xmlns:p14="http://schemas.microsoft.com/office/powerpoint/2010/main" val="2177731129"/>
+      </p:ext>
+    </p:extLst>
+  </p:cSld>
+  <p:clrMapOvr>
+    <a:masterClrMapping/>
+  </p:clrMapOvr>
+</p:notes>
+</file>
+
 <file path=ppt/notesSlides/notesSlide3.xml><?xml version="1.0" encoding="utf-8"?>
 <p:notes xmlns:a="http://schemas.openxmlformats.org/drawingml/2006/main" xmlns:r="http://schemas.openxmlformats.org/officeDocument/2006/relationships" xmlns:p="http://schemas.openxmlformats.org/presentationml/2006/main">
   <p:cSld>
@@ -932,6 +2571,96 @@
     <p:extLst>
       <p:ext uri="{BB962C8B-B14F-4D97-AF65-F5344CB8AC3E}">
         <p14:creationId xmlns:p14="http://schemas.microsoft.com/office/powerpoint/2010/main" val="1147906169"/>
+      </p:ext>
+    </p:extLst>
+  </p:cSld>
+  <p:clrMapOvr>
+    <a:masterClrMapping/>
+  </p:clrMapOvr>
+</p:notes>
+</file>
+
+<file path=ppt/notesSlides/notesSlide30.xml><?xml version="1.0" encoding="utf-8"?>
+<p:notes xmlns:a="http://schemas.openxmlformats.org/drawingml/2006/main" xmlns:r="http://schemas.openxmlformats.org/officeDocument/2006/relationships" xmlns:p="http://schemas.openxmlformats.org/presentationml/2006/main">
+  <p:cSld>
+    <p:spTree>
+      <p:nvGrpSpPr>
+        <p:cNvPr id="1" name=""/>
+        <p:cNvGrpSpPr/>
+        <p:nvPr/>
+      </p:nvGrpSpPr>
+      <p:grpSpPr>
+        <a:xfrm>
+          <a:off x="0" y="0"/>
+          <a:ext cx="0" cy="0"/>
+          <a:chOff x="0" y="0"/>
+          <a:chExt cx="0" cy="0"/>
+        </a:xfrm>
+      </p:grpSpPr>
+      <p:sp>
+        <p:nvSpPr>
+          <p:cNvPr id="2" name="Образ слайда 1"/>
+          <p:cNvSpPr>
+            <a:spLocks noGrp="1" noRot="1" noChangeAspect="1"/>
+          </p:cNvSpPr>
+          <p:nvPr>
+            <p:ph type="sldImg"/>
+          </p:nvPr>
+        </p:nvSpPr>
+        <p:spPr>
+          <a:xfrm>
+            <a:off x="685800" y="1143000"/>
+            <a:ext cx="5486400" cy="3086100"/>
+          </a:xfrm>
+        </p:spPr>
+      </p:sp>
+      <p:sp>
+        <p:nvSpPr>
+          <p:cNvPr id="3" name="Заметки 2"/>
+          <p:cNvSpPr>
+            <a:spLocks noGrp="1"/>
+          </p:cNvSpPr>
+          <p:nvPr>
+            <p:ph type="body" idx="1"/>
+          </p:nvPr>
+        </p:nvSpPr>
+        <p:spPr/>
+        <p:txBody>
+          <a:bodyPr/>
+          <a:lstStyle/>
+          <a:p>
+            <a:endParaRPr lang="ru-RU"/>
+          </a:p>
+        </p:txBody>
+      </p:sp>
+      <p:sp>
+        <p:nvSpPr>
+          <p:cNvPr id="4" name="Номер слайда 3"/>
+          <p:cNvSpPr>
+            <a:spLocks noGrp="1"/>
+          </p:cNvSpPr>
+          <p:nvPr>
+            <p:ph type="sldNum" sz="quarter" idx="10"/>
+          </p:nvPr>
+        </p:nvSpPr>
+        <p:spPr/>
+        <p:txBody>
+          <a:bodyPr/>
+          <a:lstStyle/>
+          <a:p>
+            <a:fld id="{F0F4E2F1-1521-4C3A-A563-2F7D19AB6E0B}" type="slidenum">
+              <a:rPr lang="en-US" smtClean="0"/>
+              <a:pPr/>
+              <a:t>30</a:t>
+            </a:fld>
+            <a:endParaRPr lang="en-US"/>
+          </a:p>
+        </p:txBody>
+      </p:sp>
+    </p:spTree>
+    <p:extLst>
+      <p:ext uri="{BB962C8B-B14F-4D97-AF65-F5344CB8AC3E}">
+        <p14:creationId xmlns:p14="http://schemas.microsoft.com/office/powerpoint/2010/main" val="183118485"/>
       </p:ext>
     </p:extLst>
   </p:cSld>
@@ -1523,7 +3252,7 @@
           </a:lstStyle>
           <a:p>
             <a:r>
-              <a:rPr lang="ru-RU"/>
+              <a:rPr lang="ru-RU" dirty="0"/>
               <a:t>Образец заголовка</a:t>
             </a:r>
             <a:endParaRPr lang="en-US" dirty="0"/>
@@ -1588,7 +3317,7 @@
           </a:lstStyle>
           <a:p>
             <a:r>
-              <a:rPr lang="ru-RU"/>
+              <a:rPr lang="ru-RU" dirty="0"/>
               <a:t>Образец подзаголовка</a:t>
             </a:r>
             <a:endParaRPr lang="en-US" dirty="0"/>
@@ -1718,6 +3447,13 @@
   <p:clrMapOvr>
     <a:masterClrMapping/>
   </p:clrMapOvr>
+  <p:timing>
+    <p:tnLst>
+      <p:par>
+        <p:cTn id="1" dur="indefinite" restart="never" nodeType="tmRoot"/>
+      </p:par>
+    </p:tnLst>
+  </p:timing>
 </p:sldLayout>
 </file>
 
@@ -1857,6 +3593,13 @@
   <p:clrMapOvr>
     <a:masterClrMapping/>
   </p:clrMapOvr>
+  <p:timing>
+    <p:tnLst>
+      <p:par>
+        <p:cTn id="1" dur="indefinite" restart="never" nodeType="tmRoot"/>
+      </p:par>
+    </p:tnLst>
+  </p:timing>
 </p:sldLayout>
 </file>
 
@@ -2141,6 +3884,13 @@
     <p:sldLayoutId id="2147483675" r:id="rId1"/>
     <p:sldLayoutId id="2147483686" r:id="rId2"/>
   </p:sldLayoutIdLst>
+  <p:timing>
+    <p:tnLst>
+      <p:par>
+        <p:cTn id="1" dur="indefinite" restart="never" nodeType="tmRoot"/>
+      </p:par>
+    </p:tnLst>
+  </p:timing>
   <p:hf sldNum="0" hdr="0" ftr="0" dt="0"/>
   <p:txStyles>
     <p:titleStyle>
@@ -2172,7 +3922,7 @@
         </a:spcBef>
         <a:buFont typeface="Arial" panose="020B0604020202020204" pitchFamily="34" charset="0"/>
         <a:buChar char="•"/>
-        <a:defRPr sz="2800" kern="1200">
+        <a:defRPr sz="2400" kern="1200">
           <a:solidFill>
             <a:schemeClr val="tx1"/>
           </a:solidFill>
@@ -2208,7 +3958,7 @@
         </a:spcBef>
         <a:buFont typeface="Arial" panose="020B0604020202020204" pitchFamily="34" charset="0"/>
         <a:buChar char="•"/>
-        <a:defRPr sz="2000" kern="1200">
+        <a:defRPr sz="2400" kern="1200">
           <a:solidFill>
             <a:schemeClr val="tx1"/>
           </a:solidFill>
@@ -2226,7 +3976,7 @@
         </a:spcBef>
         <a:buFont typeface="Arial" panose="020B0604020202020204" pitchFamily="34" charset="0"/>
         <a:buChar char="•"/>
-        <a:defRPr sz="1800" kern="1200">
+        <a:defRPr sz="2400" kern="1200">
           <a:solidFill>
             <a:schemeClr val="tx1"/>
           </a:solidFill>
@@ -2244,7 +3994,7 @@
         </a:spcBef>
         <a:buFont typeface="Arial" panose="020B0604020202020204" pitchFamily="34" charset="0"/>
         <a:buChar char="•"/>
-        <a:defRPr sz="1800" kern="1200">
+        <a:defRPr sz="2400" kern="1200">
           <a:solidFill>
             <a:schemeClr val="tx1"/>
           </a:solidFill>
@@ -3989,6 +5739,163 @@
       </p:grpSpPr>
       <p:sp>
         <p:nvSpPr>
+          <p:cNvPr id="7" name="Прямоугольник 6"/>
+          <p:cNvSpPr/>
+          <p:nvPr/>
+        </p:nvSpPr>
+        <p:spPr>
+          <a:xfrm>
+            <a:off x="0" y="0"/>
+            <a:ext cx="12192000" cy="5078313"/>
+          </a:xfrm>
+          <a:prstGeom prst="rect">
+            <a:avLst/>
+          </a:prstGeom>
+        </p:spPr>
+        <p:txBody>
+          <a:bodyPr wrap="square" lIns="360000" rIns="360000">
+            <a:spAutoFit/>
+          </a:bodyPr>
+          <a:lstStyle/>
+          <a:p>
+            <a:pPr>
+              <a:lnSpc>
+                <a:spcPct val="150000"/>
+              </a:lnSpc>
+            </a:pPr>
+            <a:r>
+              <a:rPr lang="ru-RU" sz="2400" b="1" dirty="0"/>
+              <a:t>Итоги: </a:t>
+            </a:r>
+            <a:r>
+              <a:rPr lang="ru-RU" sz="2400" b="1" dirty="0" smtClean="0"/>
+              <a:t>Зачем это?</a:t>
+            </a:r>
+          </a:p>
+          <a:p>
+            <a:pPr marL="457200" indent="-457200">
+              <a:lnSpc>
+                <a:spcPct val="150000"/>
+              </a:lnSpc>
+              <a:buFont typeface="+mj-lt"/>
+              <a:buAutoNum type="arabicPeriod"/>
+            </a:pPr>
+            <a:r>
+              <a:rPr lang="ru-RU" sz="2400" b="1" dirty="0" smtClean="0"/>
+              <a:t>Чистая база данных:</a:t>
+            </a:r>
+            <a:r>
+              <a:rPr lang="ru-RU" sz="2400" dirty="0" smtClean="0"/>
+              <a:t> Благодаря атрибутам [</a:t>
+            </a:r>
+            <a:r>
+              <a:rPr lang="ru-RU" sz="2400" dirty="0" err="1" smtClean="0"/>
+              <a:t>Required</a:t>
+            </a:r>
+            <a:r>
+              <a:rPr lang="ru-RU" sz="2400" dirty="0" smtClean="0"/>
+              <a:t>] и [</a:t>
+            </a:r>
+            <a:r>
+              <a:rPr lang="ru-RU" sz="2400" dirty="0" err="1" smtClean="0"/>
+              <a:t>MaxLength</a:t>
+            </a:r>
+            <a:r>
+              <a:rPr lang="ru-RU" sz="2400" dirty="0" smtClean="0"/>
+              <a:t>], база данных сама будет отклонять некорректные данные.</a:t>
+            </a:r>
+          </a:p>
+          <a:p>
+            <a:pPr marL="457200" indent="-457200">
+              <a:lnSpc>
+                <a:spcPct val="150000"/>
+              </a:lnSpc>
+              <a:buFont typeface="+mj-lt"/>
+              <a:buAutoNum type="arabicPeriod"/>
+            </a:pPr>
+            <a:r>
+              <a:rPr lang="ru-RU" sz="2400" b="1" dirty="0" smtClean="0"/>
+              <a:t>Автоматическая </a:t>
+            </a:r>
+            <a:r>
+              <a:rPr lang="ru-RU" sz="2400" b="1" dirty="0" err="1"/>
+              <a:t>валидация</a:t>
+            </a:r>
+            <a:r>
+              <a:rPr lang="ru-RU" sz="2400" b="1" dirty="0"/>
+              <a:t>:</a:t>
+            </a:r>
+            <a:r>
+              <a:rPr lang="ru-RU" sz="2400" dirty="0"/>
+              <a:t> В ASP.NET </a:t>
+            </a:r>
+            <a:r>
+              <a:rPr lang="ru-RU" sz="2400" dirty="0" err="1"/>
+              <a:t>Core</a:t>
+            </a:r>
+            <a:r>
+              <a:rPr lang="ru-RU" sz="2400" dirty="0"/>
+              <a:t> эти же атрибуты используются для проверки данных, которые приходят от пользователя в формах.</a:t>
+            </a:r>
+          </a:p>
+          <a:p>
+            <a:pPr marL="457200" indent="-457200">
+              <a:lnSpc>
+                <a:spcPct val="150000"/>
+              </a:lnSpc>
+              <a:buFont typeface="+mj-lt"/>
+              <a:buAutoNum type="arabicPeriod"/>
+            </a:pPr>
+            <a:r>
+              <a:rPr lang="ru-RU" sz="2400" b="1" dirty="0"/>
+              <a:t>Инкапсуляция:</a:t>
+            </a:r>
+            <a:r>
+              <a:rPr lang="ru-RU" sz="2400" dirty="0"/>
+              <a:t> Богатая модель гарантирует, что правила бизнеса (например, «длина заголовка не более 256 символов») соблюдаются всегда и везде в коде.</a:t>
+            </a:r>
+          </a:p>
+        </p:txBody>
+      </p:sp>
+    </p:spTree>
+    <p:extLst>
+      <p:ext uri="{BB962C8B-B14F-4D97-AF65-F5344CB8AC3E}">
+        <p14:creationId xmlns:p14="http://schemas.microsoft.com/office/powerpoint/2010/main" val="514423945"/>
+      </p:ext>
+    </p:extLst>
+  </p:cSld>
+  <p:clrMapOvr>
+    <a:masterClrMapping/>
+  </p:clrMapOvr>
+  <p:timing>
+    <p:tnLst>
+      <p:par>
+        <p:cTn id="1" dur="indefinite" restart="never" nodeType="tmRoot"/>
+      </p:par>
+    </p:tnLst>
+  </p:timing>
+</p:sld>
+</file>
+
+<file path=ppt/slides/slide12.xml><?xml version="1.0" encoding="utf-8"?>
+<p:sld xmlns:a="http://schemas.openxmlformats.org/drawingml/2006/main" xmlns:r="http://schemas.openxmlformats.org/officeDocument/2006/relationships" xmlns:p="http://schemas.openxmlformats.org/presentationml/2006/main">
+  <p:cSld>
+    <p:spTree>
+      <p:nvGrpSpPr>
+        <p:cNvPr id="1" name=""/>
+        <p:cNvGrpSpPr/>
+        <p:nvPr/>
+      </p:nvGrpSpPr>
+      <p:grpSpPr>
+        <a:xfrm>
+          <a:off x="0" y="0"/>
+          <a:ext cx="0" cy="0"/>
+          <a:chOff x="0" y="0"/>
+          <a:chExt cx="0" cy="0"/>
+        </a:xfrm>
+      </p:grpSpPr>
+      <p:sp>
+        <p:nvSpPr>
           <p:cNvPr id="11" name="Rectangle 28" descr="Светлый диагональный 2"/>
           <p:cNvSpPr>
             <a:spLocks noChangeArrowheads="1"/>
@@ -4083,7 +5990,7 @@
         <p:spPr>
           <a:xfrm>
             <a:off x="1" y="654355"/>
-            <a:ext cx="12192000" cy="976101"/>
+            <a:ext cx="12192000" cy="5632311"/>
           </a:xfrm>
           <a:prstGeom prst="rect">
             <a:avLst/>
@@ -4097,18 +6004,113 @@
           <a:p>
             <a:pPr>
               <a:lnSpc>
-                <a:spcPct val="125000"/>
+                <a:spcPct val="150000"/>
               </a:lnSpc>
             </a:pPr>
             <a:r>
+              <a:rPr lang="ru-RU" sz="2400" b="1" dirty="0" err="1"/>
+              <a:t>DbContext</a:t>
+            </a:r>
+            <a:r>
               <a:rPr lang="ru-RU" sz="2400" dirty="0"/>
-              <a:t>В архитектуре приложений выделяют два основных стиля описания сущностей</a:t>
-            </a:r>
-            <a:r>
-              <a:rPr lang="ru-RU" sz="2400" dirty="0" smtClean="0"/>
+              <a:t> — это базовый класс, который представляет сессию взаимодействия с базой данных. Это «пульт управления», который объединяет ваши модели и реальные таблицы.</a:t>
+            </a:r>
+          </a:p>
+          <a:p>
+            <a:pPr>
+              <a:lnSpc>
+                <a:spcPct val="150000"/>
+              </a:lnSpc>
+            </a:pPr>
+            <a:r>
+              <a:rPr lang="ru-RU" sz="2400" b="1" dirty="0"/>
+              <a:t>За что отвечает </a:t>
+            </a:r>
+            <a:r>
+              <a:rPr lang="ru-RU" sz="2400" b="1" dirty="0" err="1"/>
+              <a:t>DbContext</a:t>
+            </a:r>
+            <a:r>
+              <a:rPr lang="ru-RU" sz="2400" b="1" dirty="0"/>
               <a:t>:</a:t>
             </a:r>
             <a:endParaRPr lang="ru-RU" sz="2400" dirty="0"/>
+          </a:p>
+          <a:p>
+            <a:pPr marL="457200" indent="-457200">
+              <a:lnSpc>
+                <a:spcPct val="150000"/>
+              </a:lnSpc>
+              <a:buFont typeface="+mj-lt"/>
+              <a:buAutoNum type="arabicPeriod"/>
+            </a:pPr>
+            <a:r>
+              <a:rPr lang="ru-RU" sz="2400" b="1" dirty="0"/>
+              <a:t>Подключение:</a:t>
+            </a:r>
+            <a:r>
+              <a:rPr lang="ru-RU" sz="2400" dirty="0"/>
+              <a:t> Знает, где находится база и как в неё войти.</a:t>
+            </a:r>
+          </a:p>
+          <a:p>
+            <a:pPr marL="457200" indent="-457200">
+              <a:lnSpc>
+                <a:spcPct val="150000"/>
+              </a:lnSpc>
+              <a:buFont typeface="+mj-lt"/>
+              <a:buAutoNum type="arabicPeriod"/>
+            </a:pPr>
+            <a:r>
+              <a:rPr lang="ru-RU" sz="2400" b="1" dirty="0"/>
+              <a:t>Управление таблицами:</a:t>
+            </a:r>
+            <a:r>
+              <a:rPr lang="ru-RU" sz="2400" dirty="0"/>
+              <a:t> Хранит наборы данных (</a:t>
+            </a:r>
+            <a:r>
+              <a:rPr lang="ru-RU" sz="2400" b="1" dirty="0" err="1"/>
+              <a:t>DbSet</a:t>
+            </a:r>
+            <a:r>
+              <a:rPr lang="ru-RU" sz="2400" dirty="0"/>
+              <a:t>).</a:t>
+            </a:r>
+          </a:p>
+          <a:p>
+            <a:pPr marL="457200" indent="-457200">
+              <a:lnSpc>
+                <a:spcPct val="150000"/>
+              </a:lnSpc>
+              <a:buFont typeface="+mj-lt"/>
+              <a:buAutoNum type="arabicPeriod"/>
+            </a:pPr>
+            <a:r>
+              <a:rPr lang="ru-RU" sz="2400" b="1" dirty="0"/>
+              <a:t>Отслеживание изменений:</a:t>
+            </a:r>
+            <a:r>
+              <a:rPr lang="ru-RU" sz="2400" dirty="0"/>
+              <a:t> Понимает, какой объект вы изменили в коде, чтобы обновить именно его в базе.</a:t>
+            </a:r>
+          </a:p>
+          <a:p>
+            <a:pPr marL="457200" indent="-457200">
+              <a:lnSpc>
+                <a:spcPct val="150000"/>
+              </a:lnSpc>
+              <a:buFont typeface="+mj-lt"/>
+              <a:buAutoNum type="arabicPeriod"/>
+            </a:pPr>
+            <a:r>
+              <a:rPr lang="ru-RU" sz="2400" b="1" dirty="0"/>
+              <a:t>Транзакции:</a:t>
+            </a:r>
+            <a:r>
+              <a:rPr lang="ru-RU" sz="2400" dirty="0"/>
+              <a:t> Гарантирует, что данные сохранятся полностью или не сохранятся вовсе (при ошибке).</a:t>
+            </a:r>
           </a:p>
         </p:txBody>
       </p:sp>
@@ -4116,6 +6118,3231 @@
     <p:extLst>
       <p:ext uri="{BB962C8B-B14F-4D97-AF65-F5344CB8AC3E}">
         <p14:creationId xmlns:p14="http://schemas.microsoft.com/office/powerpoint/2010/main" val="2952558647"/>
+      </p:ext>
+    </p:extLst>
+  </p:cSld>
+  <p:clrMapOvr>
+    <a:masterClrMapping/>
+  </p:clrMapOvr>
+  <p:timing>
+    <p:tnLst>
+      <p:par>
+        <p:cTn id="1" dur="indefinite" restart="never" nodeType="tmRoot"/>
+      </p:par>
+    </p:tnLst>
+  </p:timing>
+</p:sld>
+</file>
+
+<file path=ppt/slides/slide13.xml><?xml version="1.0" encoding="utf-8"?>
+<p:sld xmlns:a="http://schemas.openxmlformats.org/drawingml/2006/main" xmlns:r="http://schemas.openxmlformats.org/officeDocument/2006/relationships" xmlns:p="http://schemas.openxmlformats.org/presentationml/2006/main">
+  <p:cSld>
+    <p:spTree>
+      <p:nvGrpSpPr>
+        <p:cNvPr id="1" name=""/>
+        <p:cNvGrpSpPr/>
+        <p:nvPr/>
+      </p:nvGrpSpPr>
+      <p:grpSpPr>
+        <a:xfrm>
+          <a:off x="0" y="0"/>
+          <a:ext cx="0" cy="0"/>
+          <a:chOff x="0" y="0"/>
+          <a:chExt cx="0" cy="0"/>
+        </a:xfrm>
+      </p:grpSpPr>
+      <p:sp>
+        <p:nvSpPr>
+          <p:cNvPr id="7" name="Прямоугольник 6"/>
+          <p:cNvSpPr/>
+          <p:nvPr/>
+        </p:nvSpPr>
+        <p:spPr>
+          <a:xfrm>
+            <a:off x="0" y="0"/>
+            <a:ext cx="12192000" cy="6801862"/>
+          </a:xfrm>
+          <a:prstGeom prst="rect">
+            <a:avLst/>
+          </a:prstGeom>
+        </p:spPr>
+        <p:txBody>
+          <a:bodyPr wrap="square" lIns="360000" rIns="360000">
+            <a:spAutoFit/>
+          </a:bodyPr>
+          <a:lstStyle/>
+          <a:p>
+            <a:pPr>
+              <a:lnSpc>
+                <a:spcPct val="150000"/>
+              </a:lnSpc>
+            </a:pPr>
+            <a:r>
+              <a:rPr lang="ru-RU" sz="2400" dirty="0"/>
+              <a:t>Чтобы создать свою базу, мы создаем класс-наследник от </a:t>
+            </a:r>
+            <a:r>
+              <a:rPr lang="ru-RU" sz="2400" dirty="0" err="1"/>
+              <a:t>DbContext</a:t>
+            </a:r>
+            <a:r>
+              <a:rPr lang="ru-RU" sz="2400" dirty="0" smtClean="0"/>
+              <a:t>.</a:t>
+            </a:r>
+            <a:endParaRPr lang="en-US" sz="2400" dirty="0"/>
+          </a:p>
+          <a:p>
+            <a:r>
+              <a:rPr lang="en-US" sz="2000" dirty="0" smtClean="0">
+                <a:solidFill>
+                  <a:srgbClr val="0000FF"/>
+                </a:solidFill>
+                <a:highlight>
+                  <a:srgbClr val="FFFFFF"/>
+                </a:highlight>
+                <a:latin typeface="Cascadia Mono" panose="020B0609020000020004" pitchFamily="49" charset="0"/>
+              </a:rPr>
+              <a:t>using</a:t>
+            </a:r>
+            <a:r>
+              <a:rPr lang="en-US" sz="2000" dirty="0" smtClean="0">
+                <a:solidFill>
+                  <a:srgbClr val="000000"/>
+                </a:solidFill>
+                <a:highlight>
+                  <a:srgbClr val="FFFFFF"/>
+                </a:highlight>
+                <a:latin typeface="Cascadia Mono" panose="020B0609020000020004" pitchFamily="49" charset="0"/>
+              </a:rPr>
+              <a:t> </a:t>
+            </a:r>
+            <a:r>
+              <a:rPr lang="en-US" sz="2000" dirty="0" err="1">
+                <a:solidFill>
+                  <a:srgbClr val="000000"/>
+                </a:solidFill>
+                <a:highlight>
+                  <a:srgbClr val="FFFFFF"/>
+                </a:highlight>
+                <a:latin typeface="Cascadia Mono" panose="020B0609020000020004" pitchFamily="49" charset="0"/>
+              </a:rPr>
+              <a:t>Microsoft.EntityFrameworkCore</a:t>
+            </a:r>
+            <a:r>
+              <a:rPr lang="en-US" sz="2000" dirty="0">
+                <a:solidFill>
+                  <a:srgbClr val="000000"/>
+                </a:solidFill>
+                <a:highlight>
+                  <a:srgbClr val="FFFFFF"/>
+                </a:highlight>
+                <a:latin typeface="Cascadia Mono" panose="020B0609020000020004" pitchFamily="49" charset="0"/>
+              </a:rPr>
+              <a:t>;</a:t>
+            </a:r>
+          </a:p>
+          <a:p>
+            <a:endParaRPr lang="ru-RU" sz="2000" dirty="0">
+              <a:solidFill>
+                <a:srgbClr val="000000"/>
+              </a:solidFill>
+              <a:highlight>
+                <a:srgbClr val="FFFFFF"/>
+              </a:highlight>
+              <a:latin typeface="Cascadia Mono" panose="020B0609020000020004" pitchFamily="49" charset="0"/>
+            </a:endParaRPr>
+          </a:p>
+          <a:p>
+            <a:r>
+              <a:rPr lang="en-US" sz="2000" dirty="0">
+                <a:solidFill>
+                  <a:srgbClr val="0000FF"/>
+                </a:solidFill>
+                <a:highlight>
+                  <a:srgbClr val="FFFFFF"/>
+                </a:highlight>
+                <a:latin typeface="Cascadia Mono" panose="020B0609020000020004" pitchFamily="49" charset="0"/>
+              </a:rPr>
+              <a:t>public</a:t>
+            </a:r>
+            <a:r>
+              <a:rPr lang="en-US" sz="2000" dirty="0">
+                <a:solidFill>
+                  <a:srgbClr val="000000"/>
+                </a:solidFill>
+                <a:highlight>
+                  <a:srgbClr val="FFFFFF"/>
+                </a:highlight>
+                <a:latin typeface="Cascadia Mono" panose="020B0609020000020004" pitchFamily="49" charset="0"/>
+              </a:rPr>
+              <a:t> </a:t>
+            </a:r>
+            <a:r>
+              <a:rPr lang="en-US" sz="2000" dirty="0">
+                <a:solidFill>
+                  <a:srgbClr val="0000FF"/>
+                </a:solidFill>
+                <a:highlight>
+                  <a:srgbClr val="FFFFFF"/>
+                </a:highlight>
+                <a:latin typeface="Cascadia Mono" panose="020B0609020000020004" pitchFamily="49" charset="0"/>
+              </a:rPr>
+              <a:t>class</a:t>
+            </a:r>
+            <a:r>
+              <a:rPr lang="en-US" sz="2000" dirty="0">
+                <a:solidFill>
+                  <a:srgbClr val="000000"/>
+                </a:solidFill>
+                <a:highlight>
+                  <a:srgbClr val="FFFFFF"/>
+                </a:highlight>
+                <a:latin typeface="Cascadia Mono" panose="020B0609020000020004" pitchFamily="49" charset="0"/>
+              </a:rPr>
+              <a:t> </a:t>
+            </a:r>
+            <a:r>
+              <a:rPr lang="en-US" sz="2000" dirty="0" err="1">
+                <a:solidFill>
+                  <a:srgbClr val="2B91AF"/>
+                </a:solidFill>
+                <a:highlight>
+                  <a:srgbClr val="FFFFFF"/>
+                </a:highlight>
+                <a:latin typeface="Cascadia Mono" panose="020B0609020000020004" pitchFamily="49" charset="0"/>
+              </a:rPr>
+              <a:t>ApplicationContext</a:t>
+            </a:r>
+            <a:r>
+              <a:rPr lang="en-US" sz="2000" dirty="0">
+                <a:solidFill>
+                  <a:srgbClr val="000000"/>
+                </a:solidFill>
+                <a:highlight>
+                  <a:srgbClr val="FFFFFF"/>
+                </a:highlight>
+                <a:latin typeface="Cascadia Mono" panose="020B0609020000020004" pitchFamily="49" charset="0"/>
+              </a:rPr>
+              <a:t> : </a:t>
+            </a:r>
+            <a:r>
+              <a:rPr lang="en-US" sz="2000" dirty="0" err="1">
+                <a:solidFill>
+                  <a:srgbClr val="2B91AF"/>
+                </a:solidFill>
+                <a:highlight>
+                  <a:srgbClr val="FFFFFF"/>
+                </a:highlight>
+                <a:latin typeface="Cascadia Mono" panose="020B0609020000020004" pitchFamily="49" charset="0"/>
+              </a:rPr>
+              <a:t>DbContext</a:t>
+            </a:r>
+            <a:endParaRPr lang="en-US" sz="2000" dirty="0">
+              <a:solidFill>
+                <a:srgbClr val="000000"/>
+              </a:solidFill>
+              <a:highlight>
+                <a:srgbClr val="FFFFFF"/>
+              </a:highlight>
+              <a:latin typeface="Cascadia Mono" panose="020B0609020000020004" pitchFamily="49" charset="0"/>
+            </a:endParaRPr>
+          </a:p>
+          <a:p>
+            <a:r>
+              <a:rPr lang="ru-RU" sz="2000" dirty="0">
+                <a:solidFill>
+                  <a:srgbClr val="000000"/>
+                </a:solidFill>
+                <a:highlight>
+                  <a:srgbClr val="FFFFFF"/>
+                </a:highlight>
+                <a:latin typeface="Cascadia Mono" panose="020B0609020000020004" pitchFamily="49" charset="0"/>
+              </a:rPr>
+              <a:t>{</a:t>
+            </a:r>
+          </a:p>
+          <a:p>
+            <a:r>
+              <a:rPr lang="ru-RU" sz="2000" dirty="0">
+                <a:solidFill>
+                  <a:srgbClr val="000000"/>
+                </a:solidFill>
+                <a:highlight>
+                  <a:srgbClr val="FFFFFF"/>
+                </a:highlight>
+                <a:latin typeface="Cascadia Mono" panose="020B0609020000020004" pitchFamily="49" charset="0"/>
+              </a:rPr>
+              <a:t>    </a:t>
+            </a:r>
+            <a:r>
+              <a:rPr lang="ru-RU" sz="2000" dirty="0">
+                <a:solidFill>
+                  <a:srgbClr val="008000"/>
+                </a:solidFill>
+                <a:highlight>
+                  <a:srgbClr val="FFFFFF"/>
+                </a:highlight>
+                <a:latin typeface="Cascadia Mono" panose="020B0609020000020004" pitchFamily="49" charset="0"/>
+              </a:rPr>
+              <a:t>// Каждое свойство </a:t>
+            </a:r>
+            <a:r>
+              <a:rPr lang="ru-RU" sz="2000" dirty="0" err="1">
+                <a:solidFill>
+                  <a:srgbClr val="008000"/>
+                </a:solidFill>
+                <a:highlight>
+                  <a:srgbClr val="FFFFFF"/>
+                </a:highlight>
+                <a:latin typeface="Cascadia Mono" panose="020B0609020000020004" pitchFamily="49" charset="0"/>
+              </a:rPr>
+              <a:t>DbSet</a:t>
+            </a:r>
+            <a:r>
+              <a:rPr lang="ru-RU" sz="2000" dirty="0">
+                <a:solidFill>
+                  <a:srgbClr val="008000"/>
+                </a:solidFill>
+                <a:highlight>
+                  <a:srgbClr val="FFFFFF"/>
+                </a:highlight>
+                <a:latin typeface="Cascadia Mono" panose="020B0609020000020004" pitchFamily="49" charset="0"/>
+              </a:rPr>
+              <a:t> — это отдельная таблица в БД</a:t>
+            </a:r>
+            <a:endParaRPr lang="ru-RU" sz="2000" dirty="0">
+              <a:solidFill>
+                <a:srgbClr val="000000"/>
+              </a:solidFill>
+              <a:highlight>
+                <a:srgbClr val="FFFFFF"/>
+              </a:highlight>
+              <a:latin typeface="Cascadia Mono" panose="020B0609020000020004" pitchFamily="49" charset="0"/>
+            </a:endParaRPr>
+          </a:p>
+          <a:p>
+            <a:r>
+              <a:rPr lang="en-US" sz="2000" dirty="0">
+                <a:solidFill>
+                  <a:srgbClr val="000000"/>
+                </a:solidFill>
+                <a:highlight>
+                  <a:srgbClr val="FFFFFF"/>
+                </a:highlight>
+                <a:latin typeface="Cascadia Mono" panose="020B0609020000020004" pitchFamily="49" charset="0"/>
+              </a:rPr>
+              <a:t>    </a:t>
+            </a:r>
+            <a:r>
+              <a:rPr lang="en-US" sz="2000" dirty="0">
+                <a:solidFill>
+                  <a:srgbClr val="0000FF"/>
+                </a:solidFill>
+                <a:highlight>
+                  <a:srgbClr val="FFFFFF"/>
+                </a:highlight>
+                <a:latin typeface="Cascadia Mono" panose="020B0609020000020004" pitchFamily="49" charset="0"/>
+              </a:rPr>
+              <a:t>public</a:t>
+            </a:r>
+            <a:r>
+              <a:rPr lang="en-US" sz="2000" dirty="0">
+                <a:solidFill>
+                  <a:srgbClr val="000000"/>
+                </a:solidFill>
+                <a:highlight>
+                  <a:srgbClr val="FFFFFF"/>
+                </a:highlight>
+                <a:latin typeface="Cascadia Mono" panose="020B0609020000020004" pitchFamily="49" charset="0"/>
+              </a:rPr>
+              <a:t> </a:t>
+            </a:r>
+            <a:r>
+              <a:rPr lang="en-US" sz="2000" dirty="0" err="1">
+                <a:solidFill>
+                  <a:srgbClr val="2B91AF"/>
+                </a:solidFill>
+                <a:highlight>
+                  <a:srgbClr val="FFFFFF"/>
+                </a:highlight>
+                <a:latin typeface="Cascadia Mono" panose="020B0609020000020004" pitchFamily="49" charset="0"/>
+              </a:rPr>
+              <a:t>DbSet</a:t>
+            </a:r>
+            <a:r>
+              <a:rPr lang="en-US" sz="2000" dirty="0">
+                <a:solidFill>
+                  <a:srgbClr val="000000"/>
+                </a:solidFill>
+                <a:highlight>
+                  <a:srgbClr val="FFFFFF"/>
+                </a:highlight>
+                <a:latin typeface="Cascadia Mono" panose="020B0609020000020004" pitchFamily="49" charset="0"/>
+              </a:rPr>
+              <a:t>&lt;</a:t>
+            </a:r>
+            <a:r>
+              <a:rPr lang="en-US" sz="2000" dirty="0">
+                <a:solidFill>
+                  <a:srgbClr val="2B91AF"/>
+                </a:solidFill>
+                <a:highlight>
+                  <a:srgbClr val="FFFFFF"/>
+                </a:highlight>
+                <a:latin typeface="Cascadia Mono" panose="020B0609020000020004" pitchFamily="49" charset="0"/>
+              </a:rPr>
+              <a:t>Note</a:t>
+            </a:r>
+            <a:r>
+              <a:rPr lang="en-US" sz="2000" dirty="0">
+                <a:solidFill>
+                  <a:srgbClr val="000000"/>
+                </a:solidFill>
+                <a:highlight>
+                  <a:srgbClr val="FFFFFF"/>
+                </a:highlight>
+                <a:latin typeface="Cascadia Mono" panose="020B0609020000020004" pitchFamily="49" charset="0"/>
+              </a:rPr>
+              <a:t>&gt; Notes =&gt; </a:t>
+            </a:r>
+            <a:r>
+              <a:rPr lang="en-US" sz="2000" dirty="0">
+                <a:solidFill>
+                  <a:srgbClr val="74531F"/>
+                </a:solidFill>
+                <a:highlight>
+                  <a:srgbClr val="FFFFFF"/>
+                </a:highlight>
+                <a:latin typeface="Cascadia Mono" panose="020B0609020000020004" pitchFamily="49" charset="0"/>
+              </a:rPr>
+              <a:t>Set</a:t>
+            </a:r>
+            <a:r>
+              <a:rPr lang="en-US" sz="2000" dirty="0">
+                <a:solidFill>
+                  <a:srgbClr val="000000"/>
+                </a:solidFill>
+                <a:highlight>
+                  <a:srgbClr val="FFFFFF"/>
+                </a:highlight>
+                <a:latin typeface="Cascadia Mono" panose="020B0609020000020004" pitchFamily="49" charset="0"/>
+              </a:rPr>
+              <a:t>&lt;</a:t>
+            </a:r>
+            <a:r>
+              <a:rPr lang="en-US" sz="2000" dirty="0">
+                <a:solidFill>
+                  <a:srgbClr val="2B91AF"/>
+                </a:solidFill>
+                <a:highlight>
+                  <a:srgbClr val="FFFFFF"/>
+                </a:highlight>
+                <a:latin typeface="Cascadia Mono" panose="020B0609020000020004" pitchFamily="49" charset="0"/>
+              </a:rPr>
+              <a:t>Note</a:t>
+            </a:r>
+            <a:r>
+              <a:rPr lang="en-US" sz="2000" dirty="0">
+                <a:solidFill>
+                  <a:srgbClr val="000000"/>
+                </a:solidFill>
+                <a:highlight>
+                  <a:srgbClr val="FFFFFF"/>
+                </a:highlight>
+                <a:latin typeface="Cascadia Mono" panose="020B0609020000020004" pitchFamily="49" charset="0"/>
+              </a:rPr>
+              <a:t>&gt;();</a:t>
+            </a:r>
+          </a:p>
+          <a:p>
+            <a:r>
+              <a:rPr lang="en-US" sz="2000" dirty="0">
+                <a:solidFill>
+                  <a:srgbClr val="000000"/>
+                </a:solidFill>
+                <a:highlight>
+                  <a:srgbClr val="FFFFFF"/>
+                </a:highlight>
+                <a:latin typeface="Cascadia Mono" panose="020B0609020000020004" pitchFamily="49" charset="0"/>
+              </a:rPr>
+              <a:t>    </a:t>
+            </a:r>
+            <a:r>
+              <a:rPr lang="en-US" sz="2000" dirty="0">
+                <a:solidFill>
+                  <a:srgbClr val="0000FF"/>
+                </a:solidFill>
+                <a:highlight>
+                  <a:srgbClr val="FFFFFF"/>
+                </a:highlight>
+                <a:latin typeface="Cascadia Mono" panose="020B0609020000020004" pitchFamily="49" charset="0"/>
+              </a:rPr>
+              <a:t>public</a:t>
+            </a:r>
+            <a:r>
+              <a:rPr lang="en-US" sz="2000" dirty="0">
+                <a:solidFill>
+                  <a:srgbClr val="000000"/>
+                </a:solidFill>
+                <a:highlight>
+                  <a:srgbClr val="FFFFFF"/>
+                </a:highlight>
+                <a:latin typeface="Cascadia Mono" panose="020B0609020000020004" pitchFamily="49" charset="0"/>
+              </a:rPr>
+              <a:t> </a:t>
+            </a:r>
+            <a:r>
+              <a:rPr lang="en-US" sz="2000" dirty="0" err="1">
+                <a:solidFill>
+                  <a:srgbClr val="2B91AF"/>
+                </a:solidFill>
+                <a:highlight>
+                  <a:srgbClr val="FFFFFF"/>
+                </a:highlight>
+                <a:latin typeface="Cascadia Mono" panose="020B0609020000020004" pitchFamily="49" charset="0"/>
+              </a:rPr>
+              <a:t>DbSet</a:t>
+            </a:r>
+            <a:r>
+              <a:rPr lang="en-US" sz="2000" dirty="0">
+                <a:solidFill>
+                  <a:srgbClr val="000000"/>
+                </a:solidFill>
+                <a:highlight>
+                  <a:srgbClr val="FFFFFF"/>
+                </a:highlight>
+                <a:latin typeface="Cascadia Mono" panose="020B0609020000020004" pitchFamily="49" charset="0"/>
+              </a:rPr>
+              <a:t>&lt;</a:t>
+            </a:r>
+            <a:r>
+              <a:rPr lang="en-US" sz="2000" dirty="0">
+                <a:solidFill>
+                  <a:srgbClr val="2B91AF"/>
+                </a:solidFill>
+                <a:highlight>
+                  <a:srgbClr val="FFFFFF"/>
+                </a:highlight>
+                <a:latin typeface="Cascadia Mono" panose="020B0609020000020004" pitchFamily="49" charset="0"/>
+              </a:rPr>
+              <a:t>Customer</a:t>
+            </a:r>
+            <a:r>
+              <a:rPr lang="en-US" sz="2000" dirty="0">
+                <a:solidFill>
+                  <a:srgbClr val="000000"/>
+                </a:solidFill>
+                <a:highlight>
+                  <a:srgbClr val="FFFFFF"/>
+                </a:highlight>
+                <a:latin typeface="Cascadia Mono" panose="020B0609020000020004" pitchFamily="49" charset="0"/>
+              </a:rPr>
+              <a:t>&gt; Customers =&gt; </a:t>
+            </a:r>
+            <a:r>
+              <a:rPr lang="en-US" sz="2000" dirty="0">
+                <a:solidFill>
+                  <a:srgbClr val="74531F"/>
+                </a:solidFill>
+                <a:highlight>
+                  <a:srgbClr val="FFFFFF"/>
+                </a:highlight>
+                <a:latin typeface="Cascadia Mono" panose="020B0609020000020004" pitchFamily="49" charset="0"/>
+              </a:rPr>
+              <a:t>Set</a:t>
+            </a:r>
+            <a:r>
+              <a:rPr lang="en-US" sz="2000" dirty="0">
+                <a:solidFill>
+                  <a:srgbClr val="000000"/>
+                </a:solidFill>
+                <a:highlight>
+                  <a:srgbClr val="FFFFFF"/>
+                </a:highlight>
+                <a:latin typeface="Cascadia Mono" panose="020B0609020000020004" pitchFamily="49" charset="0"/>
+              </a:rPr>
+              <a:t>&lt;</a:t>
+            </a:r>
+            <a:r>
+              <a:rPr lang="en-US" sz="2000" dirty="0">
+                <a:solidFill>
+                  <a:srgbClr val="2B91AF"/>
+                </a:solidFill>
+                <a:highlight>
+                  <a:srgbClr val="FFFFFF"/>
+                </a:highlight>
+                <a:latin typeface="Cascadia Mono" panose="020B0609020000020004" pitchFamily="49" charset="0"/>
+              </a:rPr>
+              <a:t>Customer</a:t>
+            </a:r>
+            <a:r>
+              <a:rPr lang="en-US" sz="2000" dirty="0">
+                <a:solidFill>
+                  <a:srgbClr val="000000"/>
+                </a:solidFill>
+                <a:highlight>
+                  <a:srgbClr val="FFFFFF"/>
+                </a:highlight>
+                <a:latin typeface="Cascadia Mono" panose="020B0609020000020004" pitchFamily="49" charset="0"/>
+              </a:rPr>
+              <a:t>&gt;();</a:t>
+            </a:r>
+          </a:p>
+          <a:p>
+            <a:endParaRPr lang="ru-RU" sz="2000" dirty="0">
+              <a:solidFill>
+                <a:srgbClr val="000000"/>
+              </a:solidFill>
+              <a:highlight>
+                <a:srgbClr val="FFFFFF"/>
+              </a:highlight>
+              <a:latin typeface="Cascadia Mono" panose="020B0609020000020004" pitchFamily="49" charset="0"/>
+            </a:endParaRPr>
+          </a:p>
+          <a:p>
+            <a:r>
+              <a:rPr lang="en-US" sz="2000" dirty="0">
+                <a:solidFill>
+                  <a:srgbClr val="000000"/>
+                </a:solidFill>
+                <a:highlight>
+                  <a:srgbClr val="FFFFFF"/>
+                </a:highlight>
+                <a:latin typeface="Cascadia Mono" panose="020B0609020000020004" pitchFamily="49" charset="0"/>
+              </a:rPr>
+              <a:t>    </a:t>
+            </a:r>
+            <a:r>
+              <a:rPr lang="en-US" sz="2000" dirty="0">
+                <a:solidFill>
+                  <a:srgbClr val="0000FF"/>
+                </a:solidFill>
+                <a:highlight>
+                  <a:srgbClr val="FFFFFF"/>
+                </a:highlight>
+                <a:latin typeface="Cascadia Mono" panose="020B0609020000020004" pitchFamily="49" charset="0"/>
+              </a:rPr>
+              <a:t>public</a:t>
+            </a:r>
+            <a:r>
+              <a:rPr lang="en-US" sz="2000" dirty="0">
+                <a:solidFill>
+                  <a:srgbClr val="000000"/>
+                </a:solidFill>
+                <a:highlight>
+                  <a:srgbClr val="FFFFFF"/>
+                </a:highlight>
+                <a:latin typeface="Cascadia Mono" panose="020B0609020000020004" pitchFamily="49" charset="0"/>
+              </a:rPr>
+              <a:t> </a:t>
+            </a:r>
+            <a:r>
+              <a:rPr lang="en-US" sz="2000" dirty="0" err="1">
+                <a:solidFill>
+                  <a:srgbClr val="2B91AF"/>
+                </a:solidFill>
+                <a:highlight>
+                  <a:srgbClr val="FFFFFF"/>
+                </a:highlight>
+                <a:latin typeface="Cascadia Mono" panose="020B0609020000020004" pitchFamily="49" charset="0"/>
+              </a:rPr>
+              <a:t>ApplicationContext</a:t>
+            </a:r>
+            <a:r>
+              <a:rPr lang="en-US" sz="2000" dirty="0">
+                <a:solidFill>
+                  <a:srgbClr val="000000"/>
+                </a:solidFill>
+                <a:highlight>
+                  <a:srgbClr val="FFFFFF"/>
+                </a:highlight>
+                <a:latin typeface="Cascadia Mono" panose="020B0609020000020004" pitchFamily="49" charset="0"/>
+              </a:rPr>
+              <a:t>()</a:t>
+            </a:r>
+          </a:p>
+          <a:p>
+            <a:r>
+              <a:rPr lang="ru-RU" sz="2000" dirty="0">
+                <a:solidFill>
+                  <a:srgbClr val="000000"/>
+                </a:solidFill>
+                <a:highlight>
+                  <a:srgbClr val="FFFFFF"/>
+                </a:highlight>
+                <a:latin typeface="Cascadia Mono" panose="020B0609020000020004" pitchFamily="49" charset="0"/>
+              </a:rPr>
+              <a:t>    {</a:t>
+            </a:r>
+          </a:p>
+          <a:p>
+            <a:r>
+              <a:rPr lang="ru-RU" sz="2000" dirty="0">
+                <a:solidFill>
+                  <a:srgbClr val="000000"/>
+                </a:solidFill>
+                <a:highlight>
+                  <a:srgbClr val="FFFFFF"/>
+                </a:highlight>
+                <a:latin typeface="Cascadia Mono" panose="020B0609020000020004" pitchFamily="49" charset="0"/>
+              </a:rPr>
+              <a:t>        </a:t>
+            </a:r>
+            <a:r>
+              <a:rPr lang="ru-RU" sz="2000" dirty="0">
+                <a:solidFill>
+                  <a:srgbClr val="008000"/>
+                </a:solidFill>
+                <a:highlight>
+                  <a:srgbClr val="FFFFFF"/>
+                </a:highlight>
+                <a:latin typeface="Cascadia Mono" panose="020B0609020000020004" pitchFamily="49" charset="0"/>
+              </a:rPr>
+              <a:t>// Магия: создаст файл базы при первом запуске, если его нет</a:t>
+            </a:r>
+            <a:endParaRPr lang="ru-RU" sz="2000" dirty="0">
+              <a:solidFill>
+                <a:srgbClr val="000000"/>
+              </a:solidFill>
+              <a:highlight>
+                <a:srgbClr val="FFFFFF"/>
+              </a:highlight>
+              <a:latin typeface="Cascadia Mono" panose="020B0609020000020004" pitchFamily="49" charset="0"/>
+            </a:endParaRPr>
+          </a:p>
+          <a:p>
+            <a:r>
+              <a:rPr lang="en-US" sz="2000" dirty="0">
+                <a:solidFill>
+                  <a:srgbClr val="000000"/>
+                </a:solidFill>
+                <a:highlight>
+                  <a:srgbClr val="FFFFFF"/>
+                </a:highlight>
+                <a:latin typeface="Cascadia Mono" panose="020B0609020000020004" pitchFamily="49" charset="0"/>
+              </a:rPr>
+              <a:t>        </a:t>
+            </a:r>
+            <a:r>
+              <a:rPr lang="en-US" sz="2000" dirty="0" err="1">
+                <a:solidFill>
+                  <a:srgbClr val="000000"/>
+                </a:solidFill>
+                <a:highlight>
+                  <a:srgbClr val="FFFFFF"/>
+                </a:highlight>
+                <a:latin typeface="Cascadia Mono" panose="020B0609020000020004" pitchFamily="49" charset="0"/>
+              </a:rPr>
+              <a:t>Database.</a:t>
+            </a:r>
+            <a:r>
+              <a:rPr lang="en-US" sz="2000" dirty="0" err="1">
+                <a:solidFill>
+                  <a:srgbClr val="74531F"/>
+                </a:solidFill>
+                <a:highlight>
+                  <a:srgbClr val="FFFFFF"/>
+                </a:highlight>
+                <a:latin typeface="Cascadia Mono" panose="020B0609020000020004" pitchFamily="49" charset="0"/>
+              </a:rPr>
+              <a:t>EnsureCreated</a:t>
+            </a:r>
+            <a:r>
+              <a:rPr lang="en-US" sz="2000" dirty="0">
+                <a:solidFill>
+                  <a:srgbClr val="000000"/>
+                </a:solidFill>
+                <a:highlight>
+                  <a:srgbClr val="FFFFFF"/>
+                </a:highlight>
+                <a:latin typeface="Cascadia Mono" panose="020B0609020000020004" pitchFamily="49" charset="0"/>
+              </a:rPr>
+              <a:t>();</a:t>
+            </a:r>
+          </a:p>
+          <a:p>
+            <a:r>
+              <a:rPr lang="ru-RU" sz="2000" dirty="0">
+                <a:solidFill>
+                  <a:srgbClr val="000000"/>
+                </a:solidFill>
+                <a:highlight>
+                  <a:srgbClr val="FFFFFF"/>
+                </a:highlight>
+                <a:latin typeface="Cascadia Mono" panose="020B0609020000020004" pitchFamily="49" charset="0"/>
+              </a:rPr>
+              <a:t>    </a:t>
+            </a:r>
+            <a:r>
+              <a:rPr lang="ru-RU" sz="2000" dirty="0" smtClean="0">
+                <a:solidFill>
+                  <a:srgbClr val="000000"/>
+                </a:solidFill>
+                <a:highlight>
+                  <a:srgbClr val="FFFFFF"/>
+                </a:highlight>
+                <a:latin typeface="Cascadia Mono" panose="020B0609020000020004" pitchFamily="49" charset="0"/>
+              </a:rPr>
+              <a:t>}</a:t>
+            </a:r>
+            <a:endParaRPr lang="en-US" sz="2000" dirty="0" smtClean="0">
+              <a:solidFill>
+                <a:srgbClr val="000000"/>
+              </a:solidFill>
+              <a:highlight>
+                <a:srgbClr val="FFFFFF"/>
+              </a:highlight>
+              <a:latin typeface="Cascadia Mono" panose="020B0609020000020004" pitchFamily="49" charset="0"/>
+            </a:endParaRPr>
+          </a:p>
+          <a:p>
+            <a:endParaRPr lang="ru-RU" sz="2000" dirty="0">
+              <a:solidFill>
+                <a:srgbClr val="000000"/>
+              </a:solidFill>
+              <a:highlight>
+                <a:srgbClr val="FFFFFF"/>
+              </a:highlight>
+              <a:latin typeface="Cascadia Mono" panose="020B0609020000020004" pitchFamily="49" charset="0"/>
+            </a:endParaRPr>
+          </a:p>
+          <a:p>
+            <a:r>
+              <a:rPr lang="ru-RU" sz="2000" dirty="0">
+                <a:solidFill>
+                  <a:srgbClr val="000000"/>
+                </a:solidFill>
+                <a:highlight>
+                  <a:srgbClr val="FFFFFF"/>
+                </a:highlight>
+                <a:latin typeface="Cascadia Mono" panose="020B0609020000020004" pitchFamily="49" charset="0"/>
+              </a:rPr>
+              <a:t>    </a:t>
+            </a:r>
+            <a:r>
+              <a:rPr lang="ru-RU" sz="2000" dirty="0">
+                <a:solidFill>
+                  <a:srgbClr val="008000"/>
+                </a:solidFill>
+                <a:highlight>
+                  <a:srgbClr val="FFFFFF"/>
+                </a:highlight>
+                <a:latin typeface="Cascadia Mono" panose="020B0609020000020004" pitchFamily="49" charset="0"/>
+              </a:rPr>
+              <a:t>// Настройка "куда подключаться"</a:t>
+            </a:r>
+            <a:endParaRPr lang="ru-RU" sz="2000" dirty="0">
+              <a:solidFill>
+                <a:srgbClr val="000000"/>
+              </a:solidFill>
+              <a:highlight>
+                <a:srgbClr val="FFFFFF"/>
+              </a:highlight>
+              <a:latin typeface="Cascadia Mono" panose="020B0609020000020004" pitchFamily="49" charset="0"/>
+            </a:endParaRPr>
+          </a:p>
+          <a:p>
+            <a:r>
+              <a:rPr lang="en-US" sz="2000" dirty="0">
+                <a:solidFill>
+                  <a:srgbClr val="000000"/>
+                </a:solidFill>
+                <a:highlight>
+                  <a:srgbClr val="FFFFFF"/>
+                </a:highlight>
+                <a:latin typeface="Cascadia Mono" panose="020B0609020000020004" pitchFamily="49" charset="0"/>
+              </a:rPr>
+              <a:t>    </a:t>
+            </a:r>
+            <a:r>
+              <a:rPr lang="en-US" sz="2000" dirty="0">
+                <a:solidFill>
+                  <a:srgbClr val="0000FF"/>
+                </a:solidFill>
+                <a:highlight>
+                  <a:srgbClr val="FFFFFF"/>
+                </a:highlight>
+                <a:latin typeface="Cascadia Mono" panose="020B0609020000020004" pitchFamily="49" charset="0"/>
+              </a:rPr>
+              <a:t>protected</a:t>
+            </a:r>
+            <a:r>
+              <a:rPr lang="en-US" sz="2000" dirty="0">
+                <a:solidFill>
+                  <a:srgbClr val="000000"/>
+                </a:solidFill>
+                <a:highlight>
+                  <a:srgbClr val="FFFFFF"/>
+                </a:highlight>
+                <a:latin typeface="Cascadia Mono" panose="020B0609020000020004" pitchFamily="49" charset="0"/>
+              </a:rPr>
+              <a:t> </a:t>
+            </a:r>
+            <a:r>
+              <a:rPr lang="en-US" sz="2000" dirty="0">
+                <a:solidFill>
+                  <a:srgbClr val="0000FF"/>
+                </a:solidFill>
+                <a:highlight>
+                  <a:srgbClr val="FFFFFF"/>
+                </a:highlight>
+                <a:latin typeface="Cascadia Mono" panose="020B0609020000020004" pitchFamily="49" charset="0"/>
+              </a:rPr>
+              <a:t>override</a:t>
+            </a:r>
+            <a:r>
+              <a:rPr lang="en-US" sz="2000" dirty="0">
+                <a:solidFill>
+                  <a:srgbClr val="000000"/>
+                </a:solidFill>
+                <a:highlight>
+                  <a:srgbClr val="FFFFFF"/>
+                </a:highlight>
+                <a:latin typeface="Cascadia Mono" panose="020B0609020000020004" pitchFamily="49" charset="0"/>
+              </a:rPr>
+              <a:t> </a:t>
+            </a:r>
+            <a:r>
+              <a:rPr lang="en-US" sz="2000" dirty="0">
+                <a:solidFill>
+                  <a:srgbClr val="0000FF"/>
+                </a:solidFill>
+                <a:highlight>
+                  <a:srgbClr val="FFFFFF"/>
+                </a:highlight>
+                <a:latin typeface="Cascadia Mono" panose="020B0609020000020004" pitchFamily="49" charset="0"/>
+              </a:rPr>
+              <a:t>void</a:t>
+            </a:r>
+            <a:r>
+              <a:rPr lang="en-US" sz="2000" dirty="0">
+                <a:solidFill>
+                  <a:srgbClr val="000000"/>
+                </a:solidFill>
+                <a:highlight>
+                  <a:srgbClr val="FFFFFF"/>
+                </a:highlight>
+                <a:latin typeface="Cascadia Mono" panose="020B0609020000020004" pitchFamily="49" charset="0"/>
+              </a:rPr>
+              <a:t> </a:t>
+            </a:r>
+            <a:r>
+              <a:rPr lang="en-US" sz="2000" dirty="0" err="1">
+                <a:solidFill>
+                  <a:srgbClr val="74531F"/>
+                </a:solidFill>
+                <a:highlight>
+                  <a:srgbClr val="FFFFFF"/>
+                </a:highlight>
+                <a:latin typeface="Cascadia Mono" panose="020B0609020000020004" pitchFamily="49" charset="0"/>
+              </a:rPr>
+              <a:t>OnConfiguring</a:t>
+            </a:r>
+            <a:r>
+              <a:rPr lang="en-US" sz="2000" dirty="0">
+                <a:solidFill>
+                  <a:srgbClr val="000000"/>
+                </a:solidFill>
+                <a:highlight>
+                  <a:srgbClr val="FFFFFF"/>
+                </a:highlight>
+                <a:latin typeface="Cascadia Mono" panose="020B0609020000020004" pitchFamily="49" charset="0"/>
+              </a:rPr>
+              <a:t>(</a:t>
+            </a:r>
+            <a:r>
+              <a:rPr lang="en-US" sz="2000" dirty="0" err="1">
+                <a:solidFill>
+                  <a:srgbClr val="2B91AF"/>
+                </a:solidFill>
+                <a:highlight>
+                  <a:srgbClr val="FFFFFF"/>
+                </a:highlight>
+                <a:latin typeface="Cascadia Mono" panose="020B0609020000020004" pitchFamily="49" charset="0"/>
+              </a:rPr>
+              <a:t>DbContextOptionsBuilder</a:t>
+            </a:r>
+            <a:r>
+              <a:rPr lang="en-US" sz="2000" dirty="0">
+                <a:solidFill>
+                  <a:srgbClr val="000000"/>
+                </a:solidFill>
+                <a:highlight>
+                  <a:srgbClr val="FFFFFF"/>
+                </a:highlight>
+                <a:latin typeface="Cascadia Mono" panose="020B0609020000020004" pitchFamily="49" charset="0"/>
+              </a:rPr>
+              <a:t> </a:t>
+            </a:r>
+            <a:r>
+              <a:rPr lang="en-US" sz="2000" dirty="0">
+                <a:solidFill>
+                  <a:srgbClr val="1F377F"/>
+                </a:solidFill>
+                <a:highlight>
+                  <a:srgbClr val="FFFFFF"/>
+                </a:highlight>
+                <a:latin typeface="Cascadia Mono" panose="020B0609020000020004" pitchFamily="49" charset="0"/>
+              </a:rPr>
+              <a:t>options</a:t>
+            </a:r>
+            <a:r>
+              <a:rPr lang="en-US" sz="2000" dirty="0">
+                <a:solidFill>
+                  <a:srgbClr val="000000"/>
+                </a:solidFill>
+                <a:highlight>
+                  <a:srgbClr val="FFFFFF"/>
+                </a:highlight>
+                <a:latin typeface="Cascadia Mono" panose="020B0609020000020004" pitchFamily="49" charset="0"/>
+              </a:rPr>
+              <a:t>)</a:t>
+            </a:r>
+          </a:p>
+          <a:p>
+            <a:r>
+              <a:rPr lang="ru-RU" sz="2000" dirty="0">
+                <a:solidFill>
+                  <a:srgbClr val="000000"/>
+                </a:solidFill>
+                <a:highlight>
+                  <a:srgbClr val="FFFFFF"/>
+                </a:highlight>
+                <a:latin typeface="Cascadia Mono" panose="020B0609020000020004" pitchFamily="49" charset="0"/>
+              </a:rPr>
+              <a:t>    {</a:t>
+            </a:r>
+          </a:p>
+          <a:p>
+            <a:r>
+              <a:rPr lang="en-US" sz="2000" dirty="0">
+                <a:solidFill>
+                  <a:srgbClr val="000000"/>
+                </a:solidFill>
+                <a:highlight>
+                  <a:srgbClr val="FFFFFF"/>
+                </a:highlight>
+                <a:latin typeface="Cascadia Mono" panose="020B0609020000020004" pitchFamily="49" charset="0"/>
+              </a:rPr>
+              <a:t>        </a:t>
+            </a:r>
+            <a:r>
+              <a:rPr lang="en-US" sz="2000" dirty="0" err="1">
+                <a:solidFill>
+                  <a:srgbClr val="1F377F"/>
+                </a:solidFill>
+                <a:highlight>
+                  <a:srgbClr val="FFFFFF"/>
+                </a:highlight>
+                <a:latin typeface="Cascadia Mono" panose="020B0609020000020004" pitchFamily="49" charset="0"/>
+              </a:rPr>
+              <a:t>options</a:t>
+            </a:r>
+            <a:r>
+              <a:rPr lang="en-US" sz="2000" dirty="0" err="1">
+                <a:solidFill>
+                  <a:srgbClr val="000000"/>
+                </a:solidFill>
+                <a:highlight>
+                  <a:srgbClr val="FFFFFF"/>
+                </a:highlight>
+                <a:latin typeface="Cascadia Mono" panose="020B0609020000020004" pitchFamily="49" charset="0"/>
+              </a:rPr>
+              <a:t>.</a:t>
+            </a:r>
+            <a:r>
+              <a:rPr lang="en-US" sz="2000" dirty="0" err="1">
+                <a:solidFill>
+                  <a:srgbClr val="74531F"/>
+                </a:solidFill>
+                <a:highlight>
+                  <a:srgbClr val="FFFFFF"/>
+                </a:highlight>
+                <a:latin typeface="Cascadia Mono" panose="020B0609020000020004" pitchFamily="49" charset="0"/>
+              </a:rPr>
+              <a:t>UseSqlite</a:t>
+            </a:r>
+            <a:r>
+              <a:rPr lang="en-US" sz="2000" dirty="0">
+                <a:solidFill>
+                  <a:srgbClr val="000000"/>
+                </a:solidFill>
+                <a:highlight>
+                  <a:srgbClr val="FFFFFF"/>
+                </a:highlight>
+                <a:latin typeface="Cascadia Mono" panose="020B0609020000020004" pitchFamily="49" charset="0"/>
+              </a:rPr>
+              <a:t>(</a:t>
+            </a:r>
+            <a:r>
+              <a:rPr lang="en-US" sz="2000" dirty="0">
+                <a:solidFill>
+                  <a:srgbClr val="A31515"/>
+                </a:solidFill>
+                <a:highlight>
+                  <a:srgbClr val="FFFFFF"/>
+                </a:highlight>
+                <a:latin typeface="Cascadia Mono" panose="020B0609020000020004" pitchFamily="49" charset="0"/>
+              </a:rPr>
+              <a:t>"Data Source=</a:t>
+            </a:r>
+            <a:r>
+              <a:rPr lang="en-US" sz="2000" dirty="0" err="1">
+                <a:solidFill>
+                  <a:srgbClr val="A31515"/>
+                </a:solidFill>
+                <a:highlight>
+                  <a:srgbClr val="FFFFFF"/>
+                </a:highlight>
+                <a:latin typeface="Cascadia Mono" panose="020B0609020000020004" pitchFamily="49" charset="0"/>
+              </a:rPr>
+              <a:t>MyNotes.db</a:t>
+            </a:r>
+            <a:r>
+              <a:rPr lang="en-US" sz="2000" dirty="0">
+                <a:solidFill>
+                  <a:srgbClr val="A31515"/>
+                </a:solidFill>
+                <a:highlight>
+                  <a:srgbClr val="FFFFFF"/>
+                </a:highlight>
+                <a:latin typeface="Cascadia Mono" panose="020B0609020000020004" pitchFamily="49" charset="0"/>
+              </a:rPr>
+              <a:t>"</a:t>
+            </a:r>
+            <a:r>
+              <a:rPr lang="en-US" sz="2000" dirty="0">
+                <a:solidFill>
+                  <a:srgbClr val="000000"/>
+                </a:solidFill>
+                <a:highlight>
+                  <a:srgbClr val="FFFFFF"/>
+                </a:highlight>
+                <a:latin typeface="Cascadia Mono" panose="020B0609020000020004" pitchFamily="49" charset="0"/>
+              </a:rPr>
+              <a:t>);</a:t>
+            </a:r>
+          </a:p>
+          <a:p>
+            <a:r>
+              <a:rPr lang="ru-RU" sz="2000" dirty="0">
+                <a:solidFill>
+                  <a:srgbClr val="000000"/>
+                </a:solidFill>
+                <a:highlight>
+                  <a:srgbClr val="FFFFFF"/>
+                </a:highlight>
+                <a:latin typeface="Cascadia Mono" panose="020B0609020000020004" pitchFamily="49" charset="0"/>
+              </a:rPr>
+              <a:t>    }</a:t>
+            </a:r>
+          </a:p>
+          <a:p>
+            <a:r>
+              <a:rPr lang="ru-RU" sz="2000" dirty="0">
+                <a:solidFill>
+                  <a:srgbClr val="000000"/>
+                </a:solidFill>
+                <a:highlight>
+                  <a:srgbClr val="FFFFFF"/>
+                </a:highlight>
+                <a:latin typeface="Cascadia Mono" panose="020B0609020000020004" pitchFamily="49" charset="0"/>
+              </a:rPr>
+              <a:t>}</a:t>
+            </a:r>
+            <a:endParaRPr lang="ru-RU" sz="2000" dirty="0"/>
+          </a:p>
+        </p:txBody>
+      </p:sp>
+    </p:spTree>
+    <p:extLst>
+      <p:ext uri="{BB962C8B-B14F-4D97-AF65-F5344CB8AC3E}">
+        <p14:creationId xmlns:p14="http://schemas.microsoft.com/office/powerpoint/2010/main" val="1590975776"/>
+      </p:ext>
+    </p:extLst>
+  </p:cSld>
+  <p:clrMapOvr>
+    <a:masterClrMapping/>
+  </p:clrMapOvr>
+  <p:timing>
+    <p:tnLst>
+      <p:par>
+        <p:cTn id="1" dur="indefinite" restart="never" nodeType="tmRoot"/>
+      </p:par>
+    </p:tnLst>
+  </p:timing>
+</p:sld>
+</file>
+
+<file path=ppt/slides/slide14.xml><?xml version="1.0" encoding="utf-8"?>
+<p:sld xmlns:a="http://schemas.openxmlformats.org/drawingml/2006/main" xmlns:r="http://schemas.openxmlformats.org/officeDocument/2006/relationships" xmlns:p="http://schemas.openxmlformats.org/presentationml/2006/main">
+  <p:cSld>
+    <p:spTree>
+      <p:nvGrpSpPr>
+        <p:cNvPr id="1" name=""/>
+        <p:cNvGrpSpPr/>
+        <p:nvPr/>
+      </p:nvGrpSpPr>
+      <p:grpSpPr>
+        <a:xfrm>
+          <a:off x="0" y="0"/>
+          <a:ext cx="0" cy="0"/>
+          <a:chOff x="0" y="0"/>
+          <a:chExt cx="0" cy="0"/>
+        </a:xfrm>
+      </p:grpSpPr>
+      <p:sp>
+        <p:nvSpPr>
+          <p:cNvPr id="7" name="Прямоугольник 6"/>
+          <p:cNvSpPr/>
+          <p:nvPr/>
+        </p:nvSpPr>
+        <p:spPr>
+          <a:xfrm>
+            <a:off x="0" y="0"/>
+            <a:ext cx="12192000" cy="6186309"/>
+          </a:xfrm>
+          <a:prstGeom prst="rect">
+            <a:avLst/>
+          </a:prstGeom>
+        </p:spPr>
+        <p:txBody>
+          <a:bodyPr wrap="square" lIns="360000" rIns="360000">
+            <a:spAutoFit/>
+          </a:bodyPr>
+          <a:lstStyle/>
+          <a:p>
+            <a:pPr>
+              <a:lnSpc>
+                <a:spcPct val="150000"/>
+              </a:lnSpc>
+            </a:pPr>
+            <a:r>
+              <a:rPr lang="ru-RU" sz="2400" dirty="0"/>
+              <a:t>Иногда атрибутов [</a:t>
+            </a:r>
+            <a:r>
+              <a:rPr lang="ru-RU" sz="2400" dirty="0" err="1"/>
+              <a:t>Key</a:t>
+            </a:r>
+            <a:r>
+              <a:rPr lang="ru-RU" sz="2400" dirty="0"/>
+              <a:t>] или [</a:t>
+            </a:r>
+            <a:r>
+              <a:rPr lang="ru-RU" sz="2400" dirty="0" err="1"/>
+              <a:t>MaxLength</a:t>
+            </a:r>
+            <a:r>
+              <a:rPr lang="ru-RU" sz="2400" dirty="0"/>
+              <a:t>] недостаточно, или мы не хотим «пачкать» модель техническим кодом. Для этого используется </a:t>
+            </a:r>
+            <a:r>
+              <a:rPr lang="ru-RU" sz="2400" b="1" dirty="0" err="1"/>
+              <a:t>Fluent</a:t>
+            </a:r>
+            <a:r>
+              <a:rPr lang="ru-RU" sz="2400" b="1" dirty="0"/>
+              <a:t> API</a:t>
+            </a:r>
+            <a:r>
+              <a:rPr lang="ru-RU" sz="2400" dirty="0"/>
+              <a:t>.</a:t>
+            </a:r>
+          </a:p>
+          <a:p>
+            <a:pPr>
+              <a:lnSpc>
+                <a:spcPct val="150000"/>
+              </a:lnSpc>
+            </a:pPr>
+            <a:endParaRPr lang="en-US" sz="2400" b="1" dirty="0" smtClean="0"/>
+          </a:p>
+          <a:p>
+            <a:pPr>
+              <a:lnSpc>
+                <a:spcPct val="150000"/>
+              </a:lnSpc>
+            </a:pPr>
+            <a:r>
+              <a:rPr lang="ru-RU" sz="2400" b="1" dirty="0" smtClean="0"/>
+              <a:t>Суть</a:t>
+            </a:r>
+            <a:r>
+              <a:rPr lang="ru-RU" sz="2400" b="1" dirty="0"/>
+              <a:t>:</a:t>
+            </a:r>
+            <a:r>
+              <a:rPr lang="ru-RU" sz="2400" dirty="0"/>
+              <a:t> Мы выносим правила создания таблиц в отдельный метод или класс.</a:t>
+            </a:r>
+          </a:p>
+          <a:p>
+            <a:pPr marL="342900" indent="-342900">
+              <a:lnSpc>
+                <a:spcPct val="150000"/>
+              </a:lnSpc>
+              <a:buFont typeface="Arial" panose="020B0604020202020204" pitchFamily="34" charset="0"/>
+              <a:buChar char="•"/>
+            </a:pPr>
+            <a:r>
+              <a:rPr lang="ru-RU" sz="2400" b="1" dirty="0"/>
+              <a:t>Класс конфигурации:</a:t>
+            </a:r>
+            <a:r>
+              <a:rPr lang="ru-RU" sz="2400" dirty="0"/>
+              <a:t> Реализует интерфейс </a:t>
+            </a:r>
+            <a:r>
+              <a:rPr lang="ru-RU" sz="2400" dirty="0" err="1"/>
+              <a:t>IEntityTypeConfiguration</a:t>
+            </a:r>
+            <a:r>
+              <a:rPr lang="ru-RU" sz="2400" dirty="0"/>
+              <a:t>&lt;T&gt;.</a:t>
+            </a:r>
+          </a:p>
+          <a:p>
+            <a:pPr marL="342900" indent="-342900">
+              <a:lnSpc>
+                <a:spcPct val="150000"/>
+              </a:lnSpc>
+              <a:buFont typeface="Arial" panose="020B0604020202020204" pitchFamily="34" charset="0"/>
+              <a:buChar char="•"/>
+            </a:pPr>
+            <a:r>
+              <a:rPr lang="ru-RU" sz="2400" b="1" dirty="0"/>
+              <a:t>Метод </a:t>
+            </a:r>
+            <a:r>
+              <a:rPr lang="ru-RU" sz="2400" b="1" dirty="0" err="1"/>
+              <a:t>OnModelCreating</a:t>
+            </a:r>
+            <a:r>
+              <a:rPr lang="ru-RU" sz="2400" b="1" dirty="0"/>
+              <a:t>:</a:t>
+            </a:r>
+            <a:r>
+              <a:rPr lang="ru-RU" sz="2400" dirty="0"/>
+              <a:t> В нем мы «регистрируем» наши настройки.</a:t>
+            </a:r>
+          </a:p>
+          <a:p>
+            <a:pPr>
+              <a:lnSpc>
+                <a:spcPct val="150000"/>
+              </a:lnSpc>
+            </a:pPr>
+            <a:endParaRPr lang="en-US" sz="2400" b="1" dirty="0" smtClean="0"/>
+          </a:p>
+          <a:p>
+            <a:pPr>
+              <a:lnSpc>
+                <a:spcPct val="150000"/>
+              </a:lnSpc>
+            </a:pPr>
+            <a:r>
+              <a:rPr lang="ru-RU" sz="2400" b="1" dirty="0" smtClean="0"/>
+              <a:t>Преимущество</a:t>
+            </a:r>
+            <a:r>
+              <a:rPr lang="ru-RU" sz="2400" b="1" dirty="0"/>
+              <a:t>:</a:t>
+            </a:r>
+            <a:r>
+              <a:rPr lang="ru-RU" sz="2400" dirty="0"/>
+              <a:t> Модели остаются «чистыми» (только данные), а вся техническая логика базы данных собрана в одном месте.</a:t>
+            </a:r>
+          </a:p>
+        </p:txBody>
+      </p:sp>
+    </p:spTree>
+    <p:extLst>
+      <p:ext uri="{BB962C8B-B14F-4D97-AF65-F5344CB8AC3E}">
+        <p14:creationId xmlns:p14="http://schemas.microsoft.com/office/powerpoint/2010/main" val="4077394487"/>
+      </p:ext>
+    </p:extLst>
+  </p:cSld>
+  <p:clrMapOvr>
+    <a:masterClrMapping/>
+  </p:clrMapOvr>
+  <p:timing>
+    <p:tnLst>
+      <p:par>
+        <p:cTn id="1" dur="indefinite" restart="never" nodeType="tmRoot"/>
+      </p:par>
+    </p:tnLst>
+  </p:timing>
+</p:sld>
+</file>
+
+<file path=ppt/slides/slide15.xml><?xml version="1.0" encoding="utf-8"?>
+<p:sld xmlns:a="http://schemas.openxmlformats.org/drawingml/2006/main" xmlns:r="http://schemas.openxmlformats.org/officeDocument/2006/relationships" xmlns:p="http://schemas.openxmlformats.org/presentationml/2006/main">
+  <p:cSld>
+    <p:spTree>
+      <p:nvGrpSpPr>
+        <p:cNvPr id="1" name=""/>
+        <p:cNvGrpSpPr/>
+        <p:nvPr/>
+      </p:nvGrpSpPr>
+      <p:grpSpPr>
+        <a:xfrm>
+          <a:off x="0" y="0"/>
+          <a:ext cx="0" cy="0"/>
+          <a:chOff x="0" y="0"/>
+          <a:chExt cx="0" cy="0"/>
+        </a:xfrm>
+      </p:grpSpPr>
+      <p:sp>
+        <p:nvSpPr>
+          <p:cNvPr id="7" name="Прямоугольник 6"/>
+          <p:cNvSpPr/>
+          <p:nvPr/>
+        </p:nvSpPr>
+        <p:spPr>
+          <a:xfrm>
+            <a:off x="0" y="0"/>
+            <a:ext cx="12192000" cy="6555641"/>
+          </a:xfrm>
+          <a:prstGeom prst="rect">
+            <a:avLst/>
+          </a:prstGeom>
+        </p:spPr>
+        <p:txBody>
+          <a:bodyPr wrap="square" lIns="360000" rIns="360000">
+            <a:spAutoFit/>
+          </a:bodyPr>
+          <a:lstStyle/>
+          <a:p>
+            <a:pPr>
+              <a:lnSpc>
+                <a:spcPct val="150000"/>
+              </a:lnSpc>
+            </a:pPr>
+            <a:r>
+              <a:rPr lang="ru-RU" sz="2400" dirty="0"/>
+              <a:t>Вместо атрибутов над полями, мы пишем четкие инструкции в коде</a:t>
+            </a:r>
+            <a:r>
+              <a:rPr lang="ru-RU" sz="2400" dirty="0" smtClean="0"/>
+              <a:t>.</a:t>
+            </a:r>
+            <a:endParaRPr lang="en-US" sz="2400" dirty="0" smtClean="0"/>
+          </a:p>
+          <a:p>
+            <a:endParaRPr lang="en-US" sz="2400" dirty="0" smtClean="0">
+              <a:solidFill>
+                <a:srgbClr val="0000FF"/>
+              </a:solidFill>
+              <a:highlight>
+                <a:srgbClr val="FFFFFF"/>
+              </a:highlight>
+              <a:latin typeface="Cascadia Mono" panose="020B0609020000020004" pitchFamily="49" charset="0"/>
+            </a:endParaRPr>
+          </a:p>
+          <a:p>
+            <a:r>
+              <a:rPr lang="en-US" sz="2400" dirty="0" smtClean="0">
+                <a:solidFill>
+                  <a:srgbClr val="0000FF"/>
+                </a:solidFill>
+                <a:highlight>
+                  <a:srgbClr val="FFFFFF"/>
+                </a:highlight>
+                <a:latin typeface="Cascadia Mono" panose="020B0609020000020004" pitchFamily="49" charset="0"/>
+              </a:rPr>
+              <a:t>public</a:t>
+            </a:r>
+            <a:r>
+              <a:rPr lang="en-US" sz="2400" dirty="0" smtClean="0">
+                <a:solidFill>
+                  <a:srgbClr val="000000"/>
+                </a:solidFill>
+                <a:highlight>
+                  <a:srgbClr val="FFFFFF"/>
+                </a:highlight>
+                <a:latin typeface="Cascadia Mono" panose="020B0609020000020004" pitchFamily="49" charset="0"/>
+              </a:rPr>
+              <a:t> </a:t>
+            </a:r>
+            <a:r>
+              <a:rPr lang="en-US" sz="2400" dirty="0">
+                <a:solidFill>
+                  <a:srgbClr val="0000FF"/>
+                </a:solidFill>
+                <a:highlight>
+                  <a:srgbClr val="FFFFFF"/>
+                </a:highlight>
+                <a:latin typeface="Cascadia Mono" panose="020B0609020000020004" pitchFamily="49" charset="0"/>
+              </a:rPr>
+              <a:t>class</a:t>
+            </a:r>
+            <a:r>
+              <a:rPr lang="en-US" sz="2400" dirty="0">
+                <a:solidFill>
+                  <a:srgbClr val="000000"/>
+                </a:solidFill>
+                <a:highlight>
+                  <a:srgbClr val="FFFFFF"/>
+                </a:highlight>
+                <a:latin typeface="Cascadia Mono" panose="020B0609020000020004" pitchFamily="49" charset="0"/>
+              </a:rPr>
+              <a:t> </a:t>
+            </a:r>
+            <a:r>
+              <a:rPr lang="en-US" sz="2400" dirty="0" err="1">
+                <a:solidFill>
+                  <a:srgbClr val="2B91AF"/>
+                </a:solidFill>
+                <a:highlight>
+                  <a:srgbClr val="FFFFFF"/>
+                </a:highlight>
+                <a:latin typeface="Cascadia Mono" panose="020B0609020000020004" pitchFamily="49" charset="0"/>
+              </a:rPr>
+              <a:t>NoteConfiguration</a:t>
+            </a:r>
+            <a:r>
+              <a:rPr lang="en-US" sz="2400" dirty="0">
+                <a:solidFill>
+                  <a:srgbClr val="000000"/>
+                </a:solidFill>
+                <a:highlight>
+                  <a:srgbClr val="FFFFFF"/>
+                </a:highlight>
+                <a:latin typeface="Cascadia Mono" panose="020B0609020000020004" pitchFamily="49" charset="0"/>
+              </a:rPr>
+              <a:t> : </a:t>
+            </a:r>
+            <a:r>
+              <a:rPr lang="en-US" sz="2400" dirty="0" err="1">
+                <a:solidFill>
+                  <a:srgbClr val="2B91AF"/>
+                </a:solidFill>
+                <a:highlight>
+                  <a:srgbClr val="FFFFFF"/>
+                </a:highlight>
+                <a:latin typeface="Cascadia Mono" panose="020B0609020000020004" pitchFamily="49" charset="0"/>
+              </a:rPr>
+              <a:t>IEntityTypeConfiguration</a:t>
+            </a:r>
+            <a:r>
+              <a:rPr lang="en-US" sz="2400" dirty="0">
+                <a:solidFill>
+                  <a:srgbClr val="000000"/>
+                </a:solidFill>
+                <a:highlight>
+                  <a:srgbClr val="FFFFFF"/>
+                </a:highlight>
+                <a:latin typeface="Cascadia Mono" panose="020B0609020000020004" pitchFamily="49" charset="0"/>
+              </a:rPr>
+              <a:t>&lt;</a:t>
+            </a:r>
+            <a:r>
+              <a:rPr lang="en-US" sz="2400" dirty="0">
+                <a:solidFill>
+                  <a:srgbClr val="2B91AF"/>
+                </a:solidFill>
+                <a:highlight>
+                  <a:srgbClr val="FFFFFF"/>
+                </a:highlight>
+                <a:latin typeface="Cascadia Mono" panose="020B0609020000020004" pitchFamily="49" charset="0"/>
+              </a:rPr>
+              <a:t>Note</a:t>
+            </a:r>
+            <a:r>
+              <a:rPr lang="en-US" sz="2400" dirty="0">
+                <a:solidFill>
+                  <a:srgbClr val="000000"/>
+                </a:solidFill>
+                <a:highlight>
+                  <a:srgbClr val="FFFFFF"/>
+                </a:highlight>
+                <a:latin typeface="Cascadia Mono" panose="020B0609020000020004" pitchFamily="49" charset="0"/>
+              </a:rPr>
+              <a:t>&gt;</a:t>
+            </a:r>
+          </a:p>
+          <a:p>
+            <a:r>
+              <a:rPr lang="ru-RU" sz="2400" dirty="0">
+                <a:solidFill>
+                  <a:srgbClr val="000000"/>
+                </a:solidFill>
+                <a:highlight>
+                  <a:srgbClr val="FFFFFF"/>
+                </a:highlight>
+                <a:latin typeface="Cascadia Mono" panose="020B0609020000020004" pitchFamily="49" charset="0"/>
+              </a:rPr>
+              <a:t>{</a:t>
+            </a:r>
+          </a:p>
+          <a:p>
+            <a:r>
+              <a:rPr lang="en-US" sz="2400" dirty="0">
+                <a:solidFill>
+                  <a:srgbClr val="000000"/>
+                </a:solidFill>
+                <a:highlight>
+                  <a:srgbClr val="FFFFFF"/>
+                </a:highlight>
+                <a:latin typeface="Cascadia Mono" panose="020B0609020000020004" pitchFamily="49" charset="0"/>
+              </a:rPr>
+              <a:t>    </a:t>
+            </a:r>
+            <a:r>
+              <a:rPr lang="en-US" sz="2400" dirty="0">
+                <a:solidFill>
+                  <a:srgbClr val="0000FF"/>
+                </a:solidFill>
+                <a:highlight>
+                  <a:srgbClr val="FFFFFF"/>
+                </a:highlight>
+                <a:latin typeface="Cascadia Mono" panose="020B0609020000020004" pitchFamily="49" charset="0"/>
+              </a:rPr>
+              <a:t>public</a:t>
+            </a:r>
+            <a:r>
+              <a:rPr lang="en-US" sz="2400" dirty="0">
+                <a:solidFill>
+                  <a:srgbClr val="000000"/>
+                </a:solidFill>
+                <a:highlight>
+                  <a:srgbClr val="FFFFFF"/>
+                </a:highlight>
+                <a:latin typeface="Cascadia Mono" panose="020B0609020000020004" pitchFamily="49" charset="0"/>
+              </a:rPr>
+              <a:t> </a:t>
+            </a:r>
+            <a:r>
+              <a:rPr lang="en-US" sz="2400" dirty="0">
+                <a:solidFill>
+                  <a:srgbClr val="0000FF"/>
+                </a:solidFill>
+                <a:highlight>
+                  <a:srgbClr val="FFFFFF"/>
+                </a:highlight>
+                <a:latin typeface="Cascadia Mono" panose="020B0609020000020004" pitchFamily="49" charset="0"/>
+              </a:rPr>
+              <a:t>void</a:t>
+            </a:r>
+            <a:r>
+              <a:rPr lang="en-US" sz="2400" dirty="0">
+                <a:solidFill>
+                  <a:srgbClr val="000000"/>
+                </a:solidFill>
+                <a:highlight>
+                  <a:srgbClr val="FFFFFF"/>
+                </a:highlight>
+                <a:latin typeface="Cascadia Mono" panose="020B0609020000020004" pitchFamily="49" charset="0"/>
+              </a:rPr>
+              <a:t> </a:t>
+            </a:r>
+            <a:r>
+              <a:rPr lang="en-US" sz="2400" dirty="0">
+                <a:solidFill>
+                  <a:srgbClr val="74531F"/>
+                </a:solidFill>
+                <a:highlight>
+                  <a:srgbClr val="FFFFFF"/>
+                </a:highlight>
+                <a:latin typeface="Cascadia Mono" panose="020B0609020000020004" pitchFamily="49" charset="0"/>
+              </a:rPr>
+              <a:t>Configure</a:t>
+            </a:r>
+            <a:r>
+              <a:rPr lang="en-US" sz="2400" dirty="0">
+                <a:solidFill>
+                  <a:srgbClr val="000000"/>
+                </a:solidFill>
+                <a:highlight>
+                  <a:srgbClr val="FFFFFF"/>
+                </a:highlight>
+                <a:latin typeface="Cascadia Mono" panose="020B0609020000020004" pitchFamily="49" charset="0"/>
+              </a:rPr>
+              <a:t>(</a:t>
+            </a:r>
+            <a:r>
+              <a:rPr lang="en-US" sz="2400" dirty="0" err="1">
+                <a:solidFill>
+                  <a:srgbClr val="2B91AF"/>
+                </a:solidFill>
+                <a:highlight>
+                  <a:srgbClr val="FFFFFF"/>
+                </a:highlight>
+                <a:latin typeface="Cascadia Mono" panose="020B0609020000020004" pitchFamily="49" charset="0"/>
+              </a:rPr>
+              <a:t>EntityTypeBuilder</a:t>
+            </a:r>
+            <a:r>
+              <a:rPr lang="en-US" sz="2400" dirty="0">
+                <a:solidFill>
+                  <a:srgbClr val="000000"/>
+                </a:solidFill>
+                <a:highlight>
+                  <a:srgbClr val="FFFFFF"/>
+                </a:highlight>
+                <a:latin typeface="Cascadia Mono" panose="020B0609020000020004" pitchFamily="49" charset="0"/>
+              </a:rPr>
+              <a:t>&lt;</a:t>
+            </a:r>
+            <a:r>
+              <a:rPr lang="en-US" sz="2400" dirty="0">
+                <a:solidFill>
+                  <a:srgbClr val="2B91AF"/>
+                </a:solidFill>
+                <a:highlight>
+                  <a:srgbClr val="FFFFFF"/>
+                </a:highlight>
+                <a:latin typeface="Cascadia Mono" panose="020B0609020000020004" pitchFamily="49" charset="0"/>
+              </a:rPr>
+              <a:t>Note</a:t>
+            </a:r>
+            <a:r>
+              <a:rPr lang="en-US" sz="2400" dirty="0">
+                <a:solidFill>
+                  <a:srgbClr val="000000"/>
+                </a:solidFill>
+                <a:highlight>
+                  <a:srgbClr val="FFFFFF"/>
+                </a:highlight>
+                <a:latin typeface="Cascadia Mono" panose="020B0609020000020004" pitchFamily="49" charset="0"/>
+              </a:rPr>
+              <a:t>&gt; </a:t>
+            </a:r>
+            <a:r>
+              <a:rPr lang="en-US" sz="2400" dirty="0">
+                <a:solidFill>
+                  <a:srgbClr val="1F377F"/>
+                </a:solidFill>
+                <a:highlight>
+                  <a:srgbClr val="FFFFFF"/>
+                </a:highlight>
+                <a:latin typeface="Cascadia Mono" panose="020B0609020000020004" pitchFamily="49" charset="0"/>
+              </a:rPr>
+              <a:t>builder</a:t>
+            </a:r>
+            <a:r>
+              <a:rPr lang="en-US" sz="2400" dirty="0">
+                <a:solidFill>
+                  <a:srgbClr val="000000"/>
+                </a:solidFill>
+                <a:highlight>
+                  <a:srgbClr val="FFFFFF"/>
+                </a:highlight>
+                <a:latin typeface="Cascadia Mono" panose="020B0609020000020004" pitchFamily="49" charset="0"/>
+              </a:rPr>
+              <a:t>)</a:t>
+            </a:r>
+          </a:p>
+          <a:p>
+            <a:r>
+              <a:rPr lang="ru-RU" sz="2400" dirty="0">
+                <a:solidFill>
+                  <a:srgbClr val="000000"/>
+                </a:solidFill>
+                <a:highlight>
+                  <a:srgbClr val="FFFFFF"/>
+                </a:highlight>
+                <a:latin typeface="Cascadia Mono" panose="020B0609020000020004" pitchFamily="49" charset="0"/>
+              </a:rPr>
+              <a:t>    {</a:t>
+            </a:r>
+          </a:p>
+          <a:p>
+            <a:r>
+              <a:rPr lang="en-US" sz="2400" dirty="0">
+                <a:solidFill>
+                  <a:srgbClr val="000000"/>
+                </a:solidFill>
+                <a:highlight>
+                  <a:srgbClr val="FFFFFF"/>
+                </a:highlight>
+                <a:latin typeface="Cascadia Mono" panose="020B0609020000020004" pitchFamily="49" charset="0"/>
+              </a:rPr>
+              <a:t>        </a:t>
+            </a:r>
+            <a:r>
+              <a:rPr lang="en-US" sz="2400" dirty="0" err="1">
+                <a:solidFill>
+                  <a:srgbClr val="1F377F"/>
+                </a:solidFill>
+                <a:highlight>
+                  <a:srgbClr val="FFFFFF"/>
+                </a:highlight>
+                <a:latin typeface="Cascadia Mono" panose="020B0609020000020004" pitchFamily="49" charset="0"/>
+              </a:rPr>
+              <a:t>builder</a:t>
+            </a:r>
+            <a:r>
+              <a:rPr lang="en-US" sz="2400" dirty="0" err="1">
+                <a:solidFill>
+                  <a:srgbClr val="000000"/>
+                </a:solidFill>
+                <a:highlight>
+                  <a:srgbClr val="FFFFFF"/>
+                </a:highlight>
+                <a:latin typeface="Cascadia Mono" panose="020B0609020000020004" pitchFamily="49" charset="0"/>
+              </a:rPr>
+              <a:t>.</a:t>
+            </a:r>
+            <a:r>
+              <a:rPr lang="en-US" sz="2400" dirty="0" err="1">
+                <a:solidFill>
+                  <a:srgbClr val="74531F"/>
+                </a:solidFill>
+                <a:highlight>
+                  <a:srgbClr val="FFFFFF"/>
+                </a:highlight>
+                <a:latin typeface="Cascadia Mono" panose="020B0609020000020004" pitchFamily="49" charset="0"/>
+              </a:rPr>
+              <a:t>HasKey</a:t>
+            </a:r>
+            <a:r>
+              <a:rPr lang="en-US" sz="2400" dirty="0">
+                <a:solidFill>
+                  <a:srgbClr val="000000"/>
+                </a:solidFill>
+                <a:highlight>
+                  <a:srgbClr val="FFFFFF"/>
+                </a:highlight>
+                <a:latin typeface="Cascadia Mono" panose="020B0609020000020004" pitchFamily="49" charset="0"/>
+              </a:rPr>
+              <a:t>(</a:t>
+            </a:r>
+            <a:r>
+              <a:rPr lang="en-US" sz="2400" dirty="0">
+                <a:solidFill>
+                  <a:srgbClr val="1F377F"/>
+                </a:solidFill>
+                <a:highlight>
+                  <a:srgbClr val="FFFFFF"/>
+                </a:highlight>
+                <a:latin typeface="Cascadia Mono" panose="020B0609020000020004" pitchFamily="49" charset="0"/>
+              </a:rPr>
+              <a:t>x</a:t>
+            </a:r>
+            <a:r>
+              <a:rPr lang="en-US" sz="2400" dirty="0">
+                <a:solidFill>
+                  <a:srgbClr val="000000"/>
+                </a:solidFill>
+                <a:highlight>
+                  <a:srgbClr val="FFFFFF"/>
+                </a:highlight>
+                <a:latin typeface="Cascadia Mono" panose="020B0609020000020004" pitchFamily="49" charset="0"/>
+              </a:rPr>
+              <a:t> =&gt; </a:t>
+            </a:r>
+            <a:r>
+              <a:rPr lang="en-US" sz="2400" dirty="0" err="1">
+                <a:solidFill>
+                  <a:srgbClr val="1F377F"/>
+                </a:solidFill>
+                <a:highlight>
+                  <a:srgbClr val="FFFFFF"/>
+                </a:highlight>
+                <a:latin typeface="Cascadia Mono" panose="020B0609020000020004" pitchFamily="49" charset="0"/>
+              </a:rPr>
+              <a:t>x</a:t>
+            </a:r>
+            <a:r>
+              <a:rPr lang="en-US" sz="2400" dirty="0" err="1">
+                <a:solidFill>
+                  <a:srgbClr val="000000"/>
+                </a:solidFill>
+                <a:highlight>
+                  <a:srgbClr val="FFFFFF"/>
+                </a:highlight>
+                <a:latin typeface="Cascadia Mono" panose="020B0609020000020004" pitchFamily="49" charset="0"/>
+              </a:rPr>
+              <a:t>.Id</a:t>
+            </a:r>
+            <a:r>
+              <a:rPr lang="en-US" sz="2400" dirty="0">
+                <a:solidFill>
+                  <a:srgbClr val="000000"/>
+                </a:solidFill>
+                <a:highlight>
+                  <a:srgbClr val="FFFFFF"/>
+                </a:highlight>
+                <a:latin typeface="Cascadia Mono" panose="020B0609020000020004" pitchFamily="49" charset="0"/>
+              </a:rPr>
+              <a:t>); </a:t>
+            </a:r>
+            <a:r>
+              <a:rPr lang="en-US" sz="2400" dirty="0">
+                <a:solidFill>
+                  <a:srgbClr val="008000"/>
+                </a:solidFill>
+                <a:highlight>
+                  <a:srgbClr val="FFFFFF"/>
+                </a:highlight>
+                <a:latin typeface="Cascadia Mono" panose="020B0609020000020004" pitchFamily="49" charset="0"/>
+              </a:rPr>
+              <a:t>// </a:t>
+            </a:r>
+            <a:r>
+              <a:rPr lang="ru-RU" sz="2400" dirty="0">
+                <a:solidFill>
+                  <a:srgbClr val="008000"/>
+                </a:solidFill>
+                <a:highlight>
+                  <a:srgbClr val="FFFFFF"/>
+                </a:highlight>
+                <a:latin typeface="Cascadia Mono" panose="020B0609020000020004" pitchFamily="49" charset="0"/>
+              </a:rPr>
+              <a:t>Первичный ключ</a:t>
+            </a:r>
+            <a:endParaRPr lang="ru-RU" sz="2400" dirty="0">
+              <a:solidFill>
+                <a:srgbClr val="000000"/>
+              </a:solidFill>
+              <a:highlight>
+                <a:srgbClr val="FFFFFF"/>
+              </a:highlight>
+              <a:latin typeface="Cascadia Mono" panose="020B0609020000020004" pitchFamily="49" charset="0"/>
+            </a:endParaRPr>
+          </a:p>
+          <a:p>
+            <a:endParaRPr lang="ru-RU" sz="2400" dirty="0">
+              <a:solidFill>
+                <a:srgbClr val="000000"/>
+              </a:solidFill>
+              <a:highlight>
+                <a:srgbClr val="FFFFFF"/>
+              </a:highlight>
+              <a:latin typeface="Cascadia Mono" panose="020B0609020000020004" pitchFamily="49" charset="0"/>
+            </a:endParaRPr>
+          </a:p>
+          <a:p>
+            <a:r>
+              <a:rPr lang="en-US" sz="2400" dirty="0">
+                <a:solidFill>
+                  <a:srgbClr val="000000"/>
+                </a:solidFill>
+                <a:highlight>
+                  <a:srgbClr val="FFFFFF"/>
+                </a:highlight>
+                <a:latin typeface="Cascadia Mono" panose="020B0609020000020004" pitchFamily="49" charset="0"/>
+              </a:rPr>
+              <a:t>        </a:t>
+            </a:r>
+            <a:r>
+              <a:rPr lang="en-US" sz="2400" dirty="0" err="1">
+                <a:solidFill>
+                  <a:srgbClr val="1F377F"/>
+                </a:solidFill>
+                <a:highlight>
+                  <a:srgbClr val="FFFFFF"/>
+                </a:highlight>
+                <a:latin typeface="Cascadia Mono" panose="020B0609020000020004" pitchFamily="49" charset="0"/>
+              </a:rPr>
+              <a:t>builder</a:t>
+            </a:r>
+            <a:r>
+              <a:rPr lang="en-US" sz="2400" dirty="0" err="1">
+                <a:solidFill>
+                  <a:srgbClr val="000000"/>
+                </a:solidFill>
+                <a:highlight>
+                  <a:srgbClr val="FFFFFF"/>
+                </a:highlight>
+                <a:latin typeface="Cascadia Mono" panose="020B0609020000020004" pitchFamily="49" charset="0"/>
+              </a:rPr>
+              <a:t>.</a:t>
+            </a:r>
+            <a:r>
+              <a:rPr lang="en-US" sz="2400" dirty="0" err="1">
+                <a:solidFill>
+                  <a:srgbClr val="74531F"/>
+                </a:solidFill>
+                <a:highlight>
+                  <a:srgbClr val="FFFFFF"/>
+                </a:highlight>
+                <a:latin typeface="Cascadia Mono" panose="020B0609020000020004" pitchFamily="49" charset="0"/>
+              </a:rPr>
+              <a:t>Property</a:t>
+            </a:r>
+            <a:r>
+              <a:rPr lang="en-US" sz="2400" dirty="0">
+                <a:solidFill>
+                  <a:srgbClr val="000000"/>
+                </a:solidFill>
+                <a:highlight>
+                  <a:srgbClr val="FFFFFF"/>
+                </a:highlight>
+                <a:latin typeface="Cascadia Mono" panose="020B0609020000020004" pitchFamily="49" charset="0"/>
+              </a:rPr>
+              <a:t>(</a:t>
+            </a:r>
+            <a:r>
+              <a:rPr lang="en-US" sz="2400" dirty="0">
+                <a:solidFill>
+                  <a:srgbClr val="1F377F"/>
+                </a:solidFill>
+                <a:highlight>
+                  <a:srgbClr val="FFFFFF"/>
+                </a:highlight>
+                <a:latin typeface="Cascadia Mono" panose="020B0609020000020004" pitchFamily="49" charset="0"/>
+              </a:rPr>
+              <a:t>n</a:t>
+            </a:r>
+            <a:r>
+              <a:rPr lang="en-US" sz="2400" dirty="0">
+                <a:solidFill>
+                  <a:srgbClr val="000000"/>
+                </a:solidFill>
+                <a:highlight>
+                  <a:srgbClr val="FFFFFF"/>
+                </a:highlight>
+                <a:latin typeface="Cascadia Mono" panose="020B0609020000020004" pitchFamily="49" charset="0"/>
+              </a:rPr>
+              <a:t> =&gt; </a:t>
+            </a:r>
+            <a:r>
+              <a:rPr lang="en-US" sz="2400" dirty="0" err="1">
+                <a:solidFill>
+                  <a:srgbClr val="1F377F"/>
+                </a:solidFill>
+                <a:highlight>
+                  <a:srgbClr val="FFFFFF"/>
+                </a:highlight>
+                <a:latin typeface="Cascadia Mono" panose="020B0609020000020004" pitchFamily="49" charset="0"/>
+              </a:rPr>
+              <a:t>n</a:t>
+            </a:r>
+            <a:r>
+              <a:rPr lang="en-US" sz="2400" dirty="0" err="1">
+                <a:solidFill>
+                  <a:srgbClr val="000000"/>
+                </a:solidFill>
+                <a:highlight>
+                  <a:srgbClr val="FFFFFF"/>
+                </a:highlight>
+                <a:latin typeface="Cascadia Mono" panose="020B0609020000020004" pitchFamily="49" charset="0"/>
+              </a:rPr>
+              <a:t>.Title</a:t>
+            </a:r>
+            <a:r>
+              <a:rPr lang="en-US" sz="2400" dirty="0">
+                <a:solidFill>
+                  <a:srgbClr val="000000"/>
+                </a:solidFill>
+                <a:highlight>
+                  <a:srgbClr val="FFFFFF"/>
+                </a:highlight>
+                <a:latin typeface="Cascadia Mono" panose="020B0609020000020004" pitchFamily="49" charset="0"/>
+              </a:rPr>
+              <a:t>)</a:t>
+            </a:r>
+          </a:p>
+          <a:p>
+            <a:r>
+              <a:rPr lang="en-US" sz="2400" dirty="0">
+                <a:solidFill>
+                  <a:srgbClr val="000000"/>
+                </a:solidFill>
+                <a:highlight>
+                  <a:srgbClr val="FFFFFF"/>
+                </a:highlight>
+                <a:latin typeface="Cascadia Mono" panose="020B0609020000020004" pitchFamily="49" charset="0"/>
+              </a:rPr>
+              <a:t>               .</a:t>
+            </a:r>
+            <a:r>
+              <a:rPr lang="en-US" sz="2400" dirty="0" err="1">
+                <a:solidFill>
+                  <a:srgbClr val="74531F"/>
+                </a:solidFill>
+                <a:highlight>
+                  <a:srgbClr val="FFFFFF"/>
+                </a:highlight>
+                <a:latin typeface="Cascadia Mono" panose="020B0609020000020004" pitchFamily="49" charset="0"/>
+              </a:rPr>
+              <a:t>HasMaxLength</a:t>
+            </a:r>
+            <a:r>
+              <a:rPr lang="en-US" sz="2400" dirty="0">
+                <a:solidFill>
+                  <a:srgbClr val="000000"/>
+                </a:solidFill>
+                <a:highlight>
+                  <a:srgbClr val="FFFFFF"/>
+                </a:highlight>
+                <a:latin typeface="Cascadia Mono" panose="020B0609020000020004" pitchFamily="49" charset="0"/>
+              </a:rPr>
+              <a:t>(256)   </a:t>
+            </a:r>
+            <a:r>
+              <a:rPr lang="en-US" sz="2400" dirty="0">
+                <a:solidFill>
+                  <a:srgbClr val="008000"/>
+                </a:solidFill>
+                <a:highlight>
+                  <a:srgbClr val="FFFFFF"/>
+                </a:highlight>
+                <a:latin typeface="Cascadia Mono" panose="020B0609020000020004" pitchFamily="49" charset="0"/>
+              </a:rPr>
+              <a:t>// </a:t>
+            </a:r>
+            <a:r>
+              <a:rPr lang="ru-RU" sz="2400" dirty="0">
+                <a:solidFill>
+                  <a:srgbClr val="008000"/>
+                </a:solidFill>
+                <a:highlight>
+                  <a:srgbClr val="FFFFFF"/>
+                </a:highlight>
+                <a:latin typeface="Cascadia Mono" panose="020B0609020000020004" pitchFamily="49" charset="0"/>
+              </a:rPr>
+              <a:t>Ограничение длины</a:t>
+            </a:r>
+            <a:endParaRPr lang="ru-RU" sz="2400" dirty="0">
+              <a:solidFill>
+                <a:srgbClr val="000000"/>
+              </a:solidFill>
+              <a:highlight>
+                <a:srgbClr val="FFFFFF"/>
+              </a:highlight>
+              <a:latin typeface="Cascadia Mono" panose="020B0609020000020004" pitchFamily="49" charset="0"/>
+            </a:endParaRPr>
+          </a:p>
+          <a:p>
+            <a:r>
+              <a:rPr lang="en-US" sz="2400" dirty="0">
+                <a:solidFill>
+                  <a:srgbClr val="000000"/>
+                </a:solidFill>
+                <a:highlight>
+                  <a:srgbClr val="FFFFFF"/>
+                </a:highlight>
+                <a:latin typeface="Cascadia Mono" panose="020B0609020000020004" pitchFamily="49" charset="0"/>
+              </a:rPr>
+              <a:t>               .</a:t>
+            </a:r>
+            <a:r>
+              <a:rPr lang="en-US" sz="2400" dirty="0" err="1">
+                <a:solidFill>
+                  <a:srgbClr val="74531F"/>
+                </a:solidFill>
+                <a:highlight>
+                  <a:srgbClr val="FFFFFF"/>
+                </a:highlight>
+                <a:latin typeface="Cascadia Mono" panose="020B0609020000020004" pitchFamily="49" charset="0"/>
+              </a:rPr>
+              <a:t>IsRequired</a:t>
+            </a:r>
+            <a:r>
+              <a:rPr lang="en-US" sz="2400" dirty="0">
+                <a:solidFill>
+                  <a:srgbClr val="000000"/>
+                </a:solidFill>
+                <a:highlight>
+                  <a:srgbClr val="FFFFFF"/>
+                </a:highlight>
+                <a:latin typeface="Cascadia Mono" panose="020B0609020000020004" pitchFamily="49" charset="0"/>
+              </a:rPr>
+              <a:t>();        </a:t>
+            </a:r>
+            <a:r>
+              <a:rPr lang="en-US" sz="2400" dirty="0">
+                <a:solidFill>
+                  <a:srgbClr val="008000"/>
+                </a:solidFill>
+                <a:highlight>
+                  <a:srgbClr val="FFFFFF"/>
+                </a:highlight>
+                <a:latin typeface="Cascadia Mono" panose="020B0609020000020004" pitchFamily="49" charset="0"/>
+              </a:rPr>
+              <a:t>// NOT NULL</a:t>
+            </a:r>
+            <a:endParaRPr lang="en-US" sz="2400" dirty="0">
+              <a:solidFill>
+                <a:srgbClr val="000000"/>
+              </a:solidFill>
+              <a:highlight>
+                <a:srgbClr val="FFFFFF"/>
+              </a:highlight>
+              <a:latin typeface="Cascadia Mono" panose="020B0609020000020004" pitchFamily="49" charset="0"/>
+            </a:endParaRPr>
+          </a:p>
+          <a:p>
+            <a:endParaRPr lang="ru-RU" sz="2400" dirty="0">
+              <a:solidFill>
+                <a:srgbClr val="000000"/>
+              </a:solidFill>
+              <a:highlight>
+                <a:srgbClr val="FFFFFF"/>
+              </a:highlight>
+              <a:latin typeface="Cascadia Mono" panose="020B0609020000020004" pitchFamily="49" charset="0"/>
+            </a:endParaRPr>
+          </a:p>
+          <a:p>
+            <a:r>
+              <a:rPr lang="en-US" sz="2400" dirty="0">
+                <a:solidFill>
+                  <a:srgbClr val="000000"/>
+                </a:solidFill>
+                <a:highlight>
+                  <a:srgbClr val="FFFFFF"/>
+                </a:highlight>
+                <a:latin typeface="Cascadia Mono" panose="020B0609020000020004" pitchFamily="49" charset="0"/>
+              </a:rPr>
+              <a:t>        </a:t>
+            </a:r>
+            <a:r>
+              <a:rPr lang="en-US" sz="2400" dirty="0" err="1">
+                <a:solidFill>
+                  <a:srgbClr val="1F377F"/>
+                </a:solidFill>
+                <a:highlight>
+                  <a:srgbClr val="FFFFFF"/>
+                </a:highlight>
+                <a:latin typeface="Cascadia Mono" panose="020B0609020000020004" pitchFamily="49" charset="0"/>
+              </a:rPr>
+              <a:t>builder</a:t>
+            </a:r>
+            <a:r>
+              <a:rPr lang="en-US" sz="2400" dirty="0" err="1">
+                <a:solidFill>
+                  <a:srgbClr val="000000"/>
+                </a:solidFill>
+                <a:highlight>
+                  <a:srgbClr val="FFFFFF"/>
+                </a:highlight>
+                <a:latin typeface="Cascadia Mono" panose="020B0609020000020004" pitchFamily="49" charset="0"/>
+              </a:rPr>
+              <a:t>.</a:t>
+            </a:r>
+            <a:r>
+              <a:rPr lang="en-US" sz="2400" dirty="0" err="1">
+                <a:solidFill>
+                  <a:srgbClr val="74531F"/>
+                </a:solidFill>
+                <a:highlight>
+                  <a:srgbClr val="FFFFFF"/>
+                </a:highlight>
+                <a:latin typeface="Cascadia Mono" panose="020B0609020000020004" pitchFamily="49" charset="0"/>
+              </a:rPr>
+              <a:t>Property</a:t>
+            </a:r>
+            <a:r>
+              <a:rPr lang="en-US" sz="2400" dirty="0">
+                <a:solidFill>
+                  <a:srgbClr val="000000"/>
+                </a:solidFill>
+                <a:highlight>
+                  <a:srgbClr val="FFFFFF"/>
+                </a:highlight>
+                <a:latin typeface="Cascadia Mono" panose="020B0609020000020004" pitchFamily="49" charset="0"/>
+              </a:rPr>
+              <a:t>(</a:t>
+            </a:r>
+            <a:r>
+              <a:rPr lang="en-US" sz="2400" dirty="0">
+                <a:solidFill>
+                  <a:srgbClr val="1F377F"/>
+                </a:solidFill>
+                <a:highlight>
+                  <a:srgbClr val="FFFFFF"/>
+                </a:highlight>
+                <a:latin typeface="Cascadia Mono" panose="020B0609020000020004" pitchFamily="49" charset="0"/>
+              </a:rPr>
+              <a:t>n</a:t>
+            </a:r>
+            <a:r>
+              <a:rPr lang="en-US" sz="2400" dirty="0">
+                <a:solidFill>
+                  <a:srgbClr val="000000"/>
+                </a:solidFill>
+                <a:highlight>
+                  <a:srgbClr val="FFFFFF"/>
+                </a:highlight>
+                <a:latin typeface="Cascadia Mono" panose="020B0609020000020004" pitchFamily="49" charset="0"/>
+              </a:rPr>
+              <a:t> =&gt; </a:t>
+            </a:r>
+            <a:r>
+              <a:rPr lang="en-US" sz="2400" dirty="0" err="1">
+                <a:solidFill>
+                  <a:srgbClr val="1F377F"/>
+                </a:solidFill>
+                <a:highlight>
+                  <a:srgbClr val="FFFFFF"/>
+                </a:highlight>
+                <a:latin typeface="Cascadia Mono" panose="020B0609020000020004" pitchFamily="49" charset="0"/>
+              </a:rPr>
+              <a:t>n</a:t>
+            </a:r>
+            <a:r>
+              <a:rPr lang="en-US" sz="2400" dirty="0" err="1">
+                <a:solidFill>
+                  <a:srgbClr val="000000"/>
+                </a:solidFill>
+                <a:highlight>
+                  <a:srgbClr val="FFFFFF"/>
+                </a:highlight>
+                <a:latin typeface="Cascadia Mono" panose="020B0609020000020004" pitchFamily="49" charset="0"/>
+              </a:rPr>
+              <a:t>.CreatedAt</a:t>
+            </a:r>
+            <a:r>
+              <a:rPr lang="en-US" sz="2400" dirty="0">
+                <a:solidFill>
+                  <a:srgbClr val="000000"/>
+                </a:solidFill>
+                <a:highlight>
+                  <a:srgbClr val="FFFFFF"/>
+                </a:highlight>
+                <a:latin typeface="Cascadia Mono" panose="020B0609020000020004" pitchFamily="49" charset="0"/>
+              </a:rPr>
+              <a:t>)</a:t>
+            </a:r>
+          </a:p>
+          <a:p>
+            <a:r>
+              <a:rPr lang="en-US" sz="2400" dirty="0">
+                <a:solidFill>
+                  <a:srgbClr val="000000"/>
+                </a:solidFill>
+                <a:highlight>
+                  <a:srgbClr val="FFFFFF"/>
+                </a:highlight>
+                <a:latin typeface="Cascadia Mono" panose="020B0609020000020004" pitchFamily="49" charset="0"/>
+              </a:rPr>
+              <a:t>               .</a:t>
+            </a:r>
+            <a:r>
+              <a:rPr lang="en-US" sz="2400" dirty="0" err="1">
+                <a:solidFill>
+                  <a:srgbClr val="74531F"/>
+                </a:solidFill>
+                <a:highlight>
+                  <a:srgbClr val="FFFFFF"/>
+                </a:highlight>
+                <a:latin typeface="Cascadia Mono" panose="020B0609020000020004" pitchFamily="49" charset="0"/>
+              </a:rPr>
+              <a:t>IsRequired</a:t>
+            </a:r>
+            <a:r>
+              <a:rPr lang="en-US" sz="2400" dirty="0">
+                <a:solidFill>
+                  <a:srgbClr val="000000"/>
+                </a:solidFill>
+                <a:highlight>
+                  <a:srgbClr val="FFFFFF"/>
+                </a:highlight>
+                <a:latin typeface="Cascadia Mono" panose="020B0609020000020004" pitchFamily="49" charset="0"/>
+              </a:rPr>
+              <a:t>();</a:t>
+            </a:r>
+          </a:p>
+          <a:p>
+            <a:r>
+              <a:rPr lang="ru-RU" sz="2400" dirty="0">
+                <a:solidFill>
+                  <a:srgbClr val="000000"/>
+                </a:solidFill>
+                <a:highlight>
+                  <a:srgbClr val="FFFFFF"/>
+                </a:highlight>
+                <a:latin typeface="Cascadia Mono" panose="020B0609020000020004" pitchFamily="49" charset="0"/>
+              </a:rPr>
+              <a:t>    }</a:t>
+            </a:r>
+          </a:p>
+          <a:p>
+            <a:r>
+              <a:rPr lang="ru-RU" sz="2400" dirty="0" smtClean="0">
+                <a:solidFill>
+                  <a:srgbClr val="000000"/>
+                </a:solidFill>
+                <a:highlight>
+                  <a:srgbClr val="FFFFFF"/>
+                </a:highlight>
+                <a:latin typeface="Cascadia Mono" panose="020B0609020000020004" pitchFamily="49" charset="0"/>
+              </a:rPr>
+              <a:t>}</a:t>
+            </a:r>
+            <a:endParaRPr lang="en-US" sz="2400" dirty="0" smtClean="0">
+              <a:solidFill>
+                <a:srgbClr val="000000"/>
+              </a:solidFill>
+              <a:highlight>
+                <a:srgbClr val="FFFFFF"/>
+              </a:highlight>
+              <a:latin typeface="Cascadia Mono" panose="020B0609020000020004" pitchFamily="49" charset="0"/>
+            </a:endParaRPr>
+          </a:p>
+          <a:p>
+            <a:r>
+              <a:rPr lang="ru-RU" sz="2400" b="1" dirty="0"/>
+              <a:t>В </a:t>
+            </a:r>
+            <a:r>
+              <a:rPr lang="en-US" sz="2400" b="1" dirty="0"/>
+              <a:t>Context:</a:t>
+            </a:r>
+            <a:r>
+              <a:rPr lang="en-US" sz="2400" dirty="0"/>
+              <a:t> </a:t>
+            </a:r>
+            <a:r>
+              <a:rPr lang="en-US" sz="2400" dirty="0" err="1"/>
+              <a:t>modelBuilder.ApplyConfiguration</a:t>
+            </a:r>
+            <a:r>
+              <a:rPr lang="en-US" sz="2400" dirty="0"/>
+              <a:t>(new </a:t>
+            </a:r>
+            <a:r>
+              <a:rPr lang="en-US" sz="2400" dirty="0" err="1"/>
+              <a:t>NoteConfiguration</a:t>
+            </a:r>
+            <a:r>
+              <a:rPr lang="en-US" sz="2400" dirty="0"/>
+              <a:t>());</a:t>
+            </a:r>
+            <a:endParaRPr lang="ru-RU" sz="2400" dirty="0"/>
+          </a:p>
+        </p:txBody>
+      </p:sp>
+    </p:spTree>
+    <p:extLst>
+      <p:ext uri="{BB962C8B-B14F-4D97-AF65-F5344CB8AC3E}">
+        <p14:creationId xmlns:p14="http://schemas.microsoft.com/office/powerpoint/2010/main" val="104983152"/>
+      </p:ext>
+    </p:extLst>
+  </p:cSld>
+  <p:clrMapOvr>
+    <a:masterClrMapping/>
+  </p:clrMapOvr>
+  <p:timing>
+    <p:tnLst>
+      <p:par>
+        <p:cTn id="1" dur="indefinite" restart="never" nodeType="tmRoot"/>
+      </p:par>
+    </p:tnLst>
+  </p:timing>
+</p:sld>
+</file>
+
+<file path=ppt/slides/slide16.xml><?xml version="1.0" encoding="utf-8"?>
+<p:sld xmlns:a="http://schemas.openxmlformats.org/drawingml/2006/main" xmlns:r="http://schemas.openxmlformats.org/officeDocument/2006/relationships" xmlns:p="http://schemas.openxmlformats.org/presentationml/2006/main">
+  <p:cSld>
+    <p:spTree>
+      <p:nvGrpSpPr>
+        <p:cNvPr id="1" name=""/>
+        <p:cNvGrpSpPr/>
+        <p:nvPr/>
+      </p:nvGrpSpPr>
+      <p:grpSpPr>
+        <a:xfrm>
+          <a:off x="0" y="0"/>
+          <a:ext cx="0" cy="0"/>
+          <a:chOff x="0" y="0"/>
+          <a:chExt cx="0" cy="0"/>
+        </a:xfrm>
+      </p:grpSpPr>
+      <p:sp>
+        <p:nvSpPr>
+          <p:cNvPr id="7" name="Прямоугольник 6"/>
+          <p:cNvSpPr/>
+          <p:nvPr/>
+        </p:nvSpPr>
+        <p:spPr>
+          <a:xfrm>
+            <a:off x="0" y="0"/>
+            <a:ext cx="12192000" cy="4524315"/>
+          </a:xfrm>
+          <a:prstGeom prst="rect">
+            <a:avLst/>
+          </a:prstGeom>
+        </p:spPr>
+        <p:txBody>
+          <a:bodyPr wrap="square" lIns="360000" rIns="360000">
+            <a:spAutoFit/>
+          </a:bodyPr>
+          <a:lstStyle/>
+          <a:p>
+            <a:pPr>
+              <a:lnSpc>
+                <a:spcPct val="150000"/>
+              </a:lnSpc>
+            </a:pPr>
+            <a:r>
+              <a:rPr lang="ru-RU" sz="2400" b="1" dirty="0"/>
+              <a:t>Зачем </a:t>
+            </a:r>
+            <a:r>
+              <a:rPr lang="ru-RU" sz="2400" b="1" dirty="0" smtClean="0"/>
+              <a:t>это?</a:t>
+            </a:r>
+            <a:endParaRPr lang="ru-RU" sz="2400" b="1" dirty="0"/>
+          </a:p>
+          <a:p>
+            <a:pPr marL="457200" indent="-457200">
+              <a:lnSpc>
+                <a:spcPct val="150000"/>
+              </a:lnSpc>
+              <a:buFont typeface="+mj-lt"/>
+              <a:buAutoNum type="arabicPeriod"/>
+            </a:pPr>
+            <a:r>
+              <a:rPr lang="ru-RU" sz="2400" b="1" dirty="0" err="1"/>
+              <a:t>Централизованность</a:t>
+            </a:r>
+            <a:r>
+              <a:rPr lang="ru-RU" sz="2400" b="1" dirty="0"/>
+              <a:t>:</a:t>
+            </a:r>
+            <a:r>
+              <a:rPr lang="ru-RU" sz="2400" dirty="0"/>
+              <a:t> Одной командой </a:t>
+            </a:r>
+            <a:r>
+              <a:rPr lang="ru-RU" sz="2400" dirty="0" err="1"/>
+              <a:t>db.SaveChanges</a:t>
+            </a:r>
+            <a:r>
+              <a:rPr lang="ru-RU" sz="2400" dirty="0"/>
+              <a:t>() можно сохранить изменения сразу в десяти таблицах.</a:t>
+            </a:r>
+          </a:p>
+          <a:p>
+            <a:pPr marL="457200" indent="-457200">
+              <a:lnSpc>
+                <a:spcPct val="150000"/>
+              </a:lnSpc>
+              <a:buFont typeface="+mj-lt"/>
+              <a:buAutoNum type="arabicPeriod"/>
+            </a:pPr>
+            <a:r>
+              <a:rPr lang="ru-RU" sz="2400" b="1" dirty="0"/>
+              <a:t>Прозрачность:</a:t>
+            </a:r>
+            <a:r>
+              <a:rPr lang="ru-RU" sz="2400" dirty="0"/>
+              <a:t> </a:t>
+            </a:r>
+            <a:r>
+              <a:rPr lang="ru-RU" sz="2400" dirty="0" err="1"/>
+              <a:t>Database.EnsureCreated</a:t>
+            </a:r>
+            <a:r>
+              <a:rPr lang="ru-RU" sz="2400" dirty="0"/>
+              <a:t>() избавляет от необходимости вручную создавать таблицы через сторонние программы.</a:t>
+            </a:r>
+          </a:p>
+          <a:p>
+            <a:pPr marL="457200" indent="-457200">
+              <a:lnSpc>
+                <a:spcPct val="150000"/>
+              </a:lnSpc>
+              <a:buFont typeface="+mj-lt"/>
+              <a:buAutoNum type="arabicPeriod"/>
+            </a:pPr>
+            <a:r>
+              <a:rPr lang="ru-RU" sz="2400" b="1" dirty="0"/>
+              <a:t>Архитектурный порядок:</a:t>
+            </a:r>
+            <a:r>
+              <a:rPr lang="ru-RU" sz="2400" dirty="0"/>
+              <a:t> Разделение на Модель, Контекст и Конфигурацию — это стандарт «взрослой» разработки, который делает проект легким в поддержке.</a:t>
+            </a:r>
+          </a:p>
+        </p:txBody>
+      </p:sp>
+    </p:spTree>
+    <p:extLst>
+      <p:ext uri="{BB962C8B-B14F-4D97-AF65-F5344CB8AC3E}">
+        <p14:creationId xmlns:p14="http://schemas.microsoft.com/office/powerpoint/2010/main" val="2266355410"/>
+      </p:ext>
+    </p:extLst>
+  </p:cSld>
+  <p:clrMapOvr>
+    <a:masterClrMapping/>
+  </p:clrMapOvr>
+  <p:timing>
+    <p:tnLst>
+      <p:par>
+        <p:cTn id="1" dur="indefinite" restart="never" nodeType="tmRoot"/>
+      </p:par>
+    </p:tnLst>
+  </p:timing>
+</p:sld>
+</file>
+
+<file path=ppt/slides/slide17.xml><?xml version="1.0" encoding="utf-8"?>
+<p:sld xmlns:a="http://schemas.openxmlformats.org/drawingml/2006/main" xmlns:r="http://schemas.openxmlformats.org/officeDocument/2006/relationships" xmlns:p="http://schemas.openxmlformats.org/presentationml/2006/main">
+  <p:cSld>
+    <p:spTree>
+      <p:nvGrpSpPr>
+        <p:cNvPr id="1" name=""/>
+        <p:cNvGrpSpPr/>
+        <p:nvPr/>
+      </p:nvGrpSpPr>
+      <p:grpSpPr>
+        <a:xfrm>
+          <a:off x="0" y="0"/>
+          <a:ext cx="0" cy="0"/>
+          <a:chOff x="0" y="0"/>
+          <a:chExt cx="0" cy="0"/>
+        </a:xfrm>
+      </p:grpSpPr>
+      <p:sp>
+        <p:nvSpPr>
+          <p:cNvPr id="11" name="Rectangle 28" descr="Светлый диагональный 2"/>
+          <p:cNvSpPr>
+            <a:spLocks noChangeArrowheads="1"/>
+          </p:cNvSpPr>
+          <p:nvPr/>
+        </p:nvSpPr>
+        <p:spPr bwMode="auto">
+          <a:xfrm>
+            <a:off x="0" y="-1"/>
+            <a:ext cx="12192000" cy="654357"/>
+          </a:xfrm>
+          <a:prstGeom prst="rect">
+            <a:avLst/>
+          </a:prstGeom>
+          <a:pattFill prst="ltUpDiag">
+            <a:fgClr>
+              <a:schemeClr val="accent1">
+                <a:lumMod val="40000"/>
+                <a:lumOff val="60000"/>
+              </a:schemeClr>
+            </a:fgClr>
+            <a:bgClr>
+              <a:srgbClr val="FFFFFF"/>
+            </a:bgClr>
+          </a:pattFill>
+          <a:ln w="15875" algn="ctr">
+            <a:solidFill>
+              <a:schemeClr val="accent5">
+                <a:lumMod val="50000"/>
+              </a:schemeClr>
+            </a:solidFill>
+            <a:miter lim="800000"/>
+            <a:headEnd/>
+            <a:tailEnd/>
+          </a:ln>
+          <a:effectLst/>
+        </p:spPr>
+        <p:txBody>
+          <a:bodyPr vert="horz" wrap="square" lIns="18000" tIns="18000" rIns="18000" bIns="18000" numCol="1" anchor="ctr" anchorCtr="0" compatLnSpc="1">
+            <a:prstTxWarp prst="textNoShape">
+              <a:avLst/>
+            </a:prstTxWarp>
+          </a:bodyPr>
+          <a:lstStyle/>
+          <a:p>
+            <a:pPr algn="ctr"/>
+            <a:r>
+              <a:rPr lang="ru-RU" sz="2800" b="1" dirty="0" smtClean="0">
+                <a:solidFill>
+                  <a:schemeClr val="tx2">
+                    <a:lumMod val="50000"/>
+                  </a:schemeClr>
+                </a:solidFill>
+                <a:latin typeface="Bookman Old Style" panose="02050604050505020204" pitchFamily="18" charset="0"/>
+                <a:cs typeface="Times New Roman" panose="02020603050405020304" pitchFamily="18" charset="0"/>
+              </a:rPr>
+              <a:t>Миграции</a:t>
+            </a:r>
+            <a:endParaRPr lang="en-US" sz="2800" b="1" dirty="0">
+              <a:solidFill>
+                <a:schemeClr val="tx2">
+                  <a:lumMod val="50000"/>
+                </a:schemeClr>
+              </a:solidFill>
+              <a:latin typeface="Bookman Old Style" panose="02050604050505020204" pitchFamily="18" charset="0"/>
+              <a:cs typeface="Times New Roman" panose="02020603050405020304" pitchFamily="18" charset="0"/>
+            </a:endParaRPr>
+          </a:p>
+        </p:txBody>
+      </p:sp>
+      <p:sp>
+        <p:nvSpPr>
+          <p:cNvPr id="7" name="Прямоугольник 6"/>
+          <p:cNvSpPr/>
+          <p:nvPr/>
+        </p:nvSpPr>
+        <p:spPr>
+          <a:xfrm>
+            <a:off x="1" y="654355"/>
+            <a:ext cx="12192000" cy="6289863"/>
+          </a:xfrm>
+          <a:prstGeom prst="rect">
+            <a:avLst/>
+          </a:prstGeom>
+        </p:spPr>
+        <p:txBody>
+          <a:bodyPr wrap="square" lIns="360000" rIns="360000">
+            <a:spAutoFit/>
+          </a:bodyPr>
+          <a:lstStyle/>
+          <a:p>
+            <a:pPr>
+              <a:lnSpc>
+                <a:spcPct val="125000"/>
+              </a:lnSpc>
+            </a:pPr>
+            <a:r>
+              <a:rPr lang="ru-RU" sz="2400" dirty="0"/>
+              <a:t>Программный код постоянно меняется: мы добавляем новые классы или свойства (например, добавили поле «Телефон» в модель </a:t>
+            </a:r>
+            <a:r>
+              <a:rPr lang="ru-RU" sz="2400" dirty="0" err="1"/>
+              <a:t>User</a:t>
+            </a:r>
+            <a:r>
+              <a:rPr lang="ru-RU" sz="2400" dirty="0"/>
+              <a:t>).</a:t>
+            </a:r>
+          </a:p>
+          <a:p>
+            <a:pPr>
+              <a:lnSpc>
+                <a:spcPct val="125000"/>
+              </a:lnSpc>
+            </a:pPr>
+            <a:r>
+              <a:rPr lang="ru-RU" sz="2400" b="1" dirty="0"/>
+              <a:t>Проблема:</a:t>
+            </a:r>
+            <a:r>
+              <a:rPr lang="ru-RU" sz="2400" dirty="0"/>
+              <a:t> База данных «застыла» в старом состоянии. Как обновить её схему, не удаляя текущих пользователей и их данные?</a:t>
+            </a:r>
+          </a:p>
+          <a:p>
+            <a:pPr>
+              <a:lnSpc>
+                <a:spcPct val="125000"/>
+              </a:lnSpc>
+            </a:pPr>
+            <a:r>
+              <a:rPr lang="ru-RU" sz="2400" b="1" dirty="0"/>
+              <a:t>Решение: Миграции EF </a:t>
+            </a:r>
+            <a:r>
+              <a:rPr lang="ru-RU" sz="2400" b="1" dirty="0" err="1"/>
+              <a:t>Core</a:t>
+            </a:r>
+            <a:r>
+              <a:rPr lang="ru-RU" sz="2400" dirty="0"/>
+              <a:t/>
+            </a:r>
+            <a:br>
+              <a:rPr lang="ru-RU" sz="2400" dirty="0"/>
+            </a:br>
+            <a:r>
+              <a:rPr lang="ru-RU" sz="2400" dirty="0"/>
+              <a:t>Это механизм, который отслеживает изменения в ваших C#-моделях и генерирует набор инструкций (код) для обновления схемы БД.</a:t>
+            </a:r>
+          </a:p>
+          <a:p>
+            <a:pPr marL="342900" indent="-342900">
+              <a:lnSpc>
+                <a:spcPct val="125000"/>
+              </a:lnSpc>
+              <a:buFont typeface="Arial" panose="020B0604020202020204" pitchFamily="34" charset="0"/>
+              <a:buChar char="•"/>
+            </a:pPr>
+            <a:r>
+              <a:rPr lang="ru-RU" sz="2400" b="1" dirty="0"/>
+              <a:t>Надежность:</a:t>
+            </a:r>
+            <a:r>
+              <a:rPr lang="ru-RU" sz="2400" dirty="0"/>
+              <a:t> Каждое изменение фиксируется в отдельном файле с датой и временем.</a:t>
+            </a:r>
+          </a:p>
+          <a:p>
+            <a:pPr marL="342900" indent="-342900">
+              <a:lnSpc>
+                <a:spcPct val="125000"/>
+              </a:lnSpc>
+              <a:buFont typeface="Arial" panose="020B0604020202020204" pitchFamily="34" charset="0"/>
+              <a:buChar char="•"/>
+            </a:pPr>
+            <a:r>
+              <a:rPr lang="ru-RU" sz="2400" b="1" dirty="0"/>
+              <a:t>Синхронизация:</a:t>
+            </a:r>
+            <a:r>
+              <a:rPr lang="ru-RU" sz="2400" dirty="0"/>
+              <a:t> Вся команда разработчиков работает с одной и той же версией базы данных.</a:t>
+            </a:r>
+          </a:p>
+          <a:p>
+            <a:pPr marL="342900" indent="-342900">
+              <a:lnSpc>
+                <a:spcPct val="125000"/>
+              </a:lnSpc>
+              <a:buFont typeface="Arial" panose="020B0604020202020204" pitchFamily="34" charset="0"/>
+              <a:buChar char="•"/>
+            </a:pPr>
+            <a:r>
+              <a:rPr lang="ru-RU" sz="2400" b="1" dirty="0"/>
+              <a:t>Безопасность:</a:t>
+            </a:r>
+            <a:r>
+              <a:rPr lang="ru-RU" sz="2400" dirty="0"/>
+              <a:t> Позволяют «откатить» изменения назад, если что-то пошло не так.</a:t>
+            </a:r>
+          </a:p>
+        </p:txBody>
+      </p:sp>
+    </p:spTree>
+    <p:extLst>
+      <p:ext uri="{BB962C8B-B14F-4D97-AF65-F5344CB8AC3E}">
+        <p14:creationId xmlns:p14="http://schemas.microsoft.com/office/powerpoint/2010/main" val="540676491"/>
+      </p:ext>
+    </p:extLst>
+  </p:cSld>
+  <p:clrMapOvr>
+    <a:masterClrMapping/>
+  </p:clrMapOvr>
+  <p:timing>
+    <p:tnLst>
+      <p:par>
+        <p:cTn id="1" dur="indefinite" restart="never" nodeType="tmRoot"/>
+      </p:par>
+    </p:tnLst>
+  </p:timing>
+</p:sld>
+</file>
+
+<file path=ppt/slides/slide18.xml><?xml version="1.0" encoding="utf-8"?>
+<p:sld xmlns:a="http://schemas.openxmlformats.org/drawingml/2006/main" xmlns:r="http://schemas.openxmlformats.org/officeDocument/2006/relationships" xmlns:p="http://schemas.openxmlformats.org/presentationml/2006/main">
+  <p:cSld>
+    <p:spTree>
+      <p:nvGrpSpPr>
+        <p:cNvPr id="1" name=""/>
+        <p:cNvGrpSpPr/>
+        <p:nvPr/>
+      </p:nvGrpSpPr>
+      <p:grpSpPr>
+        <a:xfrm>
+          <a:off x="0" y="0"/>
+          <a:ext cx="0" cy="0"/>
+          <a:chOff x="0" y="0"/>
+          <a:chExt cx="0" cy="0"/>
+        </a:xfrm>
+      </p:grpSpPr>
+      <p:sp>
+        <p:nvSpPr>
+          <p:cNvPr id="7" name="Прямоугольник 6"/>
+          <p:cNvSpPr/>
+          <p:nvPr/>
+        </p:nvSpPr>
+        <p:spPr>
+          <a:xfrm>
+            <a:off x="0" y="0"/>
+            <a:ext cx="12192000" cy="4524315"/>
+          </a:xfrm>
+          <a:prstGeom prst="rect">
+            <a:avLst/>
+          </a:prstGeom>
+        </p:spPr>
+        <p:txBody>
+          <a:bodyPr wrap="square" lIns="360000" rIns="360000">
+            <a:spAutoFit/>
+          </a:bodyPr>
+          <a:lstStyle/>
+          <a:p>
+            <a:pPr>
+              <a:lnSpc>
+                <a:spcPct val="150000"/>
+              </a:lnSpc>
+            </a:pPr>
+            <a:r>
+              <a:rPr lang="ru-RU" sz="2400" dirty="0"/>
+              <a:t>Процесс обновления БД всегда состоит из трех простых шагов:</a:t>
+            </a:r>
+          </a:p>
+          <a:p>
+            <a:pPr marL="457200" indent="-457200">
+              <a:lnSpc>
+                <a:spcPct val="150000"/>
+              </a:lnSpc>
+              <a:buFont typeface="+mj-lt"/>
+              <a:buAutoNum type="arabicPeriod"/>
+            </a:pPr>
+            <a:r>
+              <a:rPr lang="ru-RU" sz="2400" b="1" dirty="0"/>
+              <a:t>Изменение кода:</a:t>
+            </a:r>
+            <a:r>
+              <a:rPr lang="ru-RU" sz="2400" dirty="0"/>
+              <a:t> Вы редактируете C#-класс (модель) или настройки в </a:t>
+            </a:r>
+            <a:r>
+              <a:rPr lang="ru-RU" sz="2400" dirty="0" err="1"/>
+              <a:t>DbContext</a:t>
+            </a:r>
+            <a:r>
+              <a:rPr lang="ru-RU" sz="2400" dirty="0"/>
+              <a:t>.</a:t>
+            </a:r>
+          </a:p>
+          <a:p>
+            <a:pPr marL="457200" indent="-457200">
+              <a:lnSpc>
+                <a:spcPct val="150000"/>
+              </a:lnSpc>
+              <a:buFont typeface="+mj-lt"/>
+              <a:buAutoNum type="arabicPeriod"/>
+            </a:pPr>
+            <a:r>
+              <a:rPr lang="ru-RU" sz="2400" b="1" dirty="0"/>
+              <a:t>Создание чертежа (</a:t>
+            </a:r>
+            <a:r>
+              <a:rPr lang="ru-RU" sz="2400" b="1" dirty="0" err="1"/>
+              <a:t>Add</a:t>
+            </a:r>
+            <a:r>
+              <a:rPr lang="ru-RU" sz="2400" b="1" dirty="0"/>
+              <a:t> </a:t>
+            </a:r>
+            <a:r>
+              <a:rPr lang="ru-RU" sz="2400" b="1" dirty="0" err="1"/>
+              <a:t>Migration</a:t>
+            </a:r>
+            <a:r>
+              <a:rPr lang="ru-RU" sz="2400" b="1" dirty="0"/>
+              <a:t>):</a:t>
+            </a:r>
+            <a:r>
+              <a:rPr lang="ru-RU" sz="2400" dirty="0"/>
+              <a:t> Вы просите EF </a:t>
+            </a:r>
+            <a:r>
+              <a:rPr lang="ru-RU" sz="2400" dirty="0" err="1"/>
+              <a:t>Core</a:t>
+            </a:r>
+            <a:r>
+              <a:rPr lang="ru-RU" sz="2400" dirty="0"/>
+              <a:t> сравнить код и базу. Он создает файл миграции — «чертеж» того, что нужно изменить (например, добавить колонку).</a:t>
+            </a:r>
+          </a:p>
+          <a:p>
+            <a:pPr marL="457200" indent="-457200">
+              <a:lnSpc>
+                <a:spcPct val="150000"/>
+              </a:lnSpc>
+              <a:buFont typeface="+mj-lt"/>
+              <a:buAutoNum type="arabicPeriod"/>
+            </a:pPr>
+            <a:r>
+              <a:rPr lang="ru-RU" sz="2400" b="1" dirty="0"/>
+              <a:t>Применение изменений (</a:t>
+            </a:r>
+            <a:r>
+              <a:rPr lang="ru-RU" sz="2400" b="1" dirty="0" err="1"/>
+              <a:t>Update</a:t>
+            </a:r>
+            <a:r>
+              <a:rPr lang="ru-RU" sz="2400" b="1" dirty="0"/>
+              <a:t> </a:t>
+            </a:r>
+            <a:r>
+              <a:rPr lang="ru-RU" sz="2400" b="1" dirty="0" err="1"/>
+              <a:t>Database</a:t>
+            </a:r>
+            <a:r>
+              <a:rPr lang="ru-RU" sz="2400" b="1" dirty="0"/>
+              <a:t>):</a:t>
+            </a:r>
+            <a:r>
+              <a:rPr lang="ru-RU" sz="2400" dirty="0"/>
+              <a:t> EF </a:t>
+            </a:r>
+            <a:r>
+              <a:rPr lang="ru-RU" sz="2400" dirty="0" err="1"/>
+              <a:t>Core</a:t>
+            </a:r>
+            <a:r>
+              <a:rPr lang="ru-RU" sz="2400" dirty="0"/>
+              <a:t> выполняет этот чертеж, превращая его в реальный SQL-запрос к СУБД.</a:t>
+            </a:r>
+          </a:p>
+        </p:txBody>
+      </p:sp>
+    </p:spTree>
+    <p:extLst>
+      <p:ext uri="{BB962C8B-B14F-4D97-AF65-F5344CB8AC3E}">
+        <p14:creationId xmlns:p14="http://schemas.microsoft.com/office/powerpoint/2010/main" val="2344139613"/>
+      </p:ext>
+    </p:extLst>
+  </p:cSld>
+  <p:clrMapOvr>
+    <a:masterClrMapping/>
+  </p:clrMapOvr>
+  <p:timing>
+    <p:tnLst>
+      <p:par>
+        <p:cTn id="1" dur="indefinite" restart="never" nodeType="tmRoot"/>
+      </p:par>
+    </p:tnLst>
+  </p:timing>
+</p:sld>
+</file>
+
+<file path=ppt/slides/slide19.xml><?xml version="1.0" encoding="utf-8"?>
+<p:sld xmlns:a="http://schemas.openxmlformats.org/drawingml/2006/main" xmlns:r="http://schemas.openxmlformats.org/officeDocument/2006/relationships" xmlns:p="http://schemas.openxmlformats.org/presentationml/2006/main">
+  <p:cSld>
+    <p:spTree>
+      <p:nvGrpSpPr>
+        <p:cNvPr id="1" name=""/>
+        <p:cNvGrpSpPr/>
+        <p:nvPr/>
+      </p:nvGrpSpPr>
+      <p:grpSpPr>
+        <a:xfrm>
+          <a:off x="0" y="0"/>
+          <a:ext cx="0" cy="0"/>
+          <a:chOff x="0" y="0"/>
+          <a:chExt cx="0" cy="0"/>
+        </a:xfrm>
+      </p:grpSpPr>
+      <p:sp>
+        <p:nvSpPr>
+          <p:cNvPr id="7" name="Прямоугольник 6"/>
+          <p:cNvSpPr/>
+          <p:nvPr/>
+        </p:nvSpPr>
+        <p:spPr>
+          <a:xfrm>
+            <a:off x="0" y="0"/>
+            <a:ext cx="12192000" cy="5078313"/>
+          </a:xfrm>
+          <a:prstGeom prst="rect">
+            <a:avLst/>
+          </a:prstGeom>
+        </p:spPr>
+        <p:txBody>
+          <a:bodyPr wrap="square" lIns="360000" rIns="360000">
+            <a:spAutoFit/>
+          </a:bodyPr>
+          <a:lstStyle/>
+          <a:p>
+            <a:pPr>
+              <a:lnSpc>
+                <a:spcPct val="150000"/>
+              </a:lnSpc>
+            </a:pPr>
+            <a:r>
+              <a:rPr lang="ru-RU" sz="2400" dirty="0"/>
+              <a:t>Для работы используется инструмент </a:t>
+            </a:r>
+            <a:r>
+              <a:rPr lang="ru-RU" sz="2400" b="1" dirty="0" err="1"/>
+              <a:t>dotnet-ef</a:t>
+            </a:r>
+            <a:r>
+              <a:rPr lang="ru-RU" sz="2400" dirty="0"/>
+              <a:t>. Команды запускаются из терминала.</a:t>
+            </a:r>
+          </a:p>
+          <a:p>
+            <a:pPr>
+              <a:lnSpc>
+                <a:spcPct val="150000"/>
+              </a:lnSpc>
+            </a:pPr>
+            <a:r>
+              <a:rPr lang="ru-RU" sz="2400" b="1" dirty="0" smtClean="0"/>
+              <a:t>1. Создать </a:t>
+            </a:r>
+            <a:r>
+              <a:rPr lang="ru-RU" sz="2400" b="1" dirty="0"/>
+              <a:t>новую </a:t>
+            </a:r>
+            <a:r>
+              <a:rPr lang="ru-RU" sz="2400" b="1" dirty="0" smtClean="0"/>
+              <a:t>миграцию:</a:t>
+            </a:r>
+          </a:p>
+          <a:p>
+            <a:pPr algn="ctr">
+              <a:lnSpc>
+                <a:spcPct val="150000"/>
+              </a:lnSpc>
+            </a:pPr>
+            <a:r>
+              <a:rPr lang="ru-RU" sz="2400" dirty="0" err="1" smtClean="0"/>
+              <a:t>dotnet</a:t>
+            </a:r>
+            <a:r>
+              <a:rPr lang="ru-RU" sz="2400" dirty="0" smtClean="0"/>
+              <a:t> </a:t>
+            </a:r>
+            <a:r>
+              <a:rPr lang="ru-RU" sz="2400" dirty="0" err="1"/>
+              <a:t>ef</a:t>
+            </a:r>
+            <a:r>
+              <a:rPr lang="ru-RU" sz="2400" dirty="0"/>
+              <a:t> </a:t>
+            </a:r>
+            <a:r>
+              <a:rPr lang="ru-RU" sz="2400" dirty="0" err="1"/>
+              <a:t>migrations</a:t>
+            </a:r>
+            <a:r>
+              <a:rPr lang="ru-RU" sz="2400" dirty="0"/>
+              <a:t> </a:t>
+            </a:r>
+            <a:r>
+              <a:rPr lang="ru-RU" sz="2400" dirty="0" err="1"/>
+              <a:t>add</a:t>
+            </a:r>
+            <a:r>
+              <a:rPr lang="ru-RU" sz="2400" dirty="0"/>
+              <a:t> </a:t>
+            </a:r>
+            <a:r>
+              <a:rPr lang="ru-RU" sz="2400" dirty="0" err="1" smtClean="0"/>
+              <a:t>NameOfMigration</a:t>
+            </a:r>
+            <a:endParaRPr lang="ru-RU" sz="2400" dirty="0" smtClean="0"/>
+          </a:p>
+          <a:p>
+            <a:pPr algn="ctr">
+              <a:lnSpc>
+                <a:spcPct val="150000"/>
+              </a:lnSpc>
+            </a:pPr>
+            <a:r>
+              <a:rPr lang="ru-RU" sz="2400" i="1" dirty="0" smtClean="0"/>
+              <a:t>Результат</a:t>
+            </a:r>
+            <a:r>
+              <a:rPr lang="ru-RU" sz="2400" i="1" dirty="0"/>
+              <a:t>: в проекте появится папка </a:t>
+            </a:r>
+            <a:r>
+              <a:rPr lang="ru-RU" sz="2400" i="1" dirty="0" err="1"/>
+              <a:t>Migrations</a:t>
+            </a:r>
+            <a:r>
+              <a:rPr lang="ru-RU" sz="2400" i="1" dirty="0"/>
+              <a:t> с новым C#-файлом</a:t>
+            </a:r>
+            <a:r>
+              <a:rPr lang="ru-RU" sz="2400" i="1" dirty="0" smtClean="0"/>
+              <a:t>.</a:t>
+            </a:r>
+          </a:p>
+          <a:p>
+            <a:pPr>
+              <a:lnSpc>
+                <a:spcPct val="150000"/>
+              </a:lnSpc>
+            </a:pPr>
+            <a:endParaRPr lang="ru-RU" sz="2400" dirty="0"/>
+          </a:p>
+          <a:p>
+            <a:pPr>
+              <a:lnSpc>
+                <a:spcPct val="150000"/>
+              </a:lnSpc>
+            </a:pPr>
+            <a:r>
+              <a:rPr lang="ru-RU" sz="2400" b="1" dirty="0"/>
+              <a:t>2. Применить миграции к базе </a:t>
+            </a:r>
+            <a:r>
+              <a:rPr lang="ru-RU" sz="2400" b="1" dirty="0" smtClean="0"/>
+              <a:t>данных:</a:t>
+            </a:r>
+          </a:p>
+          <a:p>
+            <a:pPr algn="ctr">
+              <a:lnSpc>
+                <a:spcPct val="150000"/>
+              </a:lnSpc>
+            </a:pPr>
+            <a:r>
+              <a:rPr lang="ru-RU" sz="2400" dirty="0" err="1" smtClean="0"/>
+              <a:t>dotnet</a:t>
+            </a:r>
+            <a:r>
+              <a:rPr lang="ru-RU" sz="2400" dirty="0" smtClean="0"/>
+              <a:t> </a:t>
+            </a:r>
+            <a:r>
+              <a:rPr lang="ru-RU" sz="2400" dirty="0" err="1"/>
+              <a:t>ef</a:t>
+            </a:r>
+            <a:r>
+              <a:rPr lang="ru-RU" sz="2400" dirty="0"/>
+              <a:t> </a:t>
+            </a:r>
+            <a:r>
+              <a:rPr lang="ru-RU" sz="2400" dirty="0" err="1"/>
+              <a:t>database</a:t>
+            </a:r>
+            <a:r>
+              <a:rPr lang="ru-RU" sz="2400" dirty="0"/>
+              <a:t> </a:t>
+            </a:r>
+            <a:r>
+              <a:rPr lang="ru-RU" sz="2400" dirty="0" err="1" smtClean="0"/>
+              <a:t>update</a:t>
+            </a:r>
+            <a:endParaRPr lang="ru-RU" sz="2400" dirty="0" smtClean="0"/>
+          </a:p>
+          <a:p>
+            <a:pPr>
+              <a:lnSpc>
+                <a:spcPct val="150000"/>
+              </a:lnSpc>
+            </a:pPr>
+            <a:r>
+              <a:rPr lang="ru-RU" sz="2400" i="1" dirty="0" smtClean="0"/>
+              <a:t>Результат</a:t>
+            </a:r>
+            <a:r>
+              <a:rPr lang="ru-RU" sz="2400" i="1" dirty="0"/>
+              <a:t>: схема базы данных обновится, данные сохранятся.</a:t>
+            </a:r>
+            <a:endParaRPr lang="ru-RU" sz="2400" dirty="0"/>
+          </a:p>
+        </p:txBody>
+      </p:sp>
+      <p:pic>
+        <p:nvPicPr>
+          <p:cNvPr id="4" name="Рисунок 3"/>
+          <p:cNvPicPr>
+            <a:picLocks noChangeAspect="1"/>
+          </p:cNvPicPr>
+          <p:nvPr/>
+        </p:nvPicPr>
+        <p:blipFill>
+          <a:blip r:embed="rId3"/>
+          <a:stretch>
+            <a:fillRect/>
+          </a:stretch>
+        </p:blipFill>
+        <p:spPr>
+          <a:xfrm>
+            <a:off x="2517737" y="5078313"/>
+            <a:ext cx="7156526" cy="1605455"/>
+          </a:xfrm>
+          <a:prstGeom prst="rect">
+            <a:avLst/>
+          </a:prstGeom>
+        </p:spPr>
+      </p:pic>
+    </p:spTree>
+    <p:extLst>
+      <p:ext uri="{BB962C8B-B14F-4D97-AF65-F5344CB8AC3E}">
+        <p14:creationId xmlns:p14="http://schemas.microsoft.com/office/powerpoint/2010/main" val="456080242"/>
       </p:ext>
     </p:extLst>
   </p:cSld>
@@ -4418,6 +9645,4108 @@
 </p:sld>
 </file>
 
+<file path=ppt/slides/slide20.xml><?xml version="1.0" encoding="utf-8"?>
+<p:sld xmlns:a="http://schemas.openxmlformats.org/drawingml/2006/main" xmlns:r="http://schemas.openxmlformats.org/officeDocument/2006/relationships" xmlns:p="http://schemas.openxmlformats.org/presentationml/2006/main">
+  <p:cSld>
+    <p:spTree>
+      <p:nvGrpSpPr>
+        <p:cNvPr id="1" name=""/>
+        <p:cNvGrpSpPr/>
+        <p:nvPr/>
+      </p:nvGrpSpPr>
+      <p:grpSpPr>
+        <a:xfrm>
+          <a:off x="0" y="0"/>
+          <a:ext cx="0" cy="0"/>
+          <a:chOff x="0" y="0"/>
+          <a:chExt cx="0" cy="0"/>
+        </a:xfrm>
+      </p:grpSpPr>
+      <p:sp>
+        <p:nvSpPr>
+          <p:cNvPr id="7" name="Прямоугольник 6"/>
+          <p:cNvSpPr/>
+          <p:nvPr/>
+        </p:nvSpPr>
+        <p:spPr>
+          <a:xfrm>
+            <a:off x="0" y="0"/>
+            <a:ext cx="12192000" cy="3970318"/>
+          </a:xfrm>
+          <a:prstGeom prst="rect">
+            <a:avLst/>
+          </a:prstGeom>
+        </p:spPr>
+        <p:txBody>
+          <a:bodyPr wrap="square" lIns="360000" rIns="360000">
+            <a:spAutoFit/>
+          </a:bodyPr>
+          <a:lstStyle/>
+          <a:p>
+            <a:pPr>
+              <a:lnSpc>
+                <a:spcPct val="150000"/>
+              </a:lnSpc>
+            </a:pPr>
+            <a:r>
+              <a:rPr lang="ru-RU" sz="2400" b="1" dirty="0"/>
+              <a:t>Важно:</a:t>
+            </a:r>
+            <a:r>
+              <a:rPr lang="ru-RU" sz="2400" dirty="0"/>
+              <a:t> В сложных </a:t>
+            </a:r>
+            <a:r>
+              <a:rPr lang="ru-RU" sz="2400" dirty="0" smtClean="0"/>
+              <a:t>проектах (как в наших лабораторных) </a:t>
+            </a:r>
+            <a:r>
+              <a:rPr lang="ru-RU" sz="2400" dirty="0"/>
+              <a:t>используются флаги:</a:t>
+            </a:r>
+            <a:r>
+              <a:rPr lang="ru-RU" sz="2400" dirty="0"/>
+              <a:t/>
+            </a:r>
+            <a:br>
+              <a:rPr lang="ru-RU" sz="2400" dirty="0"/>
+            </a:br>
+            <a:r>
+              <a:rPr lang="ru-RU" sz="2400" dirty="0"/>
+              <a:t>-p — путь к проекту с БД,</a:t>
+            </a:r>
+            <a:r>
+              <a:rPr lang="ru-RU" sz="2400" dirty="0"/>
+              <a:t/>
+            </a:r>
+            <a:br>
+              <a:rPr lang="ru-RU" sz="2400" dirty="0"/>
+            </a:br>
+            <a:r>
+              <a:rPr lang="ru-RU" sz="2400" dirty="0"/>
+              <a:t>-s — путь к проекту с точкой входа (API</a:t>
+            </a:r>
+            <a:r>
+              <a:rPr lang="ru-RU" sz="2400" dirty="0" smtClean="0"/>
+              <a:t>).</a:t>
+            </a:r>
+          </a:p>
+          <a:p>
+            <a:pPr>
+              <a:lnSpc>
+                <a:spcPct val="150000"/>
+              </a:lnSpc>
+            </a:pPr>
+            <a:endParaRPr lang="ru-RU" sz="2400" dirty="0"/>
+          </a:p>
+          <a:p>
+            <a:pPr algn="just" fontAlgn="base">
+              <a:lnSpc>
+                <a:spcPct val="150000"/>
+              </a:lnSpc>
+            </a:pPr>
+            <a:r>
+              <a:rPr lang="ru-RU" sz="2400" dirty="0" smtClean="0">
+                <a:solidFill>
+                  <a:srgbClr val="0C0D0E"/>
+                </a:solidFill>
+                <a:latin typeface="Bookman Old Style" panose="02050604050505020204" pitchFamily="18" charset="0"/>
+              </a:rPr>
+              <a:t>Например, создаём </a:t>
+            </a:r>
+            <a:r>
+              <a:rPr lang="ru-RU" sz="2400" dirty="0">
+                <a:solidFill>
+                  <a:srgbClr val="0C0D0E"/>
+                </a:solidFill>
+                <a:latin typeface="Bookman Old Style" panose="02050604050505020204" pitchFamily="18" charset="0"/>
+              </a:rPr>
+              <a:t>миграцию, вводим в терминал команду:</a:t>
+            </a:r>
+          </a:p>
+          <a:p>
+            <a:pPr algn="just" fontAlgn="base">
+              <a:lnSpc>
+                <a:spcPct val="150000"/>
+              </a:lnSpc>
+            </a:pPr>
+            <a:r>
+              <a:rPr lang="fr-FR" sz="2400" b="1" dirty="0">
+                <a:solidFill>
+                  <a:srgbClr val="0C0D0E"/>
+                </a:solidFill>
+                <a:latin typeface="Bookman Old Style" panose="02050604050505020204" pitchFamily="18" charset="0"/>
+              </a:rPr>
+              <a:t>dotnet ef migrations add -p .\Infrastructure\Persistence\ -s .\Api</a:t>
+            </a:r>
+            <a:r>
+              <a:rPr lang="fr-FR" sz="2400" b="1" dirty="0" smtClean="0">
+                <a:solidFill>
+                  <a:srgbClr val="0C0D0E"/>
+                </a:solidFill>
+                <a:latin typeface="Bookman Old Style" panose="02050604050505020204" pitchFamily="18" charset="0"/>
+              </a:rPr>
+              <a:t>\</a:t>
+            </a:r>
+            <a:endParaRPr lang="ru-RU" sz="2400" b="1" dirty="0">
+              <a:solidFill>
+                <a:srgbClr val="0C0D0E"/>
+              </a:solidFill>
+              <a:latin typeface="Bookman Old Style" panose="02050604050505020204" pitchFamily="18" charset="0"/>
+            </a:endParaRPr>
+          </a:p>
+        </p:txBody>
+      </p:sp>
+    </p:spTree>
+    <p:extLst>
+      <p:ext uri="{BB962C8B-B14F-4D97-AF65-F5344CB8AC3E}">
+        <p14:creationId xmlns:p14="http://schemas.microsoft.com/office/powerpoint/2010/main" val="4212873156"/>
+      </p:ext>
+    </p:extLst>
+  </p:cSld>
+  <p:clrMapOvr>
+    <a:masterClrMapping/>
+  </p:clrMapOvr>
+  <p:timing>
+    <p:tnLst>
+      <p:par>
+        <p:cTn id="1" dur="indefinite" restart="never" nodeType="tmRoot"/>
+      </p:par>
+    </p:tnLst>
+  </p:timing>
+</p:sld>
+</file>
+
+<file path=ppt/slides/slide21.xml><?xml version="1.0" encoding="utf-8"?>
+<p:sld xmlns:a="http://schemas.openxmlformats.org/drawingml/2006/main" xmlns:r="http://schemas.openxmlformats.org/officeDocument/2006/relationships" xmlns:p="http://schemas.openxmlformats.org/presentationml/2006/main">
+  <p:cSld>
+    <p:spTree>
+      <p:nvGrpSpPr>
+        <p:cNvPr id="1" name=""/>
+        <p:cNvGrpSpPr/>
+        <p:nvPr/>
+      </p:nvGrpSpPr>
+      <p:grpSpPr>
+        <a:xfrm>
+          <a:off x="0" y="0"/>
+          <a:ext cx="0" cy="0"/>
+          <a:chOff x="0" y="0"/>
+          <a:chExt cx="0" cy="0"/>
+        </a:xfrm>
+      </p:grpSpPr>
+      <p:sp>
+        <p:nvSpPr>
+          <p:cNvPr id="7" name="Прямоугольник 6"/>
+          <p:cNvSpPr/>
+          <p:nvPr/>
+        </p:nvSpPr>
+        <p:spPr>
+          <a:xfrm>
+            <a:off x="0" y="0"/>
+            <a:ext cx="12192000" cy="3970318"/>
+          </a:xfrm>
+          <a:prstGeom prst="rect">
+            <a:avLst/>
+          </a:prstGeom>
+        </p:spPr>
+        <p:txBody>
+          <a:bodyPr wrap="square" lIns="360000" rIns="360000">
+            <a:spAutoFit/>
+          </a:bodyPr>
+          <a:lstStyle/>
+          <a:p>
+            <a:pPr>
+              <a:lnSpc>
+                <a:spcPct val="150000"/>
+              </a:lnSpc>
+            </a:pPr>
+            <a:r>
+              <a:rPr lang="ru-RU" sz="2400" b="1" dirty="0" smtClean="0"/>
+              <a:t>Как </a:t>
+            </a:r>
+            <a:r>
+              <a:rPr lang="ru-RU" sz="2400" b="1" dirty="0"/>
+              <a:t>база «узнает» о миграциях?</a:t>
+            </a:r>
+          </a:p>
+          <a:p>
+            <a:pPr>
+              <a:lnSpc>
+                <a:spcPct val="150000"/>
+              </a:lnSpc>
+            </a:pPr>
+            <a:r>
+              <a:rPr lang="ru-RU" sz="2400" dirty="0" smtClean="0"/>
+              <a:t>EF </a:t>
+            </a:r>
+            <a:r>
+              <a:rPr lang="ru-RU" sz="2400" dirty="0" err="1"/>
+              <a:t>Core</a:t>
+            </a:r>
+            <a:r>
+              <a:rPr lang="ru-RU" sz="2400" dirty="0"/>
+              <a:t> создает в вашей базе данных специальную служебную таблицу: </a:t>
+            </a:r>
+            <a:r>
+              <a:rPr lang="ru-RU" sz="2400" b="1" dirty="0"/>
+              <a:t>__</a:t>
+            </a:r>
+            <a:r>
+              <a:rPr lang="ru-RU" sz="2400" b="1" dirty="0" err="1"/>
+              <a:t>EFMigrationsHistory</a:t>
+            </a:r>
+            <a:r>
+              <a:rPr lang="ru-RU" sz="2400" dirty="0"/>
+              <a:t>.</a:t>
+            </a:r>
+          </a:p>
+          <a:p>
+            <a:pPr>
+              <a:lnSpc>
+                <a:spcPct val="150000"/>
+              </a:lnSpc>
+            </a:pPr>
+            <a:r>
+              <a:rPr lang="ru-RU" sz="2400" dirty="0"/>
+              <a:t>В этой таблице хранится список имен всех уже примененных миграций.</a:t>
+            </a:r>
+          </a:p>
+          <a:p>
+            <a:pPr>
+              <a:lnSpc>
+                <a:spcPct val="150000"/>
+              </a:lnSpc>
+            </a:pPr>
+            <a:r>
+              <a:rPr lang="ru-RU" sz="2400" dirty="0"/>
+              <a:t>При запуске команды </a:t>
+            </a:r>
+            <a:r>
+              <a:rPr lang="ru-RU" sz="2400" b="1" dirty="0" err="1"/>
+              <a:t>database</a:t>
+            </a:r>
+            <a:r>
+              <a:rPr lang="ru-RU" sz="2400" b="1" dirty="0"/>
+              <a:t> </a:t>
+            </a:r>
+            <a:r>
+              <a:rPr lang="ru-RU" sz="2400" b="1" dirty="0" err="1"/>
+              <a:t>update</a:t>
+            </a:r>
+            <a:r>
+              <a:rPr lang="ru-RU" sz="2400" dirty="0"/>
+              <a:t> сервер смотрит в эту таблицу, понимает, каких файлов не хватает, и выполняет только новые изменения</a:t>
+            </a:r>
+            <a:r>
+              <a:rPr lang="ru-RU" sz="2400" dirty="0" smtClean="0"/>
+              <a:t>.</a:t>
+            </a:r>
+          </a:p>
+        </p:txBody>
+      </p:sp>
+    </p:spTree>
+    <p:extLst>
+      <p:ext uri="{BB962C8B-B14F-4D97-AF65-F5344CB8AC3E}">
+        <p14:creationId xmlns:p14="http://schemas.microsoft.com/office/powerpoint/2010/main" val="1771211756"/>
+      </p:ext>
+    </p:extLst>
+  </p:cSld>
+  <p:clrMapOvr>
+    <a:masterClrMapping/>
+  </p:clrMapOvr>
+  <p:timing>
+    <p:tnLst>
+      <p:par>
+        <p:cTn id="1" dur="indefinite" restart="never" nodeType="tmRoot"/>
+      </p:par>
+    </p:tnLst>
+  </p:timing>
+</p:sld>
+</file>
+
+<file path=ppt/slides/slide22.xml><?xml version="1.0" encoding="utf-8"?>
+<p:sld xmlns:a="http://schemas.openxmlformats.org/drawingml/2006/main" xmlns:r="http://schemas.openxmlformats.org/officeDocument/2006/relationships" xmlns:p="http://schemas.openxmlformats.org/presentationml/2006/main">
+  <p:cSld>
+    <p:spTree>
+      <p:nvGrpSpPr>
+        <p:cNvPr id="1" name=""/>
+        <p:cNvGrpSpPr/>
+        <p:nvPr/>
+      </p:nvGrpSpPr>
+      <p:grpSpPr>
+        <a:xfrm>
+          <a:off x="0" y="0"/>
+          <a:ext cx="0" cy="0"/>
+          <a:chOff x="0" y="0"/>
+          <a:chExt cx="0" cy="0"/>
+        </a:xfrm>
+      </p:grpSpPr>
+      <p:sp>
+        <p:nvSpPr>
+          <p:cNvPr id="7" name="Прямоугольник 6"/>
+          <p:cNvSpPr/>
+          <p:nvPr/>
+        </p:nvSpPr>
+        <p:spPr>
+          <a:xfrm>
+            <a:off x="0" y="0"/>
+            <a:ext cx="12192000" cy="4524315"/>
+          </a:xfrm>
+          <a:prstGeom prst="rect">
+            <a:avLst/>
+          </a:prstGeom>
+        </p:spPr>
+        <p:txBody>
+          <a:bodyPr wrap="square" lIns="360000" rIns="360000">
+            <a:spAutoFit/>
+          </a:bodyPr>
+          <a:lstStyle/>
+          <a:p>
+            <a:pPr>
+              <a:lnSpc>
+                <a:spcPct val="150000"/>
+              </a:lnSpc>
+            </a:pPr>
+            <a:r>
+              <a:rPr lang="ru-RU" sz="2400" b="1" dirty="0" smtClean="0"/>
+              <a:t>Почему </a:t>
+            </a:r>
+            <a:r>
+              <a:rPr lang="ru-RU" sz="2400" b="1" dirty="0"/>
+              <a:t>это стандарт индустрии?</a:t>
+            </a:r>
+          </a:p>
+          <a:p>
+            <a:pPr marL="457200" indent="-457200">
+              <a:lnSpc>
+                <a:spcPct val="150000"/>
+              </a:lnSpc>
+              <a:buFont typeface="+mj-lt"/>
+              <a:buAutoNum type="arabicPeriod"/>
+            </a:pPr>
+            <a:r>
+              <a:rPr lang="ru-RU" sz="2400" b="1" dirty="0"/>
+              <a:t>Никакого ручного SQL:</a:t>
+            </a:r>
+            <a:r>
+              <a:rPr lang="ru-RU" sz="2400" dirty="0"/>
+              <a:t> Вам не нужно заходить в </a:t>
+            </a:r>
+            <a:r>
+              <a:rPr lang="ru-RU" sz="2400" dirty="0" err="1"/>
+              <a:t>админку</a:t>
+            </a:r>
+            <a:r>
+              <a:rPr lang="ru-RU" sz="2400" dirty="0"/>
+              <a:t> БД и вручную менять типы колонок.</a:t>
+            </a:r>
+          </a:p>
+          <a:p>
+            <a:pPr marL="457200" indent="-457200">
+              <a:lnSpc>
+                <a:spcPct val="150000"/>
+              </a:lnSpc>
+              <a:buFont typeface="+mj-lt"/>
+              <a:buAutoNum type="arabicPeriod"/>
+            </a:pPr>
+            <a:r>
+              <a:rPr lang="ru-RU" sz="2400" b="1" dirty="0"/>
+              <a:t>История изменений:</a:t>
+            </a:r>
+            <a:r>
+              <a:rPr lang="ru-RU" sz="2400" dirty="0"/>
+              <a:t> Вы всегда можете посмотреть, кто и когда изменил структуру базы.</a:t>
+            </a:r>
+          </a:p>
+          <a:p>
+            <a:pPr marL="457200" indent="-457200">
+              <a:lnSpc>
+                <a:spcPct val="150000"/>
+              </a:lnSpc>
+              <a:buFont typeface="+mj-lt"/>
+              <a:buAutoNum type="arabicPeriod"/>
+            </a:pPr>
+            <a:r>
+              <a:rPr lang="ru-RU" sz="2400" b="1" dirty="0"/>
+              <a:t>Автоматизация:</a:t>
+            </a:r>
+            <a:r>
+              <a:rPr lang="ru-RU" sz="2400" dirty="0"/>
+              <a:t> Миграции могут применяться автоматически при развертывании приложения на сервере.</a:t>
+            </a:r>
+          </a:p>
+          <a:p>
+            <a:pPr>
+              <a:lnSpc>
+                <a:spcPct val="150000"/>
+              </a:lnSpc>
+            </a:pPr>
+            <a:endParaRPr lang="ru-RU" sz="2400" dirty="0"/>
+          </a:p>
+        </p:txBody>
+      </p:sp>
+    </p:spTree>
+    <p:extLst>
+      <p:ext uri="{BB962C8B-B14F-4D97-AF65-F5344CB8AC3E}">
+        <p14:creationId xmlns:p14="http://schemas.microsoft.com/office/powerpoint/2010/main" val="4101323168"/>
+      </p:ext>
+    </p:extLst>
+  </p:cSld>
+  <p:clrMapOvr>
+    <a:masterClrMapping/>
+  </p:clrMapOvr>
+  <p:timing>
+    <p:tnLst>
+      <p:par>
+        <p:cTn id="1" dur="indefinite" restart="never" nodeType="tmRoot"/>
+      </p:par>
+    </p:tnLst>
+  </p:timing>
+</p:sld>
+</file>
+
+<file path=ppt/slides/slide23.xml><?xml version="1.0" encoding="utf-8"?>
+<p:sld xmlns:a="http://schemas.openxmlformats.org/drawingml/2006/main" xmlns:r="http://schemas.openxmlformats.org/officeDocument/2006/relationships" xmlns:p="http://schemas.openxmlformats.org/presentationml/2006/main">
+  <p:cSld>
+    <p:spTree>
+      <p:nvGrpSpPr>
+        <p:cNvPr id="1" name=""/>
+        <p:cNvGrpSpPr/>
+        <p:nvPr/>
+      </p:nvGrpSpPr>
+      <p:grpSpPr>
+        <a:xfrm>
+          <a:off x="0" y="0"/>
+          <a:ext cx="0" cy="0"/>
+          <a:chOff x="0" y="0"/>
+          <a:chExt cx="0" cy="0"/>
+        </a:xfrm>
+      </p:grpSpPr>
+      <p:sp>
+        <p:nvSpPr>
+          <p:cNvPr id="11" name="Rectangle 28" descr="Светлый диагональный 2"/>
+          <p:cNvSpPr>
+            <a:spLocks noChangeArrowheads="1"/>
+          </p:cNvSpPr>
+          <p:nvPr/>
+        </p:nvSpPr>
+        <p:spPr bwMode="auto">
+          <a:xfrm>
+            <a:off x="0" y="-1"/>
+            <a:ext cx="12192000" cy="654357"/>
+          </a:xfrm>
+          <a:prstGeom prst="rect">
+            <a:avLst/>
+          </a:prstGeom>
+          <a:pattFill prst="ltUpDiag">
+            <a:fgClr>
+              <a:schemeClr val="accent1">
+                <a:lumMod val="40000"/>
+                <a:lumOff val="60000"/>
+              </a:schemeClr>
+            </a:fgClr>
+            <a:bgClr>
+              <a:srgbClr val="FFFFFF"/>
+            </a:bgClr>
+          </a:pattFill>
+          <a:ln w="15875" algn="ctr">
+            <a:solidFill>
+              <a:schemeClr val="accent5">
+                <a:lumMod val="50000"/>
+              </a:schemeClr>
+            </a:solidFill>
+            <a:miter lim="800000"/>
+            <a:headEnd/>
+            <a:tailEnd/>
+          </a:ln>
+          <a:effectLst/>
+        </p:spPr>
+        <p:txBody>
+          <a:bodyPr vert="horz" wrap="square" lIns="18000" tIns="18000" rIns="18000" bIns="18000" numCol="1" anchor="ctr" anchorCtr="0" compatLnSpc="1">
+            <a:prstTxWarp prst="textNoShape">
+              <a:avLst/>
+            </a:prstTxWarp>
+          </a:bodyPr>
+          <a:lstStyle/>
+          <a:p>
+            <a:pPr algn="ctr"/>
+            <a:r>
+              <a:rPr lang="ru-RU" sz="2800" b="1" dirty="0">
+                <a:solidFill>
+                  <a:schemeClr val="tx2">
+                    <a:lumMod val="50000"/>
+                  </a:schemeClr>
+                </a:solidFill>
+                <a:latin typeface="Bookman Old Style" panose="02050604050505020204" pitchFamily="18" charset="0"/>
+                <a:cs typeface="Times New Roman" panose="02020603050405020304" pitchFamily="18" charset="0"/>
+              </a:rPr>
+              <a:t>CRUD: Работа с данными через LINQ</a:t>
+            </a:r>
+            <a:endParaRPr lang="en-US" sz="2800" b="1" dirty="0">
+              <a:solidFill>
+                <a:schemeClr val="tx2">
+                  <a:lumMod val="50000"/>
+                </a:schemeClr>
+              </a:solidFill>
+              <a:latin typeface="Bookman Old Style" panose="02050604050505020204" pitchFamily="18" charset="0"/>
+              <a:cs typeface="Times New Roman" panose="02020603050405020304" pitchFamily="18" charset="0"/>
+            </a:endParaRPr>
+          </a:p>
+        </p:txBody>
+      </p:sp>
+      <p:sp>
+        <p:nvSpPr>
+          <p:cNvPr id="7" name="Прямоугольник 6"/>
+          <p:cNvSpPr/>
+          <p:nvPr/>
+        </p:nvSpPr>
+        <p:spPr>
+          <a:xfrm>
+            <a:off x="1" y="654355"/>
+            <a:ext cx="12192000" cy="5632311"/>
+          </a:xfrm>
+          <a:prstGeom prst="rect">
+            <a:avLst/>
+          </a:prstGeom>
+        </p:spPr>
+        <p:txBody>
+          <a:bodyPr wrap="square" lIns="360000" rIns="360000">
+            <a:spAutoFit/>
+          </a:bodyPr>
+          <a:lstStyle/>
+          <a:p>
+            <a:pPr>
+              <a:lnSpc>
+                <a:spcPct val="150000"/>
+              </a:lnSpc>
+            </a:pPr>
+            <a:r>
+              <a:rPr lang="en-US" sz="2400" b="1" dirty="0"/>
+              <a:t>CRUD</a:t>
+            </a:r>
+            <a:r>
+              <a:rPr lang="en-US" sz="2400" dirty="0"/>
+              <a:t> — </a:t>
+            </a:r>
+            <a:r>
+              <a:rPr lang="ru-RU" sz="2400" dirty="0"/>
+              <a:t>это акроним четырех базовых операций в любой информационной системе:</a:t>
+            </a:r>
+          </a:p>
+          <a:p>
+            <a:pPr marL="342900" indent="-342900">
+              <a:lnSpc>
+                <a:spcPct val="150000"/>
+              </a:lnSpc>
+              <a:buFont typeface="Arial" panose="020B0604020202020204" pitchFamily="34" charset="0"/>
+              <a:buChar char="•"/>
+            </a:pPr>
+            <a:r>
+              <a:rPr lang="en-US" sz="2400" b="1" dirty="0"/>
+              <a:t>C</a:t>
+            </a:r>
+            <a:r>
+              <a:rPr lang="en-US" sz="2400" dirty="0"/>
+              <a:t>reate (</a:t>
+            </a:r>
+            <a:r>
+              <a:rPr lang="ru-RU" sz="2400" dirty="0"/>
+              <a:t>Создание)</a:t>
+            </a:r>
+          </a:p>
+          <a:p>
+            <a:pPr marL="342900" indent="-342900">
+              <a:lnSpc>
+                <a:spcPct val="150000"/>
+              </a:lnSpc>
+              <a:buFont typeface="Arial" panose="020B0604020202020204" pitchFamily="34" charset="0"/>
+              <a:buChar char="•"/>
+            </a:pPr>
+            <a:r>
+              <a:rPr lang="en-US" sz="2400" b="1" dirty="0"/>
+              <a:t>R</a:t>
+            </a:r>
+            <a:r>
+              <a:rPr lang="en-US" sz="2400" dirty="0"/>
+              <a:t>ead (</a:t>
+            </a:r>
+            <a:r>
+              <a:rPr lang="ru-RU" sz="2400" dirty="0"/>
+              <a:t>Чтение)</a:t>
+            </a:r>
+          </a:p>
+          <a:p>
+            <a:pPr marL="342900" indent="-342900">
+              <a:lnSpc>
+                <a:spcPct val="150000"/>
+              </a:lnSpc>
+              <a:buFont typeface="Arial" panose="020B0604020202020204" pitchFamily="34" charset="0"/>
+              <a:buChar char="•"/>
+            </a:pPr>
+            <a:r>
+              <a:rPr lang="en-US" sz="2400" b="1" dirty="0"/>
+              <a:t>U</a:t>
+            </a:r>
+            <a:r>
+              <a:rPr lang="en-US" sz="2400" dirty="0"/>
+              <a:t>pdate (</a:t>
+            </a:r>
+            <a:r>
+              <a:rPr lang="ru-RU" sz="2400" dirty="0"/>
+              <a:t>Обновление)</a:t>
+            </a:r>
+          </a:p>
+          <a:p>
+            <a:pPr marL="342900" indent="-342900">
+              <a:lnSpc>
+                <a:spcPct val="150000"/>
+              </a:lnSpc>
+              <a:buFont typeface="Arial" panose="020B0604020202020204" pitchFamily="34" charset="0"/>
+              <a:buChar char="•"/>
+            </a:pPr>
+            <a:r>
+              <a:rPr lang="en-US" sz="2400" b="1" dirty="0"/>
+              <a:t>D</a:t>
+            </a:r>
+            <a:r>
+              <a:rPr lang="en-US" sz="2400" dirty="0"/>
+              <a:t>elete (</a:t>
+            </a:r>
+            <a:r>
+              <a:rPr lang="ru-RU" sz="2400" dirty="0"/>
+              <a:t>Удаление)</a:t>
+            </a:r>
+          </a:p>
+          <a:p>
+            <a:pPr>
+              <a:lnSpc>
+                <a:spcPct val="150000"/>
+              </a:lnSpc>
+            </a:pPr>
+            <a:endParaRPr lang="ru-RU" sz="2400" dirty="0" smtClean="0"/>
+          </a:p>
+          <a:p>
+            <a:pPr>
+              <a:lnSpc>
+                <a:spcPct val="150000"/>
+              </a:lnSpc>
+            </a:pPr>
+            <a:r>
+              <a:rPr lang="ru-RU" sz="2400" dirty="0" smtClean="0"/>
+              <a:t>В </a:t>
+            </a:r>
+            <a:r>
+              <a:rPr lang="en-US" sz="2400" dirty="0"/>
+              <a:t>Entity Framework Core </a:t>
+            </a:r>
+            <a:r>
+              <a:rPr lang="ru-RU" sz="2400" dirty="0"/>
+              <a:t>эти операции выполняются через </a:t>
+            </a:r>
+            <a:r>
+              <a:rPr lang="en-US" sz="2400" b="1" dirty="0"/>
+              <a:t>LINQ</a:t>
+            </a:r>
+            <a:r>
+              <a:rPr lang="en-US" sz="2400" dirty="0"/>
+              <a:t> (Language Integrated Query) — </a:t>
+            </a:r>
+            <a:r>
+              <a:rPr lang="ru-RU" sz="2400" dirty="0"/>
+              <a:t>специальный синтаксис запросов внутри </a:t>
+            </a:r>
+            <a:r>
+              <a:rPr lang="en-US" sz="2400" dirty="0"/>
+              <a:t>C#.</a:t>
+            </a:r>
+          </a:p>
+        </p:txBody>
+      </p:sp>
+    </p:spTree>
+    <p:extLst>
+      <p:ext uri="{BB962C8B-B14F-4D97-AF65-F5344CB8AC3E}">
+        <p14:creationId xmlns:p14="http://schemas.microsoft.com/office/powerpoint/2010/main" val="4071389859"/>
+      </p:ext>
+    </p:extLst>
+  </p:cSld>
+  <p:clrMapOvr>
+    <a:masterClrMapping/>
+  </p:clrMapOvr>
+  <p:timing>
+    <p:tnLst>
+      <p:par>
+        <p:cTn id="1" dur="indefinite" restart="never" nodeType="tmRoot"/>
+      </p:par>
+    </p:tnLst>
+  </p:timing>
+</p:sld>
+</file>
+
+<file path=ppt/slides/slide24.xml><?xml version="1.0" encoding="utf-8"?>
+<p:sld xmlns:a="http://schemas.openxmlformats.org/drawingml/2006/main" xmlns:r="http://schemas.openxmlformats.org/officeDocument/2006/relationships" xmlns:p="http://schemas.openxmlformats.org/presentationml/2006/main">
+  <p:cSld>
+    <p:spTree>
+      <p:nvGrpSpPr>
+        <p:cNvPr id="1" name=""/>
+        <p:cNvGrpSpPr/>
+        <p:nvPr/>
+      </p:nvGrpSpPr>
+      <p:grpSpPr>
+        <a:xfrm>
+          <a:off x="0" y="0"/>
+          <a:ext cx="0" cy="0"/>
+          <a:chOff x="0" y="0"/>
+          <a:chExt cx="0" cy="0"/>
+        </a:xfrm>
+      </p:grpSpPr>
+      <p:sp>
+        <p:nvSpPr>
+          <p:cNvPr id="7" name="Прямоугольник 6"/>
+          <p:cNvSpPr/>
+          <p:nvPr/>
+        </p:nvSpPr>
+        <p:spPr>
+          <a:xfrm>
+            <a:off x="0" y="0"/>
+            <a:ext cx="12192000" cy="6370975"/>
+          </a:xfrm>
+          <a:prstGeom prst="rect">
+            <a:avLst/>
+          </a:prstGeom>
+        </p:spPr>
+        <p:txBody>
+          <a:bodyPr wrap="square" lIns="360000" rIns="360000">
+            <a:spAutoFit/>
+          </a:bodyPr>
+          <a:lstStyle/>
+          <a:p>
+            <a:pPr>
+              <a:lnSpc>
+                <a:spcPct val="150000"/>
+              </a:lnSpc>
+            </a:pPr>
+            <a:r>
+              <a:rPr lang="ru-RU" sz="2400" dirty="0"/>
+              <a:t>Чтобы создать запись, мы просто добавляем новый объект в коллекцию </a:t>
+            </a:r>
+            <a:r>
+              <a:rPr lang="ru-RU" sz="2400" dirty="0" err="1"/>
+              <a:t>DbSet</a:t>
+            </a:r>
+            <a:r>
+              <a:rPr lang="ru-RU" sz="2400" dirty="0" smtClean="0"/>
+              <a:t>.</a:t>
+            </a:r>
+            <a:endParaRPr lang="en-US" sz="2400" dirty="0"/>
+          </a:p>
+          <a:p>
+            <a:r>
+              <a:rPr lang="en-US" sz="2400" dirty="0">
+                <a:solidFill>
+                  <a:srgbClr val="0000FF"/>
+                </a:solidFill>
+                <a:highlight>
+                  <a:srgbClr val="FFFFFF"/>
+                </a:highlight>
+                <a:latin typeface="Cascadia Mono" panose="020B0609020000020004" pitchFamily="49" charset="0"/>
+              </a:rPr>
+              <a:t>using</a:t>
+            </a:r>
+            <a:r>
+              <a:rPr lang="en-US" sz="2400" dirty="0">
+                <a:solidFill>
+                  <a:srgbClr val="000000"/>
+                </a:solidFill>
+                <a:highlight>
+                  <a:srgbClr val="FFFFFF"/>
+                </a:highlight>
+                <a:latin typeface="Cascadia Mono" panose="020B0609020000020004" pitchFamily="49" charset="0"/>
+              </a:rPr>
+              <a:t> </a:t>
+            </a:r>
+            <a:r>
+              <a:rPr lang="en-US" sz="2400" dirty="0" err="1">
+                <a:solidFill>
+                  <a:srgbClr val="0000FF"/>
+                </a:solidFill>
+                <a:highlight>
+                  <a:srgbClr val="FFFFFF"/>
+                </a:highlight>
+                <a:latin typeface="Cascadia Mono" panose="020B0609020000020004" pitchFamily="49" charset="0"/>
+              </a:rPr>
+              <a:t>var</a:t>
+            </a:r>
+            <a:r>
+              <a:rPr lang="en-US" sz="2400" dirty="0">
+                <a:solidFill>
+                  <a:srgbClr val="000000"/>
+                </a:solidFill>
+                <a:highlight>
+                  <a:srgbClr val="FFFFFF"/>
+                </a:highlight>
+                <a:latin typeface="Cascadia Mono" panose="020B0609020000020004" pitchFamily="49" charset="0"/>
+              </a:rPr>
+              <a:t> </a:t>
+            </a:r>
+            <a:r>
+              <a:rPr lang="en-US" sz="2400" dirty="0" err="1">
+                <a:solidFill>
+                  <a:srgbClr val="1F377F"/>
+                </a:solidFill>
+                <a:highlight>
+                  <a:srgbClr val="FFFFFF"/>
+                </a:highlight>
+                <a:latin typeface="Cascadia Mono" panose="020B0609020000020004" pitchFamily="49" charset="0"/>
+              </a:rPr>
+              <a:t>db</a:t>
+            </a:r>
+            <a:r>
+              <a:rPr lang="en-US" sz="2400" dirty="0">
+                <a:solidFill>
+                  <a:srgbClr val="000000"/>
+                </a:solidFill>
+                <a:highlight>
+                  <a:srgbClr val="FFFFFF"/>
+                </a:highlight>
+                <a:latin typeface="Cascadia Mono" panose="020B0609020000020004" pitchFamily="49" charset="0"/>
+              </a:rPr>
+              <a:t> = </a:t>
+            </a:r>
+            <a:r>
+              <a:rPr lang="en-US" sz="2400" dirty="0">
+                <a:solidFill>
+                  <a:srgbClr val="0000FF"/>
+                </a:solidFill>
+                <a:highlight>
+                  <a:srgbClr val="FFFFFF"/>
+                </a:highlight>
+                <a:latin typeface="Cascadia Mono" panose="020B0609020000020004" pitchFamily="49" charset="0"/>
+              </a:rPr>
+              <a:t>new</a:t>
+            </a:r>
+            <a:r>
+              <a:rPr lang="en-US" sz="2400" dirty="0">
+                <a:solidFill>
+                  <a:srgbClr val="000000"/>
+                </a:solidFill>
+                <a:highlight>
+                  <a:srgbClr val="FFFFFF"/>
+                </a:highlight>
+                <a:latin typeface="Cascadia Mono" panose="020B0609020000020004" pitchFamily="49" charset="0"/>
+              </a:rPr>
+              <a:t> </a:t>
+            </a:r>
+            <a:r>
+              <a:rPr lang="en-US" sz="2400" dirty="0" err="1">
+                <a:solidFill>
+                  <a:srgbClr val="2B91AF"/>
+                </a:solidFill>
+                <a:highlight>
+                  <a:srgbClr val="FFFFFF"/>
+                </a:highlight>
+                <a:latin typeface="Cascadia Mono" panose="020B0609020000020004" pitchFamily="49" charset="0"/>
+              </a:rPr>
+              <a:t>ApplicationContext</a:t>
+            </a:r>
+            <a:r>
+              <a:rPr lang="en-US" sz="2400" dirty="0">
+                <a:solidFill>
+                  <a:srgbClr val="000000"/>
+                </a:solidFill>
+                <a:highlight>
+                  <a:srgbClr val="FFFFFF"/>
+                </a:highlight>
+                <a:latin typeface="Cascadia Mono" panose="020B0609020000020004" pitchFamily="49" charset="0"/>
+              </a:rPr>
+              <a:t>(); </a:t>
+            </a:r>
+          </a:p>
+          <a:p>
+            <a:endParaRPr lang="ru-RU" sz="2400" dirty="0">
+              <a:solidFill>
+                <a:srgbClr val="000000"/>
+              </a:solidFill>
+              <a:highlight>
+                <a:srgbClr val="FFFFFF"/>
+              </a:highlight>
+              <a:latin typeface="Cascadia Mono" panose="020B0609020000020004" pitchFamily="49" charset="0"/>
+            </a:endParaRPr>
+          </a:p>
+          <a:p>
+            <a:r>
+              <a:rPr lang="ru-RU" sz="2400" dirty="0">
+                <a:solidFill>
+                  <a:srgbClr val="008000"/>
+                </a:solidFill>
+                <a:highlight>
+                  <a:srgbClr val="FFFFFF"/>
+                </a:highlight>
+                <a:latin typeface="Cascadia Mono" panose="020B0609020000020004" pitchFamily="49" charset="0"/>
+              </a:rPr>
+              <a:t>// 1. Создаем объект</a:t>
+            </a:r>
+            <a:endParaRPr lang="ru-RU" sz="2400" dirty="0">
+              <a:solidFill>
+                <a:srgbClr val="000000"/>
+              </a:solidFill>
+              <a:highlight>
+                <a:srgbClr val="FFFFFF"/>
+              </a:highlight>
+              <a:latin typeface="Cascadia Mono" panose="020B0609020000020004" pitchFamily="49" charset="0"/>
+            </a:endParaRPr>
+          </a:p>
+          <a:p>
+            <a:r>
+              <a:rPr lang="en-US" sz="2400" dirty="0" err="1">
+                <a:solidFill>
+                  <a:srgbClr val="0000FF"/>
+                </a:solidFill>
+                <a:highlight>
+                  <a:srgbClr val="FFFFFF"/>
+                </a:highlight>
+                <a:latin typeface="Cascadia Mono" panose="020B0609020000020004" pitchFamily="49" charset="0"/>
+              </a:rPr>
+              <a:t>var</a:t>
+            </a:r>
+            <a:r>
+              <a:rPr lang="en-US" sz="2400" dirty="0">
+                <a:solidFill>
+                  <a:srgbClr val="000000"/>
+                </a:solidFill>
+                <a:highlight>
+                  <a:srgbClr val="FFFFFF"/>
+                </a:highlight>
+                <a:latin typeface="Cascadia Mono" panose="020B0609020000020004" pitchFamily="49" charset="0"/>
+              </a:rPr>
+              <a:t> </a:t>
+            </a:r>
+            <a:r>
+              <a:rPr lang="en-US" sz="2400" dirty="0">
+                <a:solidFill>
+                  <a:srgbClr val="1F377F"/>
+                </a:solidFill>
+                <a:highlight>
+                  <a:srgbClr val="FFFFFF"/>
+                </a:highlight>
+                <a:latin typeface="Cascadia Mono" panose="020B0609020000020004" pitchFamily="49" charset="0"/>
+              </a:rPr>
+              <a:t>customer</a:t>
+            </a:r>
+            <a:r>
+              <a:rPr lang="en-US" sz="2400" dirty="0">
+                <a:solidFill>
+                  <a:srgbClr val="000000"/>
+                </a:solidFill>
+                <a:highlight>
+                  <a:srgbClr val="FFFFFF"/>
+                </a:highlight>
+                <a:latin typeface="Cascadia Mono" panose="020B0609020000020004" pitchFamily="49" charset="0"/>
+              </a:rPr>
+              <a:t> = </a:t>
+            </a:r>
+            <a:r>
+              <a:rPr lang="en-US" sz="2400" dirty="0">
+                <a:solidFill>
+                  <a:srgbClr val="0000FF"/>
+                </a:solidFill>
+                <a:highlight>
+                  <a:srgbClr val="FFFFFF"/>
+                </a:highlight>
+                <a:latin typeface="Cascadia Mono" panose="020B0609020000020004" pitchFamily="49" charset="0"/>
+              </a:rPr>
+              <a:t>new</a:t>
+            </a:r>
+            <a:r>
+              <a:rPr lang="en-US" sz="2400" dirty="0">
+                <a:solidFill>
+                  <a:srgbClr val="000000"/>
+                </a:solidFill>
+                <a:highlight>
+                  <a:srgbClr val="FFFFFF"/>
+                </a:highlight>
+                <a:latin typeface="Cascadia Mono" panose="020B0609020000020004" pitchFamily="49" charset="0"/>
+              </a:rPr>
+              <a:t> </a:t>
+            </a:r>
+            <a:r>
+              <a:rPr lang="en-US" sz="2400" dirty="0">
+                <a:solidFill>
+                  <a:srgbClr val="2B91AF"/>
+                </a:solidFill>
+                <a:highlight>
+                  <a:srgbClr val="FFFFFF"/>
+                </a:highlight>
+                <a:latin typeface="Cascadia Mono" panose="020B0609020000020004" pitchFamily="49" charset="0"/>
+              </a:rPr>
+              <a:t>Customer</a:t>
+            </a:r>
+            <a:r>
+              <a:rPr lang="en-US" sz="2400" dirty="0">
+                <a:solidFill>
+                  <a:srgbClr val="000000"/>
+                </a:solidFill>
+                <a:highlight>
+                  <a:srgbClr val="FFFFFF"/>
+                </a:highlight>
+                <a:latin typeface="Cascadia Mono" panose="020B0609020000020004" pitchFamily="49" charset="0"/>
+              </a:rPr>
+              <a:t> { Name = </a:t>
+            </a:r>
+            <a:r>
+              <a:rPr lang="en-US" sz="2400" dirty="0">
+                <a:solidFill>
+                  <a:srgbClr val="A31515"/>
+                </a:solidFill>
+                <a:highlight>
+                  <a:srgbClr val="FFFFFF"/>
+                </a:highlight>
+                <a:latin typeface="Cascadia Mono" panose="020B0609020000020004" pitchFamily="49" charset="0"/>
+              </a:rPr>
+              <a:t>"</a:t>
+            </a:r>
+            <a:r>
+              <a:rPr lang="en-US" sz="2400" dirty="0" err="1">
+                <a:solidFill>
+                  <a:srgbClr val="A31515"/>
+                </a:solidFill>
+                <a:highlight>
+                  <a:srgbClr val="FFFFFF"/>
+                </a:highlight>
+                <a:latin typeface="Cascadia Mono" panose="020B0609020000020004" pitchFamily="49" charset="0"/>
+              </a:rPr>
+              <a:t>Иван</a:t>
+            </a:r>
+            <a:r>
+              <a:rPr lang="en-US" sz="2400" dirty="0">
+                <a:solidFill>
+                  <a:srgbClr val="A31515"/>
+                </a:solidFill>
+                <a:highlight>
+                  <a:srgbClr val="FFFFFF"/>
+                </a:highlight>
+                <a:latin typeface="Cascadia Mono" panose="020B0609020000020004" pitchFamily="49" charset="0"/>
+              </a:rPr>
+              <a:t>"</a:t>
+            </a:r>
+            <a:r>
+              <a:rPr lang="en-US" sz="2400" dirty="0">
+                <a:solidFill>
+                  <a:srgbClr val="000000"/>
+                </a:solidFill>
+                <a:highlight>
+                  <a:srgbClr val="FFFFFF"/>
+                </a:highlight>
+                <a:latin typeface="Cascadia Mono" panose="020B0609020000020004" pitchFamily="49" charset="0"/>
+              </a:rPr>
+              <a:t>, Age = 25 };</a:t>
+            </a:r>
+          </a:p>
+          <a:p>
+            <a:endParaRPr lang="ru-RU" sz="2400" dirty="0">
+              <a:solidFill>
+                <a:srgbClr val="000000"/>
+              </a:solidFill>
+              <a:highlight>
+                <a:srgbClr val="FFFFFF"/>
+              </a:highlight>
+              <a:latin typeface="Cascadia Mono" panose="020B0609020000020004" pitchFamily="49" charset="0"/>
+            </a:endParaRPr>
+          </a:p>
+          <a:p>
+            <a:r>
+              <a:rPr lang="ru-RU" sz="2400" dirty="0">
+                <a:solidFill>
+                  <a:srgbClr val="008000"/>
+                </a:solidFill>
+                <a:highlight>
+                  <a:srgbClr val="FFFFFF"/>
+                </a:highlight>
+                <a:latin typeface="Cascadia Mono" panose="020B0609020000020004" pitchFamily="49" charset="0"/>
+              </a:rPr>
+              <a:t>// 2. Добавляем в "пачку" на отправку</a:t>
+            </a:r>
+            <a:endParaRPr lang="ru-RU" sz="2400" dirty="0">
+              <a:solidFill>
+                <a:srgbClr val="000000"/>
+              </a:solidFill>
+              <a:highlight>
+                <a:srgbClr val="FFFFFF"/>
+              </a:highlight>
+              <a:latin typeface="Cascadia Mono" panose="020B0609020000020004" pitchFamily="49" charset="0"/>
+            </a:endParaRPr>
+          </a:p>
+          <a:p>
+            <a:r>
+              <a:rPr lang="en-US" sz="2400" dirty="0" err="1">
+                <a:solidFill>
+                  <a:srgbClr val="1F377F"/>
+                </a:solidFill>
+                <a:highlight>
+                  <a:srgbClr val="FFFFFF"/>
+                </a:highlight>
+                <a:latin typeface="Cascadia Mono" panose="020B0609020000020004" pitchFamily="49" charset="0"/>
+              </a:rPr>
+              <a:t>db</a:t>
+            </a:r>
+            <a:r>
+              <a:rPr lang="en-US" sz="2400" dirty="0" err="1">
+                <a:solidFill>
+                  <a:srgbClr val="000000"/>
+                </a:solidFill>
+                <a:highlight>
+                  <a:srgbClr val="FFFFFF"/>
+                </a:highlight>
+                <a:latin typeface="Cascadia Mono" panose="020B0609020000020004" pitchFamily="49" charset="0"/>
+              </a:rPr>
+              <a:t>.Customers.</a:t>
+            </a:r>
+            <a:r>
+              <a:rPr lang="en-US" sz="2400" dirty="0" err="1">
+                <a:solidFill>
+                  <a:srgbClr val="74531F"/>
+                </a:solidFill>
+                <a:highlight>
+                  <a:srgbClr val="FFFFFF"/>
+                </a:highlight>
+                <a:latin typeface="Cascadia Mono" panose="020B0609020000020004" pitchFamily="49" charset="0"/>
+              </a:rPr>
+              <a:t>Add</a:t>
+            </a:r>
+            <a:r>
+              <a:rPr lang="en-US" sz="2400" dirty="0">
+                <a:solidFill>
+                  <a:srgbClr val="000000"/>
+                </a:solidFill>
+                <a:highlight>
+                  <a:srgbClr val="FFFFFF"/>
+                </a:highlight>
+                <a:latin typeface="Cascadia Mono" panose="020B0609020000020004" pitchFamily="49" charset="0"/>
+              </a:rPr>
+              <a:t>(</a:t>
+            </a:r>
+            <a:r>
+              <a:rPr lang="en-US" sz="2400" dirty="0">
+                <a:solidFill>
+                  <a:srgbClr val="1F377F"/>
+                </a:solidFill>
+                <a:highlight>
+                  <a:srgbClr val="FFFFFF"/>
+                </a:highlight>
+                <a:latin typeface="Cascadia Mono" panose="020B0609020000020004" pitchFamily="49" charset="0"/>
+              </a:rPr>
+              <a:t>customer</a:t>
+            </a:r>
+            <a:r>
+              <a:rPr lang="en-US" sz="2400" dirty="0">
+                <a:solidFill>
+                  <a:srgbClr val="000000"/>
+                </a:solidFill>
+                <a:highlight>
+                  <a:srgbClr val="FFFFFF"/>
+                </a:highlight>
+                <a:latin typeface="Cascadia Mono" panose="020B0609020000020004" pitchFamily="49" charset="0"/>
+              </a:rPr>
+              <a:t>);</a:t>
+            </a:r>
+          </a:p>
+          <a:p>
+            <a:endParaRPr lang="ru-RU" sz="2400" dirty="0">
+              <a:solidFill>
+                <a:srgbClr val="000000"/>
+              </a:solidFill>
+              <a:highlight>
+                <a:srgbClr val="FFFFFF"/>
+              </a:highlight>
+              <a:latin typeface="Cascadia Mono" panose="020B0609020000020004" pitchFamily="49" charset="0"/>
+            </a:endParaRPr>
+          </a:p>
+          <a:p>
+            <a:r>
+              <a:rPr lang="ru-RU" sz="2400" dirty="0">
+                <a:solidFill>
+                  <a:srgbClr val="008000"/>
+                </a:solidFill>
+                <a:highlight>
+                  <a:srgbClr val="FFFFFF"/>
+                </a:highlight>
+                <a:latin typeface="Cascadia Mono" panose="020B0609020000020004" pitchFamily="49" charset="0"/>
+              </a:rPr>
+              <a:t>// 3. Сохраняем изменения (только сейчас пойдет запрос в БД)</a:t>
+            </a:r>
+            <a:endParaRPr lang="ru-RU" sz="2400" dirty="0">
+              <a:solidFill>
+                <a:srgbClr val="000000"/>
+              </a:solidFill>
+              <a:highlight>
+                <a:srgbClr val="FFFFFF"/>
+              </a:highlight>
+              <a:latin typeface="Cascadia Mono" panose="020B0609020000020004" pitchFamily="49" charset="0"/>
+            </a:endParaRPr>
+          </a:p>
+          <a:p>
+            <a:r>
+              <a:rPr lang="en-US" sz="2400" dirty="0" err="1">
+                <a:solidFill>
+                  <a:srgbClr val="1F377F"/>
+                </a:solidFill>
+                <a:highlight>
+                  <a:srgbClr val="FFFFFF"/>
+                </a:highlight>
+                <a:latin typeface="Cascadia Mono" panose="020B0609020000020004" pitchFamily="49" charset="0"/>
+              </a:rPr>
+              <a:t>db</a:t>
+            </a:r>
+            <a:r>
+              <a:rPr lang="en-US" sz="2400" dirty="0" err="1">
+                <a:solidFill>
+                  <a:srgbClr val="000000"/>
+                </a:solidFill>
+                <a:highlight>
+                  <a:srgbClr val="FFFFFF"/>
+                </a:highlight>
+                <a:latin typeface="Cascadia Mono" panose="020B0609020000020004" pitchFamily="49" charset="0"/>
+              </a:rPr>
+              <a:t>.</a:t>
+            </a:r>
+            <a:r>
+              <a:rPr lang="en-US" sz="2400" dirty="0" err="1">
+                <a:solidFill>
+                  <a:srgbClr val="74531F"/>
+                </a:solidFill>
+                <a:highlight>
+                  <a:srgbClr val="FFFFFF"/>
+                </a:highlight>
+                <a:latin typeface="Cascadia Mono" panose="020B0609020000020004" pitchFamily="49" charset="0"/>
+              </a:rPr>
+              <a:t>SaveChanges</a:t>
+            </a:r>
+            <a:r>
+              <a:rPr lang="en-US" sz="2400" dirty="0" smtClean="0">
+                <a:solidFill>
+                  <a:srgbClr val="000000"/>
+                </a:solidFill>
+                <a:highlight>
+                  <a:srgbClr val="FFFFFF"/>
+                </a:highlight>
+                <a:latin typeface="Cascadia Mono" panose="020B0609020000020004" pitchFamily="49" charset="0"/>
+              </a:rPr>
+              <a:t>();</a:t>
+            </a:r>
+          </a:p>
+          <a:p>
+            <a:endParaRPr lang="en-US" sz="2400" dirty="0" smtClean="0">
+              <a:solidFill>
+                <a:srgbClr val="000000"/>
+              </a:solidFill>
+              <a:highlight>
+                <a:srgbClr val="FFFFFF"/>
+              </a:highlight>
+              <a:latin typeface="Cascadia Mono" panose="020B0609020000020004" pitchFamily="49" charset="0"/>
+            </a:endParaRPr>
+          </a:p>
+          <a:p>
+            <a:pPr>
+              <a:lnSpc>
+                <a:spcPct val="150000"/>
+              </a:lnSpc>
+            </a:pPr>
+            <a:r>
+              <a:rPr lang="ru-RU" sz="2400" b="1" dirty="0" smtClean="0"/>
+              <a:t>Важно</a:t>
+            </a:r>
+            <a:r>
+              <a:rPr lang="ru-RU" sz="2400" b="1" dirty="0"/>
+              <a:t>:</a:t>
+            </a:r>
+            <a:r>
+              <a:rPr lang="ru-RU" sz="2400" dirty="0"/>
+              <a:t> Пока вы не вызвали </a:t>
+            </a:r>
+            <a:r>
+              <a:rPr lang="ru-RU" sz="2400" dirty="0" err="1"/>
+              <a:t>SaveChanges</a:t>
+            </a:r>
+            <a:r>
+              <a:rPr lang="ru-RU" sz="2400" dirty="0"/>
+              <a:t>(), данные живут только в оперативной памяти программы</a:t>
+            </a:r>
+            <a:r>
+              <a:rPr lang="ru-RU" sz="2400" dirty="0" smtClean="0"/>
+              <a:t>.</a:t>
+            </a:r>
+            <a:endParaRPr lang="ru-RU" sz="2400" dirty="0"/>
+          </a:p>
+        </p:txBody>
+      </p:sp>
+    </p:spTree>
+    <p:extLst>
+      <p:ext uri="{BB962C8B-B14F-4D97-AF65-F5344CB8AC3E}">
+        <p14:creationId xmlns:p14="http://schemas.microsoft.com/office/powerpoint/2010/main" val="4212945820"/>
+      </p:ext>
+    </p:extLst>
+  </p:cSld>
+  <p:clrMapOvr>
+    <a:masterClrMapping/>
+  </p:clrMapOvr>
+  <p:timing>
+    <p:tnLst>
+      <p:par>
+        <p:cTn id="1" dur="indefinite" restart="never" nodeType="tmRoot"/>
+      </p:par>
+    </p:tnLst>
+  </p:timing>
+</p:sld>
+</file>
+
+<file path=ppt/slides/slide25.xml><?xml version="1.0" encoding="utf-8"?>
+<p:sld xmlns:a="http://schemas.openxmlformats.org/drawingml/2006/main" xmlns:r="http://schemas.openxmlformats.org/officeDocument/2006/relationships" xmlns:p="http://schemas.openxmlformats.org/presentationml/2006/main">
+  <p:cSld>
+    <p:spTree>
+      <p:nvGrpSpPr>
+        <p:cNvPr id="1" name=""/>
+        <p:cNvGrpSpPr/>
+        <p:nvPr/>
+      </p:nvGrpSpPr>
+      <p:grpSpPr>
+        <a:xfrm>
+          <a:off x="0" y="0"/>
+          <a:ext cx="0" cy="0"/>
+          <a:chOff x="0" y="0"/>
+          <a:chExt cx="0" cy="0"/>
+        </a:xfrm>
+      </p:grpSpPr>
+      <p:sp>
+        <p:nvSpPr>
+          <p:cNvPr id="7" name="Прямоугольник 6"/>
+          <p:cNvSpPr/>
+          <p:nvPr/>
+        </p:nvSpPr>
+        <p:spPr>
+          <a:xfrm>
+            <a:off x="0" y="0"/>
+            <a:ext cx="12192000" cy="6740307"/>
+          </a:xfrm>
+          <a:prstGeom prst="rect">
+            <a:avLst/>
+          </a:prstGeom>
+        </p:spPr>
+        <p:txBody>
+          <a:bodyPr wrap="square" lIns="360000" rIns="360000">
+            <a:spAutoFit/>
+          </a:bodyPr>
+          <a:lstStyle/>
+          <a:p>
+            <a:pPr>
+              <a:lnSpc>
+                <a:spcPct val="150000"/>
+              </a:lnSpc>
+            </a:pPr>
+            <a:r>
+              <a:rPr lang="ru-RU" sz="2400" dirty="0"/>
+              <a:t>Самая мощная часть EF </a:t>
+            </a:r>
+            <a:r>
+              <a:rPr lang="ru-RU" sz="2400" dirty="0" err="1"/>
+              <a:t>Core</a:t>
+            </a:r>
+            <a:r>
+              <a:rPr lang="ru-RU" sz="2400" dirty="0"/>
+              <a:t>. Мы </a:t>
+            </a:r>
+            <a:r>
+              <a:rPr lang="ru-RU" sz="2400" dirty="0" smtClean="0"/>
+              <a:t>пишем </a:t>
+            </a:r>
+            <a:r>
+              <a:rPr lang="ru-RU" sz="2400" dirty="0"/>
+              <a:t>фильтры на C#, а ORM превращает их в эффективный SQL</a:t>
+            </a:r>
+            <a:r>
+              <a:rPr lang="ru-RU" sz="2400" dirty="0" smtClean="0"/>
+              <a:t>.</a:t>
+            </a:r>
+            <a:endParaRPr lang="en-US" sz="2400" dirty="0" smtClean="0"/>
+          </a:p>
+          <a:p>
+            <a:r>
+              <a:rPr lang="ru-RU" sz="2400" dirty="0">
+                <a:solidFill>
+                  <a:srgbClr val="008000"/>
+                </a:solidFill>
+                <a:highlight>
+                  <a:srgbClr val="FFFFFF"/>
+                </a:highlight>
+                <a:latin typeface="Cascadia Mono" panose="020B0609020000020004" pitchFamily="49" charset="0"/>
+              </a:rPr>
+              <a:t>// Поиск всех "молодых" (младше 30)</a:t>
+            </a:r>
+            <a:endParaRPr lang="ru-RU" sz="2400" dirty="0">
+              <a:solidFill>
+                <a:srgbClr val="000000"/>
+              </a:solidFill>
+              <a:highlight>
+                <a:srgbClr val="FFFFFF"/>
+              </a:highlight>
+              <a:latin typeface="Cascadia Mono" panose="020B0609020000020004" pitchFamily="49" charset="0"/>
+            </a:endParaRPr>
+          </a:p>
+          <a:p>
+            <a:r>
+              <a:rPr lang="en-US" sz="2400" dirty="0" err="1">
+                <a:solidFill>
+                  <a:srgbClr val="0000FF"/>
+                </a:solidFill>
+                <a:highlight>
+                  <a:srgbClr val="FFFFFF"/>
+                </a:highlight>
+                <a:latin typeface="Cascadia Mono" panose="020B0609020000020004" pitchFamily="49" charset="0"/>
+              </a:rPr>
+              <a:t>var</a:t>
+            </a:r>
+            <a:r>
+              <a:rPr lang="en-US" sz="2400" dirty="0">
+                <a:solidFill>
+                  <a:srgbClr val="000000"/>
+                </a:solidFill>
+                <a:highlight>
+                  <a:srgbClr val="FFFFFF"/>
+                </a:highlight>
+                <a:latin typeface="Cascadia Mono" panose="020B0609020000020004" pitchFamily="49" charset="0"/>
+              </a:rPr>
+              <a:t> </a:t>
+            </a:r>
+            <a:r>
+              <a:rPr lang="en-US" sz="2400" dirty="0" err="1">
+                <a:solidFill>
+                  <a:srgbClr val="1F377F"/>
+                </a:solidFill>
+                <a:highlight>
+                  <a:srgbClr val="FFFFFF"/>
+                </a:highlight>
+                <a:latin typeface="Cascadia Mono" panose="020B0609020000020004" pitchFamily="49" charset="0"/>
+              </a:rPr>
+              <a:t>youngOnes</a:t>
+            </a:r>
+            <a:r>
+              <a:rPr lang="en-US" sz="2400" dirty="0">
+                <a:solidFill>
+                  <a:srgbClr val="000000"/>
+                </a:solidFill>
+                <a:highlight>
+                  <a:srgbClr val="FFFFFF"/>
+                </a:highlight>
+                <a:latin typeface="Cascadia Mono" panose="020B0609020000020004" pitchFamily="49" charset="0"/>
+              </a:rPr>
+              <a:t> = </a:t>
+            </a:r>
+            <a:r>
+              <a:rPr lang="en-US" sz="2400" dirty="0" err="1">
+                <a:solidFill>
+                  <a:srgbClr val="1F377F"/>
+                </a:solidFill>
+                <a:highlight>
+                  <a:srgbClr val="FFFFFF"/>
+                </a:highlight>
+                <a:latin typeface="Cascadia Mono" panose="020B0609020000020004" pitchFamily="49" charset="0"/>
+              </a:rPr>
+              <a:t>db</a:t>
+            </a:r>
+            <a:r>
+              <a:rPr lang="en-US" sz="2400" dirty="0" err="1">
+                <a:solidFill>
+                  <a:srgbClr val="000000"/>
+                </a:solidFill>
+                <a:highlight>
+                  <a:srgbClr val="FFFFFF"/>
+                </a:highlight>
+                <a:latin typeface="Cascadia Mono" panose="020B0609020000020004" pitchFamily="49" charset="0"/>
+              </a:rPr>
+              <a:t>.Customers</a:t>
+            </a:r>
+            <a:endParaRPr lang="en-US" sz="2400" dirty="0">
+              <a:solidFill>
+                <a:srgbClr val="000000"/>
+              </a:solidFill>
+              <a:highlight>
+                <a:srgbClr val="FFFFFF"/>
+              </a:highlight>
+              <a:latin typeface="Cascadia Mono" panose="020B0609020000020004" pitchFamily="49" charset="0"/>
+            </a:endParaRPr>
+          </a:p>
+          <a:p>
+            <a:r>
+              <a:rPr lang="en-US" sz="2400" dirty="0">
+                <a:solidFill>
+                  <a:srgbClr val="000000"/>
+                </a:solidFill>
+                <a:highlight>
+                  <a:srgbClr val="FFFFFF"/>
+                </a:highlight>
+                <a:latin typeface="Cascadia Mono" panose="020B0609020000020004" pitchFamily="49" charset="0"/>
+              </a:rPr>
+              <a:t>    .</a:t>
+            </a:r>
+            <a:r>
+              <a:rPr lang="en-US" sz="2400" dirty="0">
+                <a:solidFill>
+                  <a:srgbClr val="74531F"/>
+                </a:solidFill>
+                <a:highlight>
+                  <a:srgbClr val="FFFFFF"/>
+                </a:highlight>
+                <a:latin typeface="Cascadia Mono" panose="020B0609020000020004" pitchFamily="49" charset="0"/>
+              </a:rPr>
+              <a:t>Where</a:t>
+            </a:r>
+            <a:r>
+              <a:rPr lang="en-US" sz="2400" dirty="0">
+                <a:solidFill>
+                  <a:srgbClr val="000000"/>
+                </a:solidFill>
+                <a:highlight>
+                  <a:srgbClr val="FFFFFF"/>
+                </a:highlight>
+                <a:latin typeface="Cascadia Mono" panose="020B0609020000020004" pitchFamily="49" charset="0"/>
+              </a:rPr>
+              <a:t>(</a:t>
+            </a:r>
+            <a:r>
+              <a:rPr lang="en-US" sz="2400" dirty="0">
+                <a:solidFill>
+                  <a:srgbClr val="1F377F"/>
+                </a:solidFill>
+                <a:highlight>
+                  <a:srgbClr val="FFFFFF"/>
+                </a:highlight>
+                <a:latin typeface="Cascadia Mono" panose="020B0609020000020004" pitchFamily="49" charset="0"/>
+              </a:rPr>
+              <a:t>c</a:t>
+            </a:r>
+            <a:r>
+              <a:rPr lang="en-US" sz="2400" dirty="0">
+                <a:solidFill>
+                  <a:srgbClr val="000000"/>
+                </a:solidFill>
+                <a:highlight>
+                  <a:srgbClr val="FFFFFF"/>
+                </a:highlight>
+                <a:latin typeface="Cascadia Mono" panose="020B0609020000020004" pitchFamily="49" charset="0"/>
+              </a:rPr>
+              <a:t> =&gt; </a:t>
+            </a:r>
+            <a:r>
+              <a:rPr lang="en-US" sz="2400" dirty="0" err="1">
+                <a:solidFill>
+                  <a:srgbClr val="1F377F"/>
+                </a:solidFill>
+                <a:highlight>
+                  <a:srgbClr val="FFFFFF"/>
+                </a:highlight>
+                <a:latin typeface="Cascadia Mono" panose="020B0609020000020004" pitchFamily="49" charset="0"/>
+              </a:rPr>
+              <a:t>c</a:t>
+            </a:r>
+            <a:r>
+              <a:rPr lang="en-US" sz="2400" dirty="0" err="1">
+                <a:solidFill>
+                  <a:srgbClr val="000000"/>
+                </a:solidFill>
+                <a:highlight>
+                  <a:srgbClr val="FFFFFF"/>
+                </a:highlight>
+                <a:latin typeface="Cascadia Mono" panose="020B0609020000020004" pitchFamily="49" charset="0"/>
+              </a:rPr>
+              <a:t>.Age</a:t>
+            </a:r>
+            <a:r>
+              <a:rPr lang="en-US" sz="2400" dirty="0">
+                <a:solidFill>
+                  <a:srgbClr val="000000"/>
+                </a:solidFill>
+                <a:highlight>
+                  <a:srgbClr val="FFFFFF"/>
+                </a:highlight>
+                <a:latin typeface="Cascadia Mono" panose="020B0609020000020004" pitchFamily="49" charset="0"/>
+              </a:rPr>
+              <a:t> &lt; 30)</a:t>
+            </a:r>
+          </a:p>
+          <a:p>
+            <a:r>
+              <a:rPr lang="en-US" sz="2400" dirty="0">
+                <a:solidFill>
+                  <a:srgbClr val="000000"/>
+                </a:solidFill>
+                <a:highlight>
+                  <a:srgbClr val="FFFFFF"/>
+                </a:highlight>
+                <a:latin typeface="Cascadia Mono" panose="020B0609020000020004" pitchFamily="49" charset="0"/>
+              </a:rPr>
+              <a:t>    .</a:t>
+            </a:r>
+            <a:r>
+              <a:rPr lang="en-US" sz="2400" dirty="0" err="1">
+                <a:solidFill>
+                  <a:srgbClr val="74531F"/>
+                </a:solidFill>
+                <a:highlight>
+                  <a:srgbClr val="FFFFFF"/>
+                </a:highlight>
+                <a:latin typeface="Cascadia Mono" panose="020B0609020000020004" pitchFamily="49" charset="0"/>
+              </a:rPr>
+              <a:t>OrderBy</a:t>
+            </a:r>
+            <a:r>
+              <a:rPr lang="en-US" sz="2400" dirty="0">
+                <a:solidFill>
+                  <a:srgbClr val="000000"/>
+                </a:solidFill>
+                <a:highlight>
+                  <a:srgbClr val="FFFFFF"/>
+                </a:highlight>
+                <a:latin typeface="Cascadia Mono" panose="020B0609020000020004" pitchFamily="49" charset="0"/>
+              </a:rPr>
+              <a:t>(</a:t>
+            </a:r>
+            <a:r>
+              <a:rPr lang="en-US" sz="2400" dirty="0">
+                <a:solidFill>
+                  <a:srgbClr val="1F377F"/>
+                </a:solidFill>
+                <a:highlight>
+                  <a:srgbClr val="FFFFFF"/>
+                </a:highlight>
+                <a:latin typeface="Cascadia Mono" panose="020B0609020000020004" pitchFamily="49" charset="0"/>
+              </a:rPr>
+              <a:t>c</a:t>
+            </a:r>
+            <a:r>
+              <a:rPr lang="en-US" sz="2400" dirty="0">
+                <a:solidFill>
+                  <a:srgbClr val="000000"/>
+                </a:solidFill>
+                <a:highlight>
+                  <a:srgbClr val="FFFFFF"/>
+                </a:highlight>
+                <a:latin typeface="Cascadia Mono" panose="020B0609020000020004" pitchFamily="49" charset="0"/>
+              </a:rPr>
+              <a:t> =&gt; </a:t>
+            </a:r>
+            <a:r>
+              <a:rPr lang="en-US" sz="2400" dirty="0" err="1">
+                <a:solidFill>
+                  <a:srgbClr val="1F377F"/>
+                </a:solidFill>
+                <a:highlight>
+                  <a:srgbClr val="FFFFFF"/>
+                </a:highlight>
+                <a:latin typeface="Cascadia Mono" panose="020B0609020000020004" pitchFamily="49" charset="0"/>
+              </a:rPr>
+              <a:t>c</a:t>
+            </a:r>
+            <a:r>
+              <a:rPr lang="en-US" sz="2400" dirty="0" err="1">
+                <a:solidFill>
+                  <a:srgbClr val="000000"/>
+                </a:solidFill>
+                <a:highlight>
+                  <a:srgbClr val="FFFFFF"/>
+                </a:highlight>
+                <a:latin typeface="Cascadia Mono" panose="020B0609020000020004" pitchFamily="49" charset="0"/>
+              </a:rPr>
+              <a:t>.Name</a:t>
+            </a:r>
+            <a:r>
+              <a:rPr lang="en-US" sz="2400" dirty="0">
+                <a:solidFill>
+                  <a:srgbClr val="000000"/>
+                </a:solidFill>
+                <a:highlight>
+                  <a:srgbClr val="FFFFFF"/>
+                </a:highlight>
+                <a:latin typeface="Cascadia Mono" panose="020B0609020000020004" pitchFamily="49" charset="0"/>
+              </a:rPr>
+              <a:t>)</a:t>
+            </a:r>
+          </a:p>
+          <a:p>
+            <a:r>
+              <a:rPr lang="en-US" sz="2400" dirty="0">
+                <a:solidFill>
+                  <a:srgbClr val="000000"/>
+                </a:solidFill>
+                <a:highlight>
+                  <a:srgbClr val="FFFFFF"/>
+                </a:highlight>
+                <a:latin typeface="Cascadia Mono" panose="020B0609020000020004" pitchFamily="49" charset="0"/>
+              </a:rPr>
+              <a:t>    .</a:t>
+            </a:r>
+            <a:r>
+              <a:rPr lang="en-US" sz="2400" dirty="0" err="1">
+                <a:solidFill>
+                  <a:srgbClr val="74531F"/>
+                </a:solidFill>
+                <a:highlight>
+                  <a:srgbClr val="FFFFFF"/>
+                </a:highlight>
+                <a:latin typeface="Cascadia Mono" panose="020B0609020000020004" pitchFamily="49" charset="0"/>
+              </a:rPr>
+              <a:t>ToList</a:t>
+            </a:r>
+            <a:r>
+              <a:rPr lang="en-US" sz="2400" dirty="0">
+                <a:solidFill>
+                  <a:srgbClr val="000000"/>
+                </a:solidFill>
+                <a:highlight>
+                  <a:srgbClr val="FFFFFF"/>
+                </a:highlight>
+                <a:latin typeface="Cascadia Mono" panose="020B0609020000020004" pitchFamily="49" charset="0"/>
+              </a:rPr>
+              <a:t>();</a:t>
+            </a:r>
+          </a:p>
+          <a:p>
+            <a:endParaRPr lang="ru-RU" sz="2400" dirty="0">
+              <a:solidFill>
+                <a:srgbClr val="000000"/>
+              </a:solidFill>
+              <a:highlight>
+                <a:srgbClr val="FFFFFF"/>
+              </a:highlight>
+              <a:latin typeface="Cascadia Mono" panose="020B0609020000020004" pitchFamily="49" charset="0"/>
+            </a:endParaRPr>
+          </a:p>
+          <a:p>
+            <a:r>
+              <a:rPr lang="ru-RU" sz="2400" dirty="0">
+                <a:solidFill>
+                  <a:srgbClr val="008000"/>
+                </a:solidFill>
+                <a:highlight>
+                  <a:srgbClr val="FFFFFF"/>
+                </a:highlight>
+                <a:latin typeface="Cascadia Mono" panose="020B0609020000020004" pitchFamily="49" charset="0"/>
+              </a:rPr>
+              <a:t>// Поиск конкретного объекта по ID</a:t>
+            </a:r>
+            <a:endParaRPr lang="ru-RU" sz="2400" dirty="0">
+              <a:solidFill>
+                <a:srgbClr val="000000"/>
+              </a:solidFill>
+              <a:highlight>
+                <a:srgbClr val="FFFFFF"/>
+              </a:highlight>
+              <a:latin typeface="Cascadia Mono" panose="020B0609020000020004" pitchFamily="49" charset="0"/>
+            </a:endParaRPr>
+          </a:p>
+          <a:p>
+            <a:r>
+              <a:rPr lang="en-US" sz="2400" dirty="0" err="1">
+                <a:solidFill>
+                  <a:srgbClr val="0000FF"/>
+                </a:solidFill>
+                <a:highlight>
+                  <a:srgbClr val="FFFFFF"/>
+                </a:highlight>
+                <a:latin typeface="Cascadia Mono" panose="020B0609020000020004" pitchFamily="49" charset="0"/>
+              </a:rPr>
+              <a:t>var</a:t>
+            </a:r>
+            <a:r>
+              <a:rPr lang="en-US" sz="2400" dirty="0">
+                <a:solidFill>
+                  <a:srgbClr val="000000"/>
+                </a:solidFill>
+                <a:highlight>
+                  <a:srgbClr val="FFFFFF"/>
+                </a:highlight>
+                <a:latin typeface="Cascadia Mono" panose="020B0609020000020004" pitchFamily="49" charset="0"/>
+              </a:rPr>
+              <a:t> </a:t>
+            </a:r>
+            <a:r>
+              <a:rPr lang="en-US" sz="2400" dirty="0">
+                <a:solidFill>
+                  <a:srgbClr val="1F377F"/>
+                </a:solidFill>
+                <a:highlight>
+                  <a:srgbClr val="FFFFFF"/>
+                </a:highlight>
+                <a:latin typeface="Cascadia Mono" panose="020B0609020000020004" pitchFamily="49" charset="0"/>
+              </a:rPr>
+              <a:t>user</a:t>
+            </a:r>
+            <a:r>
+              <a:rPr lang="en-US" sz="2400" dirty="0">
+                <a:solidFill>
+                  <a:srgbClr val="000000"/>
+                </a:solidFill>
+                <a:highlight>
+                  <a:srgbClr val="FFFFFF"/>
+                </a:highlight>
+                <a:latin typeface="Cascadia Mono" panose="020B0609020000020004" pitchFamily="49" charset="0"/>
+              </a:rPr>
+              <a:t> = </a:t>
+            </a:r>
+            <a:r>
+              <a:rPr lang="en-US" sz="2400" dirty="0" err="1">
+                <a:solidFill>
+                  <a:srgbClr val="1F377F"/>
+                </a:solidFill>
+                <a:highlight>
+                  <a:srgbClr val="FFFFFF"/>
+                </a:highlight>
+                <a:latin typeface="Cascadia Mono" panose="020B0609020000020004" pitchFamily="49" charset="0"/>
+              </a:rPr>
+              <a:t>db</a:t>
+            </a:r>
+            <a:r>
+              <a:rPr lang="en-US" sz="2400" dirty="0" err="1">
+                <a:solidFill>
+                  <a:srgbClr val="000000"/>
+                </a:solidFill>
+                <a:highlight>
+                  <a:srgbClr val="FFFFFF"/>
+                </a:highlight>
+                <a:latin typeface="Cascadia Mono" panose="020B0609020000020004" pitchFamily="49" charset="0"/>
+              </a:rPr>
+              <a:t>.Customers.</a:t>
+            </a:r>
+            <a:r>
+              <a:rPr lang="en-US" sz="2400" dirty="0" err="1">
+                <a:solidFill>
+                  <a:srgbClr val="74531F"/>
+                </a:solidFill>
+                <a:highlight>
+                  <a:srgbClr val="FFFFFF"/>
+                </a:highlight>
+                <a:latin typeface="Cascadia Mono" panose="020B0609020000020004" pitchFamily="49" charset="0"/>
+              </a:rPr>
+              <a:t>FirstOrDefault</a:t>
+            </a:r>
+            <a:r>
+              <a:rPr lang="en-US" sz="2400" dirty="0">
+                <a:solidFill>
+                  <a:srgbClr val="000000"/>
+                </a:solidFill>
+                <a:highlight>
+                  <a:srgbClr val="FFFFFF"/>
+                </a:highlight>
+                <a:latin typeface="Cascadia Mono" panose="020B0609020000020004" pitchFamily="49" charset="0"/>
+              </a:rPr>
+              <a:t>(</a:t>
+            </a:r>
+            <a:r>
+              <a:rPr lang="en-US" sz="2400" dirty="0">
+                <a:solidFill>
+                  <a:srgbClr val="1F377F"/>
+                </a:solidFill>
+                <a:highlight>
+                  <a:srgbClr val="FFFFFF"/>
+                </a:highlight>
+                <a:latin typeface="Cascadia Mono" panose="020B0609020000020004" pitchFamily="49" charset="0"/>
+              </a:rPr>
+              <a:t>c</a:t>
+            </a:r>
+            <a:r>
+              <a:rPr lang="en-US" sz="2400" dirty="0">
+                <a:solidFill>
+                  <a:srgbClr val="000000"/>
+                </a:solidFill>
+                <a:highlight>
+                  <a:srgbClr val="FFFFFF"/>
+                </a:highlight>
+                <a:latin typeface="Cascadia Mono" panose="020B0609020000020004" pitchFamily="49" charset="0"/>
+              </a:rPr>
+              <a:t> =&gt; </a:t>
+            </a:r>
+            <a:r>
+              <a:rPr lang="en-US" sz="2400" dirty="0" err="1">
+                <a:solidFill>
+                  <a:srgbClr val="1F377F"/>
+                </a:solidFill>
+                <a:highlight>
+                  <a:srgbClr val="FFFFFF"/>
+                </a:highlight>
+                <a:latin typeface="Cascadia Mono" panose="020B0609020000020004" pitchFamily="49" charset="0"/>
+              </a:rPr>
+              <a:t>c</a:t>
+            </a:r>
+            <a:r>
+              <a:rPr lang="en-US" sz="2400" dirty="0" err="1">
+                <a:solidFill>
+                  <a:srgbClr val="000000"/>
+                </a:solidFill>
+                <a:highlight>
+                  <a:srgbClr val="FFFFFF"/>
+                </a:highlight>
+                <a:latin typeface="Cascadia Mono" panose="020B0609020000020004" pitchFamily="49" charset="0"/>
+              </a:rPr>
+              <a:t>.Id</a:t>
+            </a:r>
+            <a:r>
+              <a:rPr lang="en-US" sz="2400" dirty="0">
+                <a:solidFill>
+                  <a:srgbClr val="000000"/>
+                </a:solidFill>
+                <a:highlight>
+                  <a:srgbClr val="FFFFFF"/>
+                </a:highlight>
+                <a:latin typeface="Cascadia Mono" panose="020B0609020000020004" pitchFamily="49" charset="0"/>
+              </a:rPr>
+              <a:t> == 5</a:t>
+            </a:r>
+            <a:r>
+              <a:rPr lang="en-US" sz="2400" dirty="0" smtClean="0">
+                <a:solidFill>
+                  <a:srgbClr val="000000"/>
+                </a:solidFill>
+                <a:highlight>
+                  <a:srgbClr val="FFFFFF"/>
+                </a:highlight>
+                <a:latin typeface="Cascadia Mono" panose="020B0609020000020004" pitchFamily="49" charset="0"/>
+              </a:rPr>
+              <a:t>);</a:t>
+            </a:r>
+            <a:endParaRPr lang="ru-RU" sz="2400" dirty="0" smtClean="0">
+              <a:solidFill>
+                <a:srgbClr val="000000"/>
+              </a:solidFill>
+              <a:highlight>
+                <a:srgbClr val="FFFFFF"/>
+              </a:highlight>
+              <a:latin typeface="Cascadia Mono" panose="020B0609020000020004" pitchFamily="49" charset="0"/>
+            </a:endParaRPr>
+          </a:p>
+          <a:p>
+            <a:endParaRPr lang="ru-RU" sz="2400" dirty="0" smtClean="0">
+              <a:solidFill>
+                <a:srgbClr val="000000"/>
+              </a:solidFill>
+              <a:highlight>
+                <a:srgbClr val="FFFFFF"/>
+              </a:highlight>
+              <a:latin typeface="Cascadia Mono" panose="020B0609020000020004" pitchFamily="49" charset="0"/>
+            </a:endParaRPr>
+          </a:p>
+          <a:p>
+            <a:pPr>
+              <a:lnSpc>
+                <a:spcPct val="150000"/>
+              </a:lnSpc>
+            </a:pPr>
+            <a:r>
+              <a:rPr lang="ru-RU" sz="2400" b="1" dirty="0"/>
+              <a:t>Основные методы:</a:t>
+            </a:r>
+            <a:endParaRPr lang="ru-RU" sz="2400" dirty="0"/>
+          </a:p>
+          <a:p>
+            <a:pPr>
+              <a:lnSpc>
+                <a:spcPct val="150000"/>
+              </a:lnSpc>
+            </a:pPr>
+            <a:r>
+              <a:rPr lang="ru-RU" sz="2400" dirty="0" err="1"/>
+              <a:t>Where</a:t>
+            </a:r>
+            <a:r>
+              <a:rPr lang="ru-RU" sz="2400" dirty="0"/>
+              <a:t> — фильтрация.</a:t>
+            </a:r>
+          </a:p>
+          <a:p>
+            <a:pPr>
+              <a:lnSpc>
+                <a:spcPct val="150000"/>
+              </a:lnSpc>
+            </a:pPr>
+            <a:r>
+              <a:rPr lang="ru-RU" sz="2400" dirty="0" err="1"/>
+              <a:t>OrderBy</a:t>
+            </a:r>
+            <a:r>
+              <a:rPr lang="ru-RU" sz="2400" dirty="0"/>
+              <a:t> / </a:t>
+            </a:r>
+            <a:r>
+              <a:rPr lang="ru-RU" sz="2400" dirty="0" err="1"/>
+              <a:t>OrderByDescending</a:t>
+            </a:r>
+            <a:r>
+              <a:rPr lang="ru-RU" sz="2400" dirty="0"/>
+              <a:t> — сортировка.</a:t>
+            </a:r>
+          </a:p>
+          <a:p>
+            <a:pPr>
+              <a:lnSpc>
+                <a:spcPct val="150000"/>
+              </a:lnSpc>
+            </a:pPr>
+            <a:r>
+              <a:rPr lang="ru-RU" sz="2400" dirty="0" err="1"/>
+              <a:t>Select</a:t>
+            </a:r>
+            <a:r>
+              <a:rPr lang="ru-RU" sz="2400" dirty="0"/>
+              <a:t> — выбор только нужных колонок (проекция</a:t>
+            </a:r>
+            <a:r>
+              <a:rPr lang="ru-RU" sz="2400" dirty="0" smtClean="0"/>
+              <a:t>).</a:t>
+            </a:r>
+            <a:endParaRPr lang="ru-RU" sz="2400" dirty="0"/>
+          </a:p>
+        </p:txBody>
+      </p:sp>
+    </p:spTree>
+    <p:extLst>
+      <p:ext uri="{BB962C8B-B14F-4D97-AF65-F5344CB8AC3E}">
+        <p14:creationId xmlns:p14="http://schemas.microsoft.com/office/powerpoint/2010/main" val="2497642828"/>
+      </p:ext>
+    </p:extLst>
+  </p:cSld>
+  <p:clrMapOvr>
+    <a:masterClrMapping/>
+  </p:clrMapOvr>
+  <p:timing>
+    <p:tnLst>
+      <p:par>
+        <p:cTn id="1" dur="indefinite" restart="never" nodeType="tmRoot"/>
+      </p:par>
+    </p:tnLst>
+  </p:timing>
+</p:sld>
+</file>
+
+<file path=ppt/slides/slide26.xml><?xml version="1.0" encoding="utf-8"?>
+<p:sld xmlns:a="http://schemas.openxmlformats.org/drawingml/2006/main" xmlns:r="http://schemas.openxmlformats.org/officeDocument/2006/relationships" xmlns:p="http://schemas.openxmlformats.org/presentationml/2006/main">
+  <p:cSld>
+    <p:spTree>
+      <p:nvGrpSpPr>
+        <p:cNvPr id="1" name=""/>
+        <p:cNvGrpSpPr/>
+        <p:nvPr/>
+      </p:nvGrpSpPr>
+      <p:grpSpPr>
+        <a:xfrm>
+          <a:off x="0" y="0"/>
+          <a:ext cx="0" cy="0"/>
+          <a:chOff x="0" y="0"/>
+          <a:chExt cx="0" cy="0"/>
+        </a:xfrm>
+      </p:grpSpPr>
+      <p:sp>
+        <p:nvSpPr>
+          <p:cNvPr id="7" name="Прямоугольник 6"/>
+          <p:cNvSpPr/>
+          <p:nvPr/>
+        </p:nvSpPr>
+        <p:spPr>
+          <a:xfrm>
+            <a:off x="0" y="0"/>
+            <a:ext cx="12192000" cy="3416320"/>
+          </a:xfrm>
+          <a:prstGeom prst="rect">
+            <a:avLst/>
+          </a:prstGeom>
+        </p:spPr>
+        <p:txBody>
+          <a:bodyPr wrap="square" lIns="360000" rIns="360000">
+            <a:spAutoFit/>
+          </a:bodyPr>
+          <a:lstStyle/>
+          <a:p>
+            <a:pPr>
+              <a:lnSpc>
+                <a:spcPct val="150000"/>
+              </a:lnSpc>
+            </a:pPr>
+            <a:r>
+              <a:rPr lang="ru-RU" sz="2400" dirty="0"/>
+              <a:t>В EF </a:t>
+            </a:r>
+            <a:r>
+              <a:rPr lang="ru-RU" sz="2400" dirty="0" err="1"/>
+              <a:t>Core</a:t>
+            </a:r>
+            <a:r>
+              <a:rPr lang="ru-RU" sz="2400" dirty="0"/>
+              <a:t> есть два способа обновить данные:</a:t>
+            </a:r>
+          </a:p>
+          <a:p>
+            <a:pPr marL="457200" indent="-457200">
+              <a:lnSpc>
+                <a:spcPct val="150000"/>
+              </a:lnSpc>
+              <a:buFont typeface="+mj-lt"/>
+              <a:buAutoNum type="arabicPeriod"/>
+            </a:pPr>
+            <a:r>
+              <a:rPr lang="ru-RU" sz="2400" b="1" dirty="0"/>
+              <a:t>Классический (через трекинг):</a:t>
+            </a:r>
+            <a:r>
+              <a:rPr lang="ru-RU" sz="2400" dirty="0"/>
+              <a:t/>
+            </a:r>
+            <a:br>
+              <a:rPr lang="ru-RU" sz="2400" dirty="0"/>
+            </a:br>
+            <a:r>
+              <a:rPr lang="ru-RU" sz="2400" dirty="0"/>
+              <a:t>Находим объект -&gt; меняем свойство -&gt; вызываем </a:t>
+            </a:r>
+            <a:r>
+              <a:rPr lang="ru-RU" sz="2400" dirty="0" err="1"/>
+              <a:t>SaveChanges</a:t>
+            </a:r>
+            <a:r>
+              <a:rPr lang="ru-RU" sz="2400" dirty="0" smtClean="0"/>
+              <a:t>().</a:t>
+            </a:r>
+          </a:p>
+          <a:p>
+            <a:pPr>
+              <a:lnSpc>
+                <a:spcPct val="150000"/>
+              </a:lnSpc>
+            </a:pPr>
+            <a:endParaRPr lang="ru-RU" sz="2400" dirty="0" smtClean="0"/>
+          </a:p>
+          <a:p>
+            <a:r>
+              <a:rPr lang="en-US" sz="2400" dirty="0" err="1">
+                <a:solidFill>
+                  <a:srgbClr val="0000FF"/>
+                </a:solidFill>
+                <a:highlight>
+                  <a:srgbClr val="FFFFFF"/>
+                </a:highlight>
+                <a:latin typeface="Cascadia Mono" panose="020B0609020000020004" pitchFamily="49" charset="0"/>
+              </a:rPr>
+              <a:t>var</a:t>
+            </a:r>
+            <a:r>
+              <a:rPr lang="en-US" sz="2400" dirty="0">
+                <a:solidFill>
+                  <a:srgbClr val="000000"/>
+                </a:solidFill>
+                <a:highlight>
+                  <a:srgbClr val="FFFFFF"/>
+                </a:highlight>
+                <a:latin typeface="Cascadia Mono" panose="020B0609020000020004" pitchFamily="49" charset="0"/>
+              </a:rPr>
+              <a:t> </a:t>
+            </a:r>
+            <a:r>
+              <a:rPr lang="en-US" sz="2400" dirty="0">
+                <a:solidFill>
+                  <a:srgbClr val="1F377F"/>
+                </a:solidFill>
+                <a:highlight>
+                  <a:srgbClr val="FFFFFF"/>
+                </a:highlight>
+                <a:latin typeface="Cascadia Mono" panose="020B0609020000020004" pitchFamily="49" charset="0"/>
+              </a:rPr>
+              <a:t>user</a:t>
+            </a:r>
+            <a:r>
+              <a:rPr lang="en-US" sz="2400" dirty="0">
+                <a:solidFill>
+                  <a:srgbClr val="000000"/>
+                </a:solidFill>
+                <a:highlight>
+                  <a:srgbClr val="FFFFFF"/>
+                </a:highlight>
+                <a:latin typeface="Cascadia Mono" panose="020B0609020000020004" pitchFamily="49" charset="0"/>
+              </a:rPr>
+              <a:t> = </a:t>
+            </a:r>
+            <a:r>
+              <a:rPr lang="en-US" sz="2400" dirty="0" err="1">
+                <a:solidFill>
+                  <a:srgbClr val="1F377F"/>
+                </a:solidFill>
+                <a:highlight>
+                  <a:srgbClr val="FFFFFF"/>
+                </a:highlight>
+                <a:latin typeface="Cascadia Mono" panose="020B0609020000020004" pitchFamily="49" charset="0"/>
+              </a:rPr>
+              <a:t>db</a:t>
+            </a:r>
+            <a:r>
+              <a:rPr lang="en-US" sz="2400" dirty="0" err="1">
+                <a:solidFill>
+                  <a:srgbClr val="000000"/>
+                </a:solidFill>
+                <a:highlight>
+                  <a:srgbClr val="FFFFFF"/>
+                </a:highlight>
+                <a:latin typeface="Cascadia Mono" panose="020B0609020000020004" pitchFamily="49" charset="0"/>
+              </a:rPr>
+              <a:t>.Customers.</a:t>
+            </a:r>
+            <a:r>
+              <a:rPr lang="en-US" sz="2400" dirty="0" err="1">
+                <a:solidFill>
+                  <a:srgbClr val="74531F"/>
+                </a:solidFill>
+                <a:highlight>
+                  <a:srgbClr val="FFFFFF"/>
+                </a:highlight>
+                <a:latin typeface="Cascadia Mono" panose="020B0609020000020004" pitchFamily="49" charset="0"/>
+              </a:rPr>
+              <a:t>First</a:t>
+            </a:r>
+            <a:r>
+              <a:rPr lang="en-US" sz="2400" dirty="0">
+                <a:solidFill>
+                  <a:srgbClr val="000000"/>
+                </a:solidFill>
+                <a:highlight>
+                  <a:srgbClr val="FFFFFF"/>
+                </a:highlight>
+                <a:latin typeface="Cascadia Mono" panose="020B0609020000020004" pitchFamily="49" charset="0"/>
+              </a:rPr>
+              <a:t>();</a:t>
+            </a:r>
+          </a:p>
+          <a:p>
+            <a:r>
+              <a:rPr lang="en-US" sz="2400" dirty="0" err="1">
+                <a:solidFill>
+                  <a:srgbClr val="1F377F"/>
+                </a:solidFill>
+                <a:highlight>
+                  <a:srgbClr val="FFFFFF"/>
+                </a:highlight>
+                <a:latin typeface="Cascadia Mono" panose="020B0609020000020004" pitchFamily="49" charset="0"/>
+              </a:rPr>
+              <a:t>user</a:t>
+            </a:r>
+            <a:r>
+              <a:rPr lang="en-US" sz="2400" dirty="0" err="1">
+                <a:solidFill>
+                  <a:srgbClr val="000000"/>
+                </a:solidFill>
+                <a:highlight>
+                  <a:srgbClr val="FFFFFF"/>
+                </a:highlight>
+                <a:latin typeface="Cascadia Mono" panose="020B0609020000020004" pitchFamily="49" charset="0"/>
+              </a:rPr>
+              <a:t>.Name</a:t>
+            </a:r>
+            <a:r>
+              <a:rPr lang="en-US" sz="2400" dirty="0">
+                <a:solidFill>
+                  <a:srgbClr val="000000"/>
+                </a:solidFill>
+                <a:highlight>
+                  <a:srgbClr val="FFFFFF"/>
+                </a:highlight>
+                <a:latin typeface="Cascadia Mono" panose="020B0609020000020004" pitchFamily="49" charset="0"/>
+              </a:rPr>
+              <a:t> = </a:t>
+            </a:r>
+            <a:r>
+              <a:rPr lang="en-US" sz="2400" dirty="0">
+                <a:solidFill>
+                  <a:srgbClr val="A31515"/>
+                </a:solidFill>
+                <a:highlight>
+                  <a:srgbClr val="FFFFFF"/>
+                </a:highlight>
+                <a:latin typeface="Cascadia Mono" panose="020B0609020000020004" pitchFamily="49" charset="0"/>
+              </a:rPr>
+              <a:t>"</a:t>
+            </a:r>
+            <a:r>
+              <a:rPr lang="ru-RU" sz="2400" dirty="0">
+                <a:solidFill>
+                  <a:srgbClr val="A31515"/>
+                </a:solidFill>
+                <a:highlight>
+                  <a:srgbClr val="FFFFFF"/>
+                </a:highlight>
+                <a:latin typeface="Cascadia Mono" panose="020B0609020000020004" pitchFamily="49" charset="0"/>
+              </a:rPr>
+              <a:t>Новое Имя"</a:t>
+            </a:r>
+            <a:r>
+              <a:rPr lang="ru-RU" sz="2400" dirty="0">
+                <a:solidFill>
+                  <a:srgbClr val="000000"/>
+                </a:solidFill>
+                <a:highlight>
+                  <a:srgbClr val="FFFFFF"/>
+                </a:highlight>
+                <a:latin typeface="Cascadia Mono" panose="020B0609020000020004" pitchFamily="49" charset="0"/>
+              </a:rPr>
+              <a:t>;</a:t>
+            </a:r>
+          </a:p>
+          <a:p>
+            <a:r>
+              <a:rPr lang="ru-RU" sz="2400" dirty="0" err="1">
+                <a:solidFill>
+                  <a:srgbClr val="1F377F"/>
+                </a:solidFill>
+                <a:highlight>
+                  <a:srgbClr val="FFFFFF"/>
+                </a:highlight>
+                <a:latin typeface="Cascadia Mono" panose="020B0609020000020004" pitchFamily="49" charset="0"/>
+              </a:rPr>
+              <a:t>db</a:t>
+            </a:r>
+            <a:r>
+              <a:rPr lang="ru-RU" sz="2400" dirty="0" err="1">
+                <a:solidFill>
+                  <a:srgbClr val="000000"/>
+                </a:solidFill>
+                <a:highlight>
+                  <a:srgbClr val="FFFFFF"/>
+                </a:highlight>
+                <a:latin typeface="Cascadia Mono" panose="020B0609020000020004" pitchFamily="49" charset="0"/>
+              </a:rPr>
+              <a:t>.</a:t>
+            </a:r>
+            <a:r>
+              <a:rPr lang="ru-RU" sz="2400" dirty="0" err="1">
+                <a:solidFill>
+                  <a:srgbClr val="74531F"/>
+                </a:solidFill>
+                <a:highlight>
+                  <a:srgbClr val="FFFFFF"/>
+                </a:highlight>
+                <a:latin typeface="Cascadia Mono" panose="020B0609020000020004" pitchFamily="49" charset="0"/>
+              </a:rPr>
+              <a:t>SaveChanges</a:t>
+            </a:r>
+            <a:r>
+              <a:rPr lang="ru-RU" sz="2400" dirty="0">
+                <a:solidFill>
+                  <a:srgbClr val="000000"/>
+                </a:solidFill>
+                <a:highlight>
+                  <a:srgbClr val="FFFFFF"/>
+                </a:highlight>
+                <a:latin typeface="Cascadia Mono" panose="020B0609020000020004" pitchFamily="49" charset="0"/>
+              </a:rPr>
+              <a:t>(); </a:t>
+            </a:r>
+            <a:r>
+              <a:rPr lang="ru-RU" sz="2400" dirty="0">
+                <a:solidFill>
+                  <a:srgbClr val="008000"/>
+                </a:solidFill>
+                <a:highlight>
+                  <a:srgbClr val="FFFFFF"/>
+                </a:highlight>
+                <a:latin typeface="Cascadia Mono" panose="020B0609020000020004" pitchFamily="49" charset="0"/>
+              </a:rPr>
+              <a:t>// EF </a:t>
+            </a:r>
+            <a:r>
+              <a:rPr lang="ru-RU" sz="2400" dirty="0" err="1">
+                <a:solidFill>
+                  <a:srgbClr val="008000"/>
+                </a:solidFill>
+                <a:highlight>
+                  <a:srgbClr val="FFFFFF"/>
+                </a:highlight>
+                <a:latin typeface="Cascadia Mono" panose="020B0609020000020004" pitchFamily="49" charset="0"/>
+              </a:rPr>
+              <a:t>Core</a:t>
+            </a:r>
+            <a:r>
+              <a:rPr lang="ru-RU" sz="2400" dirty="0">
+                <a:solidFill>
+                  <a:srgbClr val="008000"/>
+                </a:solidFill>
+                <a:highlight>
+                  <a:srgbClr val="FFFFFF"/>
+                </a:highlight>
+                <a:latin typeface="Cascadia Mono" panose="020B0609020000020004" pitchFamily="49" charset="0"/>
+              </a:rPr>
+              <a:t> сам понял, что объект </a:t>
+            </a:r>
+            <a:r>
+              <a:rPr lang="ru-RU" sz="2400" dirty="0" smtClean="0">
+                <a:solidFill>
+                  <a:srgbClr val="008000"/>
+                </a:solidFill>
+                <a:highlight>
+                  <a:srgbClr val="FFFFFF"/>
+                </a:highlight>
+                <a:latin typeface="Cascadia Mono" panose="020B0609020000020004" pitchFamily="49" charset="0"/>
+              </a:rPr>
+              <a:t>изменился</a:t>
+            </a:r>
+            <a:endParaRPr lang="ru-RU" sz="2400" dirty="0" smtClean="0"/>
+          </a:p>
+        </p:txBody>
+      </p:sp>
+    </p:spTree>
+    <p:extLst>
+      <p:ext uri="{BB962C8B-B14F-4D97-AF65-F5344CB8AC3E}">
+        <p14:creationId xmlns:p14="http://schemas.microsoft.com/office/powerpoint/2010/main" val="729306357"/>
+      </p:ext>
+    </p:extLst>
+  </p:cSld>
+  <p:clrMapOvr>
+    <a:masterClrMapping/>
+  </p:clrMapOvr>
+  <p:timing>
+    <p:tnLst>
+      <p:par>
+        <p:cTn id="1" dur="indefinite" restart="never" nodeType="tmRoot"/>
+      </p:par>
+    </p:tnLst>
+  </p:timing>
+</p:sld>
+</file>
+
+<file path=ppt/slides/slide27.xml><?xml version="1.0" encoding="utf-8"?>
+<p:sld xmlns:a="http://schemas.openxmlformats.org/drawingml/2006/main" xmlns:r="http://schemas.openxmlformats.org/officeDocument/2006/relationships" xmlns:p="http://schemas.openxmlformats.org/presentationml/2006/main">
+  <p:cSld>
+    <p:spTree>
+      <p:nvGrpSpPr>
+        <p:cNvPr id="1" name=""/>
+        <p:cNvGrpSpPr/>
+        <p:nvPr/>
+      </p:nvGrpSpPr>
+      <p:grpSpPr>
+        <a:xfrm>
+          <a:off x="0" y="0"/>
+          <a:ext cx="0" cy="0"/>
+          <a:chOff x="0" y="0"/>
+          <a:chExt cx="0" cy="0"/>
+        </a:xfrm>
+      </p:grpSpPr>
+      <p:sp>
+        <p:nvSpPr>
+          <p:cNvPr id="7" name="Прямоугольник 6"/>
+          <p:cNvSpPr/>
+          <p:nvPr/>
+        </p:nvSpPr>
+        <p:spPr>
+          <a:xfrm>
+            <a:off x="0" y="0"/>
+            <a:ext cx="12192000" cy="3600986"/>
+          </a:xfrm>
+          <a:prstGeom prst="rect">
+            <a:avLst/>
+          </a:prstGeom>
+        </p:spPr>
+        <p:txBody>
+          <a:bodyPr wrap="square" lIns="360000" rIns="360000">
+            <a:spAutoFit/>
+          </a:bodyPr>
+          <a:lstStyle/>
+          <a:p>
+            <a:pPr marL="457200" indent="-457200">
+              <a:lnSpc>
+                <a:spcPct val="150000"/>
+              </a:lnSpc>
+              <a:buFont typeface="+mj-lt"/>
+              <a:buAutoNum type="arabicPeriod" startAt="2"/>
+            </a:pPr>
+            <a:r>
+              <a:rPr lang="ru-RU" sz="2400" b="1" dirty="0" smtClean="0"/>
+              <a:t>Массовый </a:t>
+            </a:r>
+            <a:r>
+              <a:rPr lang="ru-RU" sz="2400" b="1" dirty="0"/>
+              <a:t>(</a:t>
+            </a:r>
+            <a:r>
+              <a:rPr lang="ru-RU" sz="2400" b="1" dirty="0" err="1"/>
+              <a:t>ExecuteUpdate</a:t>
+            </a:r>
+            <a:r>
+              <a:rPr lang="ru-RU" sz="2400" b="1" dirty="0"/>
+              <a:t>):</a:t>
+            </a:r>
+            <a:r>
+              <a:rPr lang="ru-RU" sz="2400" dirty="0"/>
+              <a:t/>
+            </a:r>
+            <a:br>
+              <a:rPr lang="ru-RU" sz="2400" dirty="0"/>
+            </a:br>
+            <a:r>
+              <a:rPr lang="ru-RU" sz="2400" dirty="0"/>
+              <a:t>Позволяет обновить сотни записей одним запросом без загрузки их в память</a:t>
+            </a:r>
+            <a:r>
+              <a:rPr lang="ru-RU" sz="2400" dirty="0" smtClean="0"/>
+              <a:t>.</a:t>
+            </a:r>
+            <a:endParaRPr lang="en-US" sz="2400" dirty="0" smtClean="0"/>
+          </a:p>
+          <a:p>
+            <a:endParaRPr lang="en-US" sz="2400" dirty="0" smtClean="0">
+              <a:solidFill>
+                <a:srgbClr val="1F377F"/>
+              </a:solidFill>
+              <a:highlight>
+                <a:srgbClr val="FFFFFF"/>
+              </a:highlight>
+              <a:latin typeface="Cascadia Mono" panose="020B0609020000020004" pitchFamily="49" charset="0"/>
+            </a:endParaRPr>
+          </a:p>
+          <a:p>
+            <a:r>
+              <a:rPr lang="en-US" sz="2400" dirty="0" err="1" smtClean="0">
+                <a:solidFill>
+                  <a:srgbClr val="1F377F"/>
+                </a:solidFill>
+                <a:highlight>
+                  <a:srgbClr val="FFFFFF"/>
+                </a:highlight>
+                <a:latin typeface="Cascadia Mono" panose="020B0609020000020004" pitchFamily="49" charset="0"/>
+              </a:rPr>
+              <a:t>db</a:t>
+            </a:r>
+            <a:r>
+              <a:rPr lang="en-US" sz="2400" dirty="0" err="1" smtClean="0">
+                <a:solidFill>
+                  <a:srgbClr val="000000"/>
+                </a:solidFill>
+                <a:highlight>
+                  <a:srgbClr val="FFFFFF"/>
+                </a:highlight>
+                <a:latin typeface="Cascadia Mono" panose="020B0609020000020004" pitchFamily="49" charset="0"/>
+              </a:rPr>
+              <a:t>.Customers</a:t>
+            </a:r>
+            <a:endParaRPr lang="en-US" sz="2400" dirty="0">
+              <a:solidFill>
+                <a:srgbClr val="000000"/>
+              </a:solidFill>
+              <a:highlight>
+                <a:srgbClr val="FFFFFF"/>
+              </a:highlight>
+              <a:latin typeface="Cascadia Mono" panose="020B0609020000020004" pitchFamily="49" charset="0"/>
+            </a:endParaRPr>
+          </a:p>
+          <a:p>
+            <a:r>
+              <a:rPr lang="en-US" sz="2400" dirty="0">
+                <a:solidFill>
+                  <a:srgbClr val="000000"/>
+                </a:solidFill>
+                <a:highlight>
+                  <a:srgbClr val="FFFFFF"/>
+                </a:highlight>
+                <a:latin typeface="Cascadia Mono" panose="020B0609020000020004" pitchFamily="49" charset="0"/>
+              </a:rPr>
+              <a:t>  .</a:t>
+            </a:r>
+            <a:r>
+              <a:rPr lang="en-US" sz="2400" dirty="0">
+                <a:solidFill>
+                  <a:srgbClr val="74531F"/>
+                </a:solidFill>
+                <a:highlight>
+                  <a:srgbClr val="FFFFFF"/>
+                </a:highlight>
+                <a:latin typeface="Cascadia Mono" panose="020B0609020000020004" pitchFamily="49" charset="0"/>
+              </a:rPr>
+              <a:t>Where</a:t>
+            </a:r>
+            <a:r>
+              <a:rPr lang="en-US" sz="2400" dirty="0">
+                <a:solidFill>
+                  <a:srgbClr val="000000"/>
+                </a:solidFill>
+                <a:highlight>
+                  <a:srgbClr val="FFFFFF"/>
+                </a:highlight>
+                <a:latin typeface="Cascadia Mono" panose="020B0609020000020004" pitchFamily="49" charset="0"/>
+              </a:rPr>
+              <a:t>(</a:t>
+            </a:r>
+            <a:r>
+              <a:rPr lang="en-US" sz="2400" dirty="0">
+                <a:solidFill>
+                  <a:srgbClr val="1F377F"/>
+                </a:solidFill>
+                <a:highlight>
+                  <a:srgbClr val="FFFFFF"/>
+                </a:highlight>
+                <a:latin typeface="Cascadia Mono" panose="020B0609020000020004" pitchFamily="49" charset="0"/>
+              </a:rPr>
+              <a:t>b</a:t>
+            </a:r>
+            <a:r>
+              <a:rPr lang="en-US" sz="2400" dirty="0">
+                <a:solidFill>
+                  <a:srgbClr val="000000"/>
+                </a:solidFill>
+                <a:highlight>
+                  <a:srgbClr val="FFFFFF"/>
+                </a:highlight>
+                <a:latin typeface="Cascadia Mono" panose="020B0609020000020004" pitchFamily="49" charset="0"/>
+              </a:rPr>
+              <a:t> =&gt; </a:t>
+            </a:r>
+            <a:r>
+              <a:rPr lang="en-US" sz="2400" dirty="0" err="1">
+                <a:solidFill>
+                  <a:srgbClr val="1F377F"/>
+                </a:solidFill>
+                <a:highlight>
+                  <a:srgbClr val="FFFFFF"/>
+                </a:highlight>
+                <a:latin typeface="Cascadia Mono" panose="020B0609020000020004" pitchFamily="49" charset="0"/>
+              </a:rPr>
+              <a:t>b</a:t>
+            </a:r>
+            <a:r>
+              <a:rPr lang="en-US" sz="2400" dirty="0" err="1">
+                <a:solidFill>
+                  <a:srgbClr val="000000"/>
+                </a:solidFill>
+                <a:highlight>
+                  <a:srgbClr val="FFFFFF"/>
+                </a:highlight>
+                <a:latin typeface="Cascadia Mono" panose="020B0609020000020004" pitchFamily="49" charset="0"/>
+              </a:rPr>
+              <a:t>.Age</a:t>
+            </a:r>
+            <a:r>
+              <a:rPr lang="en-US" sz="2400" dirty="0">
+                <a:solidFill>
+                  <a:srgbClr val="000000"/>
+                </a:solidFill>
+                <a:highlight>
+                  <a:srgbClr val="FFFFFF"/>
+                </a:highlight>
+                <a:latin typeface="Cascadia Mono" panose="020B0609020000020004" pitchFamily="49" charset="0"/>
+              </a:rPr>
+              <a:t> &lt; 50)</a:t>
+            </a:r>
+          </a:p>
+          <a:p>
+            <a:r>
+              <a:rPr lang="en-US" sz="2400" dirty="0">
+                <a:solidFill>
+                  <a:srgbClr val="000000"/>
+                </a:solidFill>
+                <a:highlight>
+                  <a:srgbClr val="FFFFFF"/>
+                </a:highlight>
+                <a:latin typeface="Cascadia Mono" panose="020B0609020000020004" pitchFamily="49" charset="0"/>
+              </a:rPr>
+              <a:t>  .</a:t>
+            </a:r>
+            <a:r>
+              <a:rPr lang="en-US" sz="2400" dirty="0" err="1">
+                <a:solidFill>
+                  <a:srgbClr val="74531F"/>
+                </a:solidFill>
+                <a:highlight>
+                  <a:srgbClr val="FFFFFF"/>
+                </a:highlight>
+                <a:latin typeface="Cascadia Mono" panose="020B0609020000020004" pitchFamily="49" charset="0"/>
+              </a:rPr>
+              <a:t>ExecuteUpdate</a:t>
+            </a:r>
+            <a:r>
+              <a:rPr lang="en-US" sz="2400" dirty="0">
+                <a:solidFill>
+                  <a:srgbClr val="000000"/>
+                </a:solidFill>
+                <a:highlight>
+                  <a:srgbClr val="FFFFFF"/>
+                </a:highlight>
+                <a:latin typeface="Cascadia Mono" panose="020B0609020000020004" pitchFamily="49" charset="0"/>
+              </a:rPr>
+              <a:t>(</a:t>
+            </a:r>
+            <a:r>
+              <a:rPr lang="en-US" sz="2400" dirty="0">
+                <a:solidFill>
+                  <a:srgbClr val="1F377F"/>
+                </a:solidFill>
+                <a:highlight>
+                  <a:srgbClr val="FFFFFF"/>
+                </a:highlight>
+                <a:latin typeface="Cascadia Mono" panose="020B0609020000020004" pitchFamily="49" charset="0"/>
+              </a:rPr>
+              <a:t>s</a:t>
+            </a:r>
+            <a:r>
+              <a:rPr lang="en-US" sz="2400" dirty="0">
+                <a:solidFill>
+                  <a:srgbClr val="000000"/>
+                </a:solidFill>
+                <a:highlight>
+                  <a:srgbClr val="FFFFFF"/>
+                </a:highlight>
+                <a:latin typeface="Cascadia Mono" panose="020B0609020000020004" pitchFamily="49" charset="0"/>
+              </a:rPr>
+              <a:t> =&gt; </a:t>
+            </a:r>
+            <a:endParaRPr lang="en-US" sz="2400" dirty="0" smtClean="0">
+              <a:solidFill>
+                <a:srgbClr val="000000"/>
+              </a:solidFill>
+              <a:highlight>
+                <a:srgbClr val="FFFFFF"/>
+              </a:highlight>
+              <a:latin typeface="Cascadia Mono" panose="020B0609020000020004" pitchFamily="49" charset="0"/>
+            </a:endParaRPr>
+          </a:p>
+          <a:p>
+            <a:r>
+              <a:rPr lang="en-US" sz="2400" dirty="0">
+                <a:solidFill>
+                  <a:srgbClr val="000000"/>
+                </a:solidFill>
+                <a:highlight>
+                  <a:srgbClr val="FFFFFF"/>
+                </a:highlight>
+                <a:latin typeface="Cascadia Mono" panose="020B0609020000020004" pitchFamily="49" charset="0"/>
+              </a:rPr>
+              <a:t>	</a:t>
+            </a:r>
+            <a:r>
+              <a:rPr lang="en-US" sz="2400" dirty="0" smtClean="0">
+                <a:solidFill>
+                  <a:srgbClr val="000000"/>
+                </a:solidFill>
+                <a:highlight>
+                  <a:srgbClr val="FFFFFF"/>
+                </a:highlight>
+                <a:latin typeface="Cascadia Mono" panose="020B0609020000020004" pitchFamily="49" charset="0"/>
+              </a:rPr>
+              <a:t>	</a:t>
+            </a:r>
+            <a:r>
+              <a:rPr lang="en-US" sz="2400" dirty="0" err="1" smtClean="0">
+                <a:solidFill>
+                  <a:srgbClr val="1F377F"/>
+                </a:solidFill>
+                <a:highlight>
+                  <a:srgbClr val="FFFFFF"/>
+                </a:highlight>
+                <a:latin typeface="Cascadia Mono" panose="020B0609020000020004" pitchFamily="49" charset="0"/>
+              </a:rPr>
+              <a:t>s</a:t>
+            </a:r>
+            <a:r>
+              <a:rPr lang="en-US" sz="2400" dirty="0" err="1" smtClean="0">
+                <a:solidFill>
+                  <a:srgbClr val="000000"/>
+                </a:solidFill>
+                <a:highlight>
+                  <a:srgbClr val="FFFFFF"/>
+                </a:highlight>
+                <a:latin typeface="Cascadia Mono" panose="020B0609020000020004" pitchFamily="49" charset="0"/>
+              </a:rPr>
+              <a:t>.</a:t>
+            </a:r>
+            <a:r>
+              <a:rPr lang="en-US" sz="2400" dirty="0" err="1" smtClean="0">
+                <a:solidFill>
+                  <a:srgbClr val="74531F"/>
+                </a:solidFill>
+                <a:highlight>
+                  <a:srgbClr val="FFFFFF"/>
+                </a:highlight>
+                <a:latin typeface="Cascadia Mono" panose="020B0609020000020004" pitchFamily="49" charset="0"/>
+              </a:rPr>
+              <a:t>SetProperty</a:t>
+            </a:r>
+            <a:r>
+              <a:rPr lang="en-US" sz="2400" dirty="0" smtClean="0">
+                <a:solidFill>
+                  <a:srgbClr val="000000"/>
+                </a:solidFill>
+                <a:highlight>
+                  <a:srgbClr val="FFFFFF"/>
+                </a:highlight>
+                <a:latin typeface="Cascadia Mono" panose="020B0609020000020004" pitchFamily="49" charset="0"/>
+              </a:rPr>
+              <a:t>(</a:t>
+            </a:r>
+            <a:r>
+              <a:rPr lang="en-US" sz="2400" dirty="0" smtClean="0">
+                <a:solidFill>
+                  <a:srgbClr val="1F377F"/>
+                </a:solidFill>
+                <a:highlight>
+                  <a:srgbClr val="FFFFFF"/>
+                </a:highlight>
+                <a:latin typeface="Cascadia Mono" panose="020B0609020000020004" pitchFamily="49" charset="0"/>
+              </a:rPr>
+              <a:t>b</a:t>
+            </a:r>
+            <a:r>
+              <a:rPr lang="en-US" sz="2400" dirty="0" smtClean="0">
+                <a:solidFill>
+                  <a:srgbClr val="000000"/>
+                </a:solidFill>
+                <a:highlight>
+                  <a:srgbClr val="FFFFFF"/>
+                </a:highlight>
+                <a:latin typeface="Cascadia Mono" panose="020B0609020000020004" pitchFamily="49" charset="0"/>
+              </a:rPr>
+              <a:t> </a:t>
+            </a:r>
+            <a:r>
+              <a:rPr lang="en-US" sz="2400" dirty="0">
+                <a:solidFill>
+                  <a:srgbClr val="000000"/>
+                </a:solidFill>
+                <a:highlight>
+                  <a:srgbClr val="FFFFFF"/>
+                </a:highlight>
+                <a:latin typeface="Cascadia Mono" panose="020B0609020000020004" pitchFamily="49" charset="0"/>
+              </a:rPr>
+              <a:t>=&gt; </a:t>
+            </a:r>
+            <a:r>
+              <a:rPr lang="en-US" sz="2400" dirty="0" err="1">
+                <a:solidFill>
+                  <a:srgbClr val="1F377F"/>
+                </a:solidFill>
+                <a:highlight>
+                  <a:srgbClr val="FFFFFF"/>
+                </a:highlight>
+                <a:latin typeface="Cascadia Mono" panose="020B0609020000020004" pitchFamily="49" charset="0"/>
+              </a:rPr>
+              <a:t>b</a:t>
+            </a:r>
+            <a:r>
+              <a:rPr lang="en-US" sz="2400" dirty="0" err="1">
+                <a:solidFill>
+                  <a:srgbClr val="000000"/>
+                </a:solidFill>
+                <a:highlight>
+                  <a:srgbClr val="FFFFFF"/>
+                </a:highlight>
+                <a:latin typeface="Cascadia Mono" panose="020B0609020000020004" pitchFamily="49" charset="0"/>
+              </a:rPr>
+              <a:t>.Money</a:t>
+            </a:r>
+            <a:r>
+              <a:rPr lang="en-US" sz="2400" dirty="0">
+                <a:solidFill>
+                  <a:srgbClr val="000000"/>
+                </a:solidFill>
+                <a:highlight>
+                  <a:srgbClr val="FFFFFF"/>
+                </a:highlight>
+                <a:latin typeface="Cascadia Mono" panose="020B0609020000020004" pitchFamily="49" charset="0"/>
+              </a:rPr>
+              <a:t>, </a:t>
+            </a:r>
+            <a:r>
+              <a:rPr lang="en-US" sz="2400" dirty="0">
+                <a:solidFill>
+                  <a:srgbClr val="1F377F"/>
+                </a:solidFill>
+                <a:highlight>
+                  <a:srgbClr val="FFFFFF"/>
+                </a:highlight>
+                <a:latin typeface="Cascadia Mono" panose="020B0609020000020004" pitchFamily="49" charset="0"/>
+              </a:rPr>
+              <a:t>b</a:t>
+            </a:r>
+            <a:r>
+              <a:rPr lang="en-US" sz="2400" dirty="0">
+                <a:solidFill>
+                  <a:srgbClr val="000000"/>
+                </a:solidFill>
+                <a:highlight>
+                  <a:srgbClr val="FFFFFF"/>
+                </a:highlight>
+                <a:latin typeface="Cascadia Mono" panose="020B0609020000020004" pitchFamily="49" charset="0"/>
+              </a:rPr>
+              <a:t> =&gt; </a:t>
+            </a:r>
+            <a:r>
+              <a:rPr lang="en-US" sz="2400" dirty="0" err="1">
+                <a:solidFill>
+                  <a:srgbClr val="1F377F"/>
+                </a:solidFill>
+                <a:highlight>
+                  <a:srgbClr val="FFFFFF"/>
+                </a:highlight>
+                <a:latin typeface="Cascadia Mono" panose="020B0609020000020004" pitchFamily="49" charset="0"/>
+              </a:rPr>
+              <a:t>b</a:t>
+            </a:r>
+            <a:r>
+              <a:rPr lang="en-US" sz="2400" dirty="0" err="1">
+                <a:solidFill>
+                  <a:srgbClr val="000000"/>
+                </a:solidFill>
+                <a:highlight>
+                  <a:srgbClr val="FFFFFF"/>
+                </a:highlight>
+                <a:latin typeface="Cascadia Mono" panose="020B0609020000020004" pitchFamily="49" charset="0"/>
+              </a:rPr>
+              <a:t>.Money</a:t>
+            </a:r>
+            <a:r>
+              <a:rPr lang="en-US" sz="2400" dirty="0">
+                <a:solidFill>
+                  <a:srgbClr val="000000"/>
+                </a:solidFill>
+                <a:highlight>
+                  <a:srgbClr val="FFFFFF"/>
+                </a:highlight>
+                <a:latin typeface="Cascadia Mono" panose="020B0609020000020004" pitchFamily="49" charset="0"/>
+              </a:rPr>
+              <a:t> + 100));</a:t>
+            </a:r>
+            <a:endParaRPr lang="ru-RU" sz="2400" dirty="0"/>
+          </a:p>
+        </p:txBody>
+      </p:sp>
+    </p:spTree>
+    <p:extLst>
+      <p:ext uri="{BB962C8B-B14F-4D97-AF65-F5344CB8AC3E}">
+        <p14:creationId xmlns:p14="http://schemas.microsoft.com/office/powerpoint/2010/main" val="4033984876"/>
+      </p:ext>
+    </p:extLst>
+  </p:cSld>
+  <p:clrMapOvr>
+    <a:masterClrMapping/>
+  </p:clrMapOvr>
+  <p:timing>
+    <p:tnLst>
+      <p:par>
+        <p:cTn id="1" dur="indefinite" restart="never" nodeType="tmRoot"/>
+      </p:par>
+    </p:tnLst>
+  </p:timing>
+</p:sld>
+</file>
+
+<file path=ppt/slides/slide28.xml><?xml version="1.0" encoding="utf-8"?>
+<p:sld xmlns:a="http://schemas.openxmlformats.org/drawingml/2006/main" xmlns:r="http://schemas.openxmlformats.org/officeDocument/2006/relationships" xmlns:p="http://schemas.openxmlformats.org/presentationml/2006/main">
+  <p:cSld>
+    <p:spTree>
+      <p:nvGrpSpPr>
+        <p:cNvPr id="1" name=""/>
+        <p:cNvGrpSpPr/>
+        <p:nvPr/>
+      </p:nvGrpSpPr>
+      <p:grpSpPr>
+        <a:xfrm>
+          <a:off x="0" y="0"/>
+          <a:ext cx="0" cy="0"/>
+          <a:chOff x="0" y="0"/>
+          <a:chExt cx="0" cy="0"/>
+        </a:xfrm>
+      </p:grpSpPr>
+      <p:sp>
+        <p:nvSpPr>
+          <p:cNvPr id="7" name="Прямоугольник 6"/>
+          <p:cNvSpPr/>
+          <p:nvPr/>
+        </p:nvSpPr>
+        <p:spPr>
+          <a:xfrm>
+            <a:off x="0" y="0"/>
+            <a:ext cx="12192000" cy="5447645"/>
+          </a:xfrm>
+          <a:prstGeom prst="rect">
+            <a:avLst/>
+          </a:prstGeom>
+        </p:spPr>
+        <p:txBody>
+          <a:bodyPr wrap="square" lIns="360000" rIns="360000">
+            <a:spAutoFit/>
+          </a:bodyPr>
+          <a:lstStyle/>
+          <a:p>
+            <a:pPr>
+              <a:lnSpc>
+                <a:spcPct val="150000"/>
+              </a:lnSpc>
+            </a:pPr>
+            <a:r>
+              <a:rPr lang="ru-RU" sz="2400" dirty="0"/>
+              <a:t>Аналогично обновлению, удаление бывает точечным или массовым</a:t>
+            </a:r>
+            <a:r>
+              <a:rPr lang="ru-RU" sz="2400" dirty="0" smtClean="0"/>
+              <a:t>.</a:t>
+            </a:r>
+            <a:endParaRPr lang="en-US" sz="2400" dirty="0" smtClean="0"/>
+          </a:p>
+          <a:p>
+            <a:endParaRPr lang="en-US" sz="2400" dirty="0" smtClean="0">
+              <a:solidFill>
+                <a:srgbClr val="008000"/>
+              </a:solidFill>
+              <a:highlight>
+                <a:srgbClr val="FFFFFF"/>
+              </a:highlight>
+              <a:latin typeface="Cascadia Mono" panose="020B0609020000020004" pitchFamily="49" charset="0"/>
+            </a:endParaRPr>
+          </a:p>
+          <a:p>
+            <a:r>
+              <a:rPr lang="ru-RU" sz="2400" dirty="0">
+                <a:solidFill>
+                  <a:srgbClr val="008000"/>
+                </a:solidFill>
+                <a:highlight>
+                  <a:srgbClr val="FFFFFF"/>
+                </a:highlight>
+                <a:latin typeface="Cascadia Mono" panose="020B0609020000020004" pitchFamily="49" charset="0"/>
+              </a:rPr>
+              <a:t>// Точечное удаление</a:t>
+            </a:r>
+            <a:endParaRPr lang="ru-RU" sz="2400" dirty="0">
+              <a:solidFill>
+                <a:srgbClr val="000000"/>
+              </a:solidFill>
+              <a:highlight>
+                <a:srgbClr val="FFFFFF"/>
+              </a:highlight>
+              <a:latin typeface="Cascadia Mono" panose="020B0609020000020004" pitchFamily="49" charset="0"/>
+            </a:endParaRPr>
+          </a:p>
+          <a:p>
+            <a:r>
+              <a:rPr lang="en-US" sz="2400" dirty="0" err="1">
+                <a:solidFill>
+                  <a:srgbClr val="0000FF"/>
+                </a:solidFill>
+                <a:highlight>
+                  <a:srgbClr val="FFFFFF"/>
+                </a:highlight>
+                <a:latin typeface="Cascadia Mono" panose="020B0609020000020004" pitchFamily="49" charset="0"/>
+              </a:rPr>
+              <a:t>var</a:t>
+            </a:r>
+            <a:r>
+              <a:rPr lang="en-US" sz="2400" dirty="0">
+                <a:solidFill>
+                  <a:srgbClr val="000000"/>
+                </a:solidFill>
+                <a:highlight>
+                  <a:srgbClr val="FFFFFF"/>
+                </a:highlight>
+                <a:latin typeface="Cascadia Mono" panose="020B0609020000020004" pitchFamily="49" charset="0"/>
+              </a:rPr>
+              <a:t> </a:t>
+            </a:r>
+            <a:r>
+              <a:rPr lang="en-US" sz="2400" dirty="0">
+                <a:solidFill>
+                  <a:srgbClr val="1F377F"/>
+                </a:solidFill>
+                <a:highlight>
+                  <a:srgbClr val="FFFFFF"/>
+                </a:highlight>
+                <a:latin typeface="Cascadia Mono" panose="020B0609020000020004" pitchFamily="49" charset="0"/>
+              </a:rPr>
+              <a:t>note</a:t>
+            </a:r>
+            <a:r>
+              <a:rPr lang="en-US" sz="2400" dirty="0">
+                <a:solidFill>
+                  <a:srgbClr val="000000"/>
+                </a:solidFill>
+                <a:highlight>
+                  <a:srgbClr val="FFFFFF"/>
+                </a:highlight>
+                <a:latin typeface="Cascadia Mono" panose="020B0609020000020004" pitchFamily="49" charset="0"/>
+              </a:rPr>
+              <a:t> = </a:t>
+            </a:r>
+            <a:r>
+              <a:rPr lang="en-US" sz="2400" dirty="0" err="1">
+                <a:solidFill>
+                  <a:srgbClr val="1F377F"/>
+                </a:solidFill>
+                <a:highlight>
+                  <a:srgbClr val="FFFFFF"/>
+                </a:highlight>
+                <a:latin typeface="Cascadia Mono" panose="020B0609020000020004" pitchFamily="49" charset="0"/>
+              </a:rPr>
+              <a:t>db</a:t>
+            </a:r>
+            <a:r>
+              <a:rPr lang="en-US" sz="2400" dirty="0" err="1">
+                <a:solidFill>
+                  <a:srgbClr val="000000"/>
+                </a:solidFill>
+                <a:highlight>
+                  <a:srgbClr val="FFFFFF"/>
+                </a:highlight>
+                <a:latin typeface="Cascadia Mono" panose="020B0609020000020004" pitchFamily="49" charset="0"/>
+              </a:rPr>
+              <a:t>.Notes.</a:t>
+            </a:r>
+            <a:r>
+              <a:rPr lang="en-US" sz="2400" dirty="0" err="1">
+                <a:solidFill>
+                  <a:srgbClr val="74531F"/>
+                </a:solidFill>
+                <a:highlight>
+                  <a:srgbClr val="FFFFFF"/>
+                </a:highlight>
+                <a:latin typeface="Cascadia Mono" panose="020B0609020000020004" pitchFamily="49" charset="0"/>
+              </a:rPr>
+              <a:t>Find</a:t>
+            </a:r>
+            <a:r>
+              <a:rPr lang="en-US" sz="2400" dirty="0">
+                <a:solidFill>
+                  <a:srgbClr val="000000"/>
+                </a:solidFill>
+                <a:highlight>
+                  <a:srgbClr val="FFFFFF"/>
+                </a:highlight>
+                <a:latin typeface="Cascadia Mono" panose="020B0609020000020004" pitchFamily="49" charset="0"/>
+              </a:rPr>
+              <a:t>(id);</a:t>
+            </a:r>
+          </a:p>
+          <a:p>
+            <a:r>
+              <a:rPr lang="en-US" sz="2400" dirty="0">
+                <a:solidFill>
+                  <a:srgbClr val="8F08C4"/>
+                </a:solidFill>
+                <a:highlight>
+                  <a:srgbClr val="FFFFFF"/>
+                </a:highlight>
+                <a:latin typeface="Cascadia Mono" panose="020B0609020000020004" pitchFamily="49" charset="0"/>
+              </a:rPr>
+              <a:t>if</a:t>
+            </a:r>
+            <a:r>
+              <a:rPr lang="en-US" sz="2400" dirty="0">
+                <a:solidFill>
+                  <a:srgbClr val="000000"/>
+                </a:solidFill>
+                <a:highlight>
+                  <a:srgbClr val="FFFFFF"/>
+                </a:highlight>
+                <a:latin typeface="Cascadia Mono" panose="020B0609020000020004" pitchFamily="49" charset="0"/>
+              </a:rPr>
+              <a:t> (</a:t>
+            </a:r>
+            <a:r>
+              <a:rPr lang="en-US" sz="2400" dirty="0">
+                <a:solidFill>
+                  <a:srgbClr val="1F377F"/>
+                </a:solidFill>
+                <a:highlight>
+                  <a:srgbClr val="FFFFFF"/>
+                </a:highlight>
+                <a:latin typeface="Cascadia Mono" panose="020B0609020000020004" pitchFamily="49" charset="0"/>
+              </a:rPr>
+              <a:t>note</a:t>
+            </a:r>
+            <a:r>
+              <a:rPr lang="en-US" sz="2400" dirty="0">
+                <a:solidFill>
+                  <a:srgbClr val="000000"/>
+                </a:solidFill>
+                <a:highlight>
+                  <a:srgbClr val="FFFFFF"/>
+                </a:highlight>
+                <a:latin typeface="Cascadia Mono" panose="020B0609020000020004" pitchFamily="49" charset="0"/>
+              </a:rPr>
+              <a:t> != </a:t>
+            </a:r>
+            <a:r>
+              <a:rPr lang="en-US" sz="2400" dirty="0">
+                <a:solidFill>
+                  <a:srgbClr val="0000FF"/>
+                </a:solidFill>
+                <a:highlight>
+                  <a:srgbClr val="FFFFFF"/>
+                </a:highlight>
+                <a:latin typeface="Cascadia Mono" panose="020B0609020000020004" pitchFamily="49" charset="0"/>
+              </a:rPr>
+              <a:t>null</a:t>
+            </a:r>
+            <a:r>
+              <a:rPr lang="en-US" sz="2400" dirty="0">
+                <a:solidFill>
+                  <a:srgbClr val="000000"/>
+                </a:solidFill>
+                <a:highlight>
+                  <a:srgbClr val="FFFFFF"/>
+                </a:highlight>
+                <a:latin typeface="Cascadia Mono" panose="020B0609020000020004" pitchFamily="49" charset="0"/>
+              </a:rPr>
+              <a:t>)</a:t>
+            </a:r>
+          </a:p>
+          <a:p>
+            <a:r>
+              <a:rPr lang="ru-RU" sz="2400" dirty="0">
+                <a:solidFill>
+                  <a:srgbClr val="000000"/>
+                </a:solidFill>
+                <a:highlight>
+                  <a:srgbClr val="FFFFFF"/>
+                </a:highlight>
+                <a:latin typeface="Cascadia Mono" panose="020B0609020000020004" pitchFamily="49" charset="0"/>
+              </a:rPr>
+              <a:t>{</a:t>
+            </a:r>
+          </a:p>
+          <a:p>
+            <a:r>
+              <a:rPr lang="en-US" sz="2400" dirty="0">
+                <a:solidFill>
+                  <a:srgbClr val="000000"/>
+                </a:solidFill>
+                <a:highlight>
+                  <a:srgbClr val="FFFFFF"/>
+                </a:highlight>
+                <a:latin typeface="Cascadia Mono" panose="020B0609020000020004" pitchFamily="49" charset="0"/>
+              </a:rPr>
+              <a:t>    </a:t>
+            </a:r>
+            <a:r>
+              <a:rPr lang="en-US" sz="2400" dirty="0" err="1">
+                <a:solidFill>
+                  <a:srgbClr val="1F377F"/>
+                </a:solidFill>
+                <a:highlight>
+                  <a:srgbClr val="FFFFFF"/>
+                </a:highlight>
+                <a:latin typeface="Cascadia Mono" panose="020B0609020000020004" pitchFamily="49" charset="0"/>
+              </a:rPr>
+              <a:t>db</a:t>
+            </a:r>
+            <a:r>
+              <a:rPr lang="en-US" sz="2400" dirty="0" err="1">
+                <a:solidFill>
+                  <a:srgbClr val="000000"/>
+                </a:solidFill>
+                <a:highlight>
+                  <a:srgbClr val="FFFFFF"/>
+                </a:highlight>
+                <a:latin typeface="Cascadia Mono" panose="020B0609020000020004" pitchFamily="49" charset="0"/>
+              </a:rPr>
+              <a:t>.Notes.</a:t>
+            </a:r>
+            <a:r>
+              <a:rPr lang="en-US" sz="2400" dirty="0" err="1">
+                <a:solidFill>
+                  <a:srgbClr val="74531F"/>
+                </a:solidFill>
+                <a:highlight>
+                  <a:srgbClr val="FFFFFF"/>
+                </a:highlight>
+                <a:latin typeface="Cascadia Mono" panose="020B0609020000020004" pitchFamily="49" charset="0"/>
+              </a:rPr>
+              <a:t>Remove</a:t>
+            </a:r>
+            <a:r>
+              <a:rPr lang="en-US" sz="2400" dirty="0">
+                <a:solidFill>
+                  <a:srgbClr val="000000"/>
+                </a:solidFill>
+                <a:highlight>
+                  <a:srgbClr val="FFFFFF"/>
+                </a:highlight>
+                <a:latin typeface="Cascadia Mono" panose="020B0609020000020004" pitchFamily="49" charset="0"/>
+              </a:rPr>
+              <a:t>(</a:t>
+            </a:r>
+            <a:r>
+              <a:rPr lang="en-US" sz="2400" dirty="0">
+                <a:solidFill>
+                  <a:srgbClr val="1F377F"/>
+                </a:solidFill>
+                <a:highlight>
+                  <a:srgbClr val="FFFFFF"/>
+                </a:highlight>
+                <a:latin typeface="Cascadia Mono" panose="020B0609020000020004" pitchFamily="49" charset="0"/>
+              </a:rPr>
+              <a:t>note</a:t>
+            </a:r>
+            <a:r>
+              <a:rPr lang="en-US" sz="2400" dirty="0">
+                <a:solidFill>
+                  <a:srgbClr val="000000"/>
+                </a:solidFill>
+                <a:highlight>
+                  <a:srgbClr val="FFFFFF"/>
+                </a:highlight>
+                <a:latin typeface="Cascadia Mono" panose="020B0609020000020004" pitchFamily="49" charset="0"/>
+              </a:rPr>
+              <a:t>);</a:t>
+            </a:r>
+          </a:p>
+          <a:p>
+            <a:r>
+              <a:rPr lang="en-US" sz="2400" dirty="0">
+                <a:solidFill>
+                  <a:srgbClr val="000000"/>
+                </a:solidFill>
+                <a:highlight>
+                  <a:srgbClr val="FFFFFF"/>
+                </a:highlight>
+                <a:latin typeface="Cascadia Mono" panose="020B0609020000020004" pitchFamily="49" charset="0"/>
+              </a:rPr>
+              <a:t>    </a:t>
+            </a:r>
+            <a:r>
+              <a:rPr lang="en-US" sz="2400" dirty="0" err="1">
+                <a:solidFill>
+                  <a:srgbClr val="1F377F"/>
+                </a:solidFill>
+                <a:highlight>
+                  <a:srgbClr val="FFFFFF"/>
+                </a:highlight>
+                <a:latin typeface="Cascadia Mono" panose="020B0609020000020004" pitchFamily="49" charset="0"/>
+              </a:rPr>
+              <a:t>db</a:t>
+            </a:r>
+            <a:r>
+              <a:rPr lang="en-US" sz="2400" dirty="0" err="1">
+                <a:solidFill>
+                  <a:srgbClr val="000000"/>
+                </a:solidFill>
+                <a:highlight>
+                  <a:srgbClr val="FFFFFF"/>
+                </a:highlight>
+                <a:latin typeface="Cascadia Mono" panose="020B0609020000020004" pitchFamily="49" charset="0"/>
+              </a:rPr>
+              <a:t>.</a:t>
+            </a:r>
+            <a:r>
+              <a:rPr lang="en-US" sz="2400" dirty="0" err="1">
+                <a:solidFill>
+                  <a:srgbClr val="74531F"/>
+                </a:solidFill>
+                <a:highlight>
+                  <a:srgbClr val="FFFFFF"/>
+                </a:highlight>
+                <a:latin typeface="Cascadia Mono" panose="020B0609020000020004" pitchFamily="49" charset="0"/>
+              </a:rPr>
+              <a:t>SaveChanges</a:t>
+            </a:r>
+            <a:r>
+              <a:rPr lang="en-US" sz="2400" dirty="0">
+                <a:solidFill>
+                  <a:srgbClr val="000000"/>
+                </a:solidFill>
+                <a:highlight>
+                  <a:srgbClr val="FFFFFF"/>
+                </a:highlight>
+                <a:latin typeface="Cascadia Mono" panose="020B0609020000020004" pitchFamily="49" charset="0"/>
+              </a:rPr>
+              <a:t>();</a:t>
+            </a:r>
+          </a:p>
+          <a:p>
+            <a:r>
+              <a:rPr lang="ru-RU" sz="2400" dirty="0" smtClean="0">
+                <a:solidFill>
+                  <a:srgbClr val="000000"/>
+                </a:solidFill>
+                <a:highlight>
+                  <a:srgbClr val="FFFFFF"/>
+                </a:highlight>
+                <a:latin typeface="Cascadia Mono" panose="020B0609020000020004" pitchFamily="49" charset="0"/>
+              </a:rPr>
+              <a:t>}</a:t>
+            </a:r>
+            <a:endParaRPr lang="en-US" sz="2400" dirty="0" smtClean="0">
+              <a:solidFill>
+                <a:srgbClr val="000000"/>
+              </a:solidFill>
+              <a:highlight>
+                <a:srgbClr val="FFFFFF"/>
+              </a:highlight>
+              <a:latin typeface="Cascadia Mono" panose="020B0609020000020004" pitchFamily="49" charset="0"/>
+            </a:endParaRPr>
+          </a:p>
+          <a:p>
+            <a:endParaRPr lang="en-US" sz="2400" dirty="0" smtClean="0">
+              <a:solidFill>
+                <a:srgbClr val="008000"/>
+              </a:solidFill>
+              <a:highlight>
+                <a:srgbClr val="FFFFFF"/>
+              </a:highlight>
+              <a:latin typeface="Cascadia Mono" panose="020B0609020000020004" pitchFamily="49" charset="0"/>
+            </a:endParaRPr>
+          </a:p>
+          <a:p>
+            <a:r>
+              <a:rPr lang="ru-RU" sz="2400" dirty="0" smtClean="0">
+                <a:solidFill>
+                  <a:srgbClr val="008000"/>
+                </a:solidFill>
+                <a:highlight>
+                  <a:srgbClr val="FFFFFF"/>
+                </a:highlight>
+                <a:latin typeface="Cascadia Mono" panose="020B0609020000020004" pitchFamily="49" charset="0"/>
+              </a:rPr>
+              <a:t>// </a:t>
+            </a:r>
+            <a:r>
+              <a:rPr lang="ru-RU" sz="2400" dirty="0">
+                <a:solidFill>
+                  <a:srgbClr val="008000"/>
+                </a:solidFill>
+                <a:highlight>
+                  <a:srgbClr val="FFFFFF"/>
+                </a:highlight>
+                <a:latin typeface="Cascadia Mono" panose="020B0609020000020004" pitchFamily="49" charset="0"/>
+              </a:rPr>
+              <a:t>Быстрое удаление всех старых заметок (Массовое)</a:t>
+            </a:r>
+            <a:endParaRPr lang="ru-RU" sz="2400" dirty="0">
+              <a:solidFill>
+                <a:srgbClr val="000000"/>
+              </a:solidFill>
+              <a:highlight>
+                <a:srgbClr val="FFFFFF"/>
+              </a:highlight>
+              <a:latin typeface="Cascadia Mono" panose="020B0609020000020004" pitchFamily="49" charset="0"/>
+            </a:endParaRPr>
+          </a:p>
+          <a:p>
+            <a:r>
+              <a:rPr lang="en-US" sz="2400" dirty="0" err="1">
+                <a:solidFill>
+                  <a:srgbClr val="1F377F"/>
+                </a:solidFill>
+                <a:highlight>
+                  <a:srgbClr val="FFFFFF"/>
+                </a:highlight>
+                <a:latin typeface="Cascadia Mono" panose="020B0609020000020004" pitchFamily="49" charset="0"/>
+              </a:rPr>
+              <a:t>db</a:t>
+            </a:r>
+            <a:r>
+              <a:rPr lang="en-US" sz="2400" dirty="0" err="1">
+                <a:solidFill>
+                  <a:srgbClr val="000000"/>
+                </a:solidFill>
+                <a:highlight>
+                  <a:srgbClr val="FFFFFF"/>
+                </a:highlight>
+                <a:latin typeface="Cascadia Mono" panose="020B0609020000020004" pitchFamily="49" charset="0"/>
+              </a:rPr>
+              <a:t>.Notes</a:t>
+            </a:r>
+            <a:endParaRPr lang="en-US" sz="2400" dirty="0">
+              <a:solidFill>
+                <a:srgbClr val="000000"/>
+              </a:solidFill>
+              <a:highlight>
+                <a:srgbClr val="FFFFFF"/>
+              </a:highlight>
+              <a:latin typeface="Cascadia Mono" panose="020B0609020000020004" pitchFamily="49" charset="0"/>
+            </a:endParaRPr>
+          </a:p>
+          <a:p>
+            <a:r>
+              <a:rPr lang="en-US" sz="2400" dirty="0">
+                <a:solidFill>
+                  <a:srgbClr val="000000"/>
+                </a:solidFill>
+                <a:highlight>
+                  <a:srgbClr val="FFFFFF"/>
+                </a:highlight>
+                <a:latin typeface="Cascadia Mono" panose="020B0609020000020004" pitchFamily="49" charset="0"/>
+              </a:rPr>
+              <a:t>  .</a:t>
+            </a:r>
+            <a:r>
+              <a:rPr lang="en-US" sz="2400" dirty="0">
+                <a:solidFill>
+                  <a:srgbClr val="74531F"/>
+                </a:solidFill>
+                <a:highlight>
+                  <a:srgbClr val="FFFFFF"/>
+                </a:highlight>
+                <a:latin typeface="Cascadia Mono" panose="020B0609020000020004" pitchFamily="49" charset="0"/>
+              </a:rPr>
+              <a:t>Where</a:t>
+            </a:r>
+            <a:r>
+              <a:rPr lang="en-US" sz="2400" dirty="0">
+                <a:solidFill>
+                  <a:srgbClr val="000000"/>
+                </a:solidFill>
+                <a:highlight>
+                  <a:srgbClr val="FFFFFF"/>
+                </a:highlight>
+                <a:latin typeface="Cascadia Mono" panose="020B0609020000020004" pitchFamily="49" charset="0"/>
+              </a:rPr>
+              <a:t>(</a:t>
+            </a:r>
+            <a:r>
+              <a:rPr lang="en-US" sz="2400" dirty="0">
+                <a:solidFill>
+                  <a:srgbClr val="1F377F"/>
+                </a:solidFill>
+                <a:highlight>
+                  <a:srgbClr val="FFFFFF"/>
+                </a:highlight>
+                <a:latin typeface="Cascadia Mono" panose="020B0609020000020004" pitchFamily="49" charset="0"/>
+              </a:rPr>
+              <a:t>n</a:t>
+            </a:r>
+            <a:r>
+              <a:rPr lang="en-US" sz="2400" dirty="0">
+                <a:solidFill>
+                  <a:srgbClr val="000000"/>
+                </a:solidFill>
+                <a:highlight>
+                  <a:srgbClr val="FFFFFF"/>
+                </a:highlight>
+                <a:latin typeface="Cascadia Mono" panose="020B0609020000020004" pitchFamily="49" charset="0"/>
+              </a:rPr>
+              <a:t> =&gt; </a:t>
+            </a:r>
+            <a:r>
+              <a:rPr lang="en-US" sz="2400" dirty="0" err="1">
+                <a:solidFill>
+                  <a:srgbClr val="1F377F"/>
+                </a:solidFill>
+                <a:highlight>
+                  <a:srgbClr val="FFFFFF"/>
+                </a:highlight>
+                <a:latin typeface="Cascadia Mono" panose="020B0609020000020004" pitchFamily="49" charset="0"/>
+              </a:rPr>
+              <a:t>n</a:t>
+            </a:r>
+            <a:r>
+              <a:rPr lang="en-US" sz="2400" dirty="0" err="1">
+                <a:solidFill>
+                  <a:srgbClr val="000000"/>
+                </a:solidFill>
+                <a:highlight>
+                  <a:srgbClr val="FFFFFF"/>
+                </a:highlight>
+                <a:latin typeface="Cascadia Mono" panose="020B0609020000020004" pitchFamily="49" charset="0"/>
+              </a:rPr>
+              <a:t>.CreatedAt</a:t>
+            </a:r>
+            <a:r>
+              <a:rPr lang="en-US" sz="2400" dirty="0">
+                <a:solidFill>
+                  <a:srgbClr val="000000"/>
+                </a:solidFill>
+                <a:highlight>
+                  <a:srgbClr val="FFFFFF"/>
+                </a:highlight>
+                <a:latin typeface="Cascadia Mono" panose="020B0609020000020004" pitchFamily="49" charset="0"/>
+              </a:rPr>
+              <a:t> </a:t>
+            </a:r>
+            <a:r>
+              <a:rPr lang="en-US" sz="2400" dirty="0">
+                <a:solidFill>
+                  <a:srgbClr val="74531F"/>
+                </a:solidFill>
+                <a:highlight>
+                  <a:srgbClr val="FFFFFF"/>
+                </a:highlight>
+                <a:latin typeface="Cascadia Mono" panose="020B0609020000020004" pitchFamily="49" charset="0"/>
+              </a:rPr>
+              <a:t>&lt;</a:t>
+            </a:r>
+            <a:r>
+              <a:rPr lang="en-US" sz="2400" dirty="0">
+                <a:solidFill>
+                  <a:srgbClr val="000000"/>
+                </a:solidFill>
+                <a:highlight>
+                  <a:srgbClr val="FFFFFF"/>
+                </a:highlight>
+                <a:latin typeface="Cascadia Mono" panose="020B0609020000020004" pitchFamily="49" charset="0"/>
+              </a:rPr>
+              <a:t> </a:t>
+            </a:r>
+            <a:r>
+              <a:rPr lang="en-US" sz="2400" dirty="0" err="1">
+                <a:solidFill>
+                  <a:srgbClr val="2B91AF"/>
+                </a:solidFill>
+                <a:highlight>
+                  <a:srgbClr val="FFFFFF"/>
+                </a:highlight>
+                <a:latin typeface="Cascadia Mono" panose="020B0609020000020004" pitchFamily="49" charset="0"/>
+              </a:rPr>
+              <a:t>DateTime</a:t>
+            </a:r>
+            <a:r>
+              <a:rPr lang="en-US" sz="2400" dirty="0" err="1">
+                <a:solidFill>
+                  <a:srgbClr val="000000"/>
+                </a:solidFill>
+                <a:highlight>
+                  <a:srgbClr val="FFFFFF"/>
+                </a:highlight>
+                <a:latin typeface="Cascadia Mono" panose="020B0609020000020004" pitchFamily="49" charset="0"/>
+              </a:rPr>
+              <a:t>.Now.</a:t>
+            </a:r>
+            <a:r>
+              <a:rPr lang="en-US" sz="2400" dirty="0" err="1">
+                <a:solidFill>
+                  <a:srgbClr val="74531F"/>
+                </a:solidFill>
+                <a:highlight>
+                  <a:srgbClr val="FFFFFF"/>
+                </a:highlight>
+                <a:latin typeface="Cascadia Mono" panose="020B0609020000020004" pitchFamily="49" charset="0"/>
+              </a:rPr>
+              <a:t>AddYears</a:t>
+            </a:r>
+            <a:r>
+              <a:rPr lang="en-US" sz="2400" dirty="0">
+                <a:solidFill>
+                  <a:srgbClr val="000000"/>
+                </a:solidFill>
+                <a:highlight>
+                  <a:srgbClr val="FFFFFF"/>
+                </a:highlight>
+                <a:latin typeface="Cascadia Mono" panose="020B0609020000020004" pitchFamily="49" charset="0"/>
+              </a:rPr>
+              <a:t>(-1))</a:t>
+            </a:r>
+          </a:p>
+          <a:p>
+            <a:r>
+              <a:rPr lang="en-US" sz="2400" dirty="0">
+                <a:solidFill>
+                  <a:srgbClr val="000000"/>
+                </a:solidFill>
+                <a:highlight>
+                  <a:srgbClr val="FFFFFF"/>
+                </a:highlight>
+                <a:latin typeface="Cascadia Mono" panose="020B0609020000020004" pitchFamily="49" charset="0"/>
+              </a:rPr>
+              <a:t>  .</a:t>
+            </a:r>
+            <a:r>
+              <a:rPr lang="en-US" sz="2400" dirty="0" err="1">
+                <a:solidFill>
+                  <a:srgbClr val="74531F"/>
+                </a:solidFill>
+                <a:highlight>
+                  <a:srgbClr val="FFFFFF"/>
+                </a:highlight>
+                <a:latin typeface="Cascadia Mono" panose="020B0609020000020004" pitchFamily="49" charset="0"/>
+              </a:rPr>
+              <a:t>ExecuteDelete</a:t>
+            </a:r>
+            <a:r>
+              <a:rPr lang="en-US" sz="2400" dirty="0">
+                <a:solidFill>
+                  <a:srgbClr val="000000"/>
+                </a:solidFill>
+                <a:highlight>
+                  <a:srgbClr val="FFFFFF"/>
+                </a:highlight>
+                <a:latin typeface="Cascadia Mono" panose="020B0609020000020004" pitchFamily="49" charset="0"/>
+              </a:rPr>
+              <a:t>();</a:t>
+            </a:r>
+            <a:endParaRPr lang="ru-RU" sz="2400" dirty="0"/>
+          </a:p>
+        </p:txBody>
+      </p:sp>
+    </p:spTree>
+    <p:extLst>
+      <p:ext uri="{BB962C8B-B14F-4D97-AF65-F5344CB8AC3E}">
+        <p14:creationId xmlns:p14="http://schemas.microsoft.com/office/powerpoint/2010/main" val="2473618400"/>
+      </p:ext>
+    </p:extLst>
+  </p:cSld>
+  <p:clrMapOvr>
+    <a:masterClrMapping/>
+  </p:clrMapOvr>
+  <p:timing>
+    <p:tnLst>
+      <p:par>
+        <p:cTn id="1" dur="indefinite" restart="never" nodeType="tmRoot"/>
+      </p:par>
+    </p:tnLst>
+  </p:timing>
+</p:sld>
+</file>
+
+<file path=ppt/slides/slide29.xml><?xml version="1.0" encoding="utf-8"?>
+<p:sld xmlns:a="http://schemas.openxmlformats.org/drawingml/2006/main" xmlns:r="http://schemas.openxmlformats.org/officeDocument/2006/relationships" xmlns:p="http://schemas.openxmlformats.org/presentationml/2006/main">
+  <p:cSld>
+    <p:spTree>
+      <p:nvGrpSpPr>
+        <p:cNvPr id="1" name=""/>
+        <p:cNvGrpSpPr/>
+        <p:nvPr/>
+      </p:nvGrpSpPr>
+      <p:grpSpPr>
+        <a:xfrm>
+          <a:off x="0" y="0"/>
+          <a:ext cx="0" cy="0"/>
+          <a:chOff x="0" y="0"/>
+          <a:chExt cx="0" cy="0"/>
+        </a:xfrm>
+      </p:grpSpPr>
+      <p:sp>
+        <p:nvSpPr>
+          <p:cNvPr id="7" name="Прямоугольник 6"/>
+          <p:cNvSpPr/>
+          <p:nvPr/>
+        </p:nvSpPr>
+        <p:spPr>
+          <a:xfrm>
+            <a:off x="0" y="0"/>
+            <a:ext cx="12192000" cy="5447645"/>
+          </a:xfrm>
+          <a:prstGeom prst="rect">
+            <a:avLst/>
+          </a:prstGeom>
+        </p:spPr>
+        <p:txBody>
+          <a:bodyPr wrap="square" lIns="360000" rIns="360000">
+            <a:spAutoFit/>
+          </a:bodyPr>
+          <a:lstStyle/>
+          <a:p>
+            <a:pPr>
+              <a:lnSpc>
+                <a:spcPct val="150000"/>
+              </a:lnSpc>
+            </a:pPr>
+            <a:r>
+              <a:rPr lang="ru-RU" sz="2400" dirty="0"/>
+              <a:t>По умолчанию EF </a:t>
+            </a:r>
+            <a:r>
+              <a:rPr lang="ru-RU" sz="2400" dirty="0" err="1"/>
+              <a:t>Core</a:t>
+            </a:r>
+            <a:r>
+              <a:rPr lang="ru-RU" sz="2400" dirty="0"/>
+              <a:t> «следит» за каждым загруженным объектом, чтобы заметить изменения. Это тратит ресурсы</a:t>
+            </a:r>
+            <a:r>
+              <a:rPr lang="ru-RU" sz="2400" dirty="0" smtClean="0"/>
+              <a:t>.</a:t>
+            </a:r>
+            <a:endParaRPr lang="en-US" sz="2400" dirty="0" smtClean="0"/>
+          </a:p>
+          <a:p>
+            <a:pPr>
+              <a:lnSpc>
+                <a:spcPct val="150000"/>
+              </a:lnSpc>
+            </a:pPr>
+            <a:endParaRPr lang="ru-RU" sz="2400" dirty="0"/>
+          </a:p>
+          <a:p>
+            <a:pPr>
+              <a:lnSpc>
+                <a:spcPct val="150000"/>
+              </a:lnSpc>
+            </a:pPr>
+            <a:r>
+              <a:rPr lang="ru-RU" sz="2400" b="1" dirty="0"/>
+              <a:t>Правило:</a:t>
+            </a:r>
+            <a:r>
+              <a:rPr lang="ru-RU" sz="2400" dirty="0"/>
+              <a:t> Если вы просто читаете данные для отображения на экране (</a:t>
+            </a:r>
+            <a:r>
+              <a:rPr lang="ru-RU" sz="2400" dirty="0" err="1"/>
+              <a:t>Read-Only</a:t>
+            </a:r>
+            <a:r>
+              <a:rPr lang="ru-RU" sz="2400" dirty="0"/>
+              <a:t>) и не собираетесь их менять:</a:t>
+            </a:r>
+          </a:p>
+          <a:p>
+            <a:pPr>
+              <a:lnSpc>
+                <a:spcPct val="150000"/>
+              </a:lnSpc>
+            </a:pPr>
+            <a:r>
+              <a:rPr lang="ru-RU" sz="2400" dirty="0"/>
+              <a:t>Используйте метод </a:t>
+            </a:r>
+            <a:r>
+              <a:rPr lang="ru-RU" sz="2400" b="1" dirty="0"/>
+              <a:t>.</a:t>
+            </a:r>
+            <a:r>
+              <a:rPr lang="ru-RU" sz="2400" b="1" dirty="0" err="1"/>
+              <a:t>AsNoTracking</a:t>
+            </a:r>
+            <a:r>
+              <a:rPr lang="ru-RU" sz="2400" b="1" dirty="0" smtClean="0"/>
+              <a:t>()</a:t>
+            </a:r>
+            <a:r>
+              <a:rPr lang="ru-RU" sz="2400" dirty="0" smtClean="0"/>
+              <a:t>.</a:t>
+            </a:r>
+            <a:endParaRPr lang="en-US" sz="2400" dirty="0" smtClean="0"/>
+          </a:p>
+          <a:p>
+            <a:pPr>
+              <a:lnSpc>
+                <a:spcPct val="150000"/>
+              </a:lnSpc>
+            </a:pPr>
+            <a:endParaRPr lang="en-US" sz="2400" dirty="0" smtClean="0"/>
+          </a:p>
+          <a:p>
+            <a:r>
+              <a:rPr lang="ru-RU" sz="2400" dirty="0">
+                <a:solidFill>
+                  <a:srgbClr val="008000"/>
+                </a:solidFill>
+                <a:highlight>
+                  <a:srgbClr val="FFFFFF"/>
+                </a:highlight>
+                <a:latin typeface="Cascadia Mono" panose="020B0609020000020004" pitchFamily="49" charset="0"/>
+              </a:rPr>
+              <a:t>// Работает в 2-3 раза быстрее и ест меньше памяти</a:t>
+            </a:r>
+            <a:endParaRPr lang="ru-RU" sz="2400" dirty="0">
+              <a:solidFill>
+                <a:srgbClr val="000000"/>
+              </a:solidFill>
+              <a:highlight>
+                <a:srgbClr val="FFFFFF"/>
+              </a:highlight>
+              <a:latin typeface="Cascadia Mono" panose="020B0609020000020004" pitchFamily="49" charset="0"/>
+            </a:endParaRPr>
+          </a:p>
+          <a:p>
+            <a:r>
+              <a:rPr lang="en-US" sz="2400" dirty="0" err="1">
+                <a:solidFill>
+                  <a:srgbClr val="0000FF"/>
+                </a:solidFill>
+                <a:highlight>
+                  <a:srgbClr val="FFFFFF"/>
+                </a:highlight>
+                <a:latin typeface="Cascadia Mono" panose="020B0609020000020004" pitchFamily="49" charset="0"/>
+              </a:rPr>
+              <a:t>var</a:t>
+            </a:r>
+            <a:r>
+              <a:rPr lang="en-US" sz="2400" dirty="0">
+                <a:solidFill>
+                  <a:srgbClr val="000000"/>
+                </a:solidFill>
+                <a:highlight>
+                  <a:srgbClr val="FFFFFF"/>
+                </a:highlight>
+                <a:latin typeface="Cascadia Mono" panose="020B0609020000020004" pitchFamily="49" charset="0"/>
+              </a:rPr>
+              <a:t> </a:t>
+            </a:r>
+            <a:r>
+              <a:rPr lang="en-US" sz="2400" dirty="0">
+                <a:solidFill>
+                  <a:srgbClr val="1F377F"/>
+                </a:solidFill>
+                <a:highlight>
+                  <a:srgbClr val="FFFFFF"/>
+                </a:highlight>
+                <a:latin typeface="Cascadia Mono" panose="020B0609020000020004" pitchFamily="49" charset="0"/>
+              </a:rPr>
+              <a:t>notes</a:t>
+            </a:r>
+            <a:r>
+              <a:rPr lang="en-US" sz="2400" dirty="0">
+                <a:solidFill>
+                  <a:srgbClr val="000000"/>
+                </a:solidFill>
+                <a:highlight>
+                  <a:srgbClr val="FFFFFF"/>
+                </a:highlight>
+                <a:latin typeface="Cascadia Mono" panose="020B0609020000020004" pitchFamily="49" charset="0"/>
+              </a:rPr>
+              <a:t> = </a:t>
+            </a:r>
+            <a:r>
+              <a:rPr lang="en-US" sz="2400" dirty="0">
+                <a:solidFill>
+                  <a:srgbClr val="8F08C4"/>
+                </a:solidFill>
+                <a:highlight>
+                  <a:srgbClr val="FFFFFF"/>
+                </a:highlight>
+                <a:latin typeface="Cascadia Mono" panose="020B0609020000020004" pitchFamily="49" charset="0"/>
+              </a:rPr>
+              <a:t>await</a:t>
+            </a:r>
+            <a:r>
+              <a:rPr lang="en-US" sz="2400" dirty="0">
+                <a:solidFill>
+                  <a:srgbClr val="000000"/>
+                </a:solidFill>
+                <a:highlight>
+                  <a:srgbClr val="FFFFFF"/>
+                </a:highlight>
+                <a:latin typeface="Cascadia Mono" panose="020B0609020000020004" pitchFamily="49" charset="0"/>
+              </a:rPr>
+              <a:t> </a:t>
+            </a:r>
+            <a:r>
+              <a:rPr lang="en-US" sz="2400" dirty="0" err="1">
+                <a:solidFill>
+                  <a:srgbClr val="1F377F"/>
+                </a:solidFill>
+                <a:highlight>
+                  <a:srgbClr val="FFFFFF"/>
+                </a:highlight>
+                <a:latin typeface="Cascadia Mono" panose="020B0609020000020004" pitchFamily="49" charset="0"/>
+              </a:rPr>
+              <a:t>db</a:t>
+            </a:r>
+            <a:r>
+              <a:rPr lang="en-US" sz="2400" dirty="0" err="1">
+                <a:solidFill>
+                  <a:srgbClr val="000000"/>
+                </a:solidFill>
+                <a:highlight>
+                  <a:srgbClr val="FFFFFF"/>
+                </a:highlight>
+                <a:latin typeface="Cascadia Mono" panose="020B0609020000020004" pitchFamily="49" charset="0"/>
+              </a:rPr>
+              <a:t>.Notes</a:t>
+            </a:r>
+            <a:endParaRPr lang="en-US" sz="2400" dirty="0">
+              <a:solidFill>
+                <a:srgbClr val="000000"/>
+              </a:solidFill>
+              <a:highlight>
+                <a:srgbClr val="FFFFFF"/>
+              </a:highlight>
+              <a:latin typeface="Cascadia Mono" panose="020B0609020000020004" pitchFamily="49" charset="0"/>
+            </a:endParaRPr>
+          </a:p>
+          <a:p>
+            <a:r>
+              <a:rPr lang="en-US" sz="2400" dirty="0">
+                <a:solidFill>
+                  <a:srgbClr val="000000"/>
+                </a:solidFill>
+                <a:highlight>
+                  <a:srgbClr val="FFFFFF"/>
+                </a:highlight>
+                <a:latin typeface="Cascadia Mono" panose="020B0609020000020004" pitchFamily="49" charset="0"/>
+              </a:rPr>
+              <a:t>    .</a:t>
+            </a:r>
+            <a:r>
+              <a:rPr lang="en-US" sz="2400" dirty="0" err="1">
+                <a:solidFill>
+                  <a:srgbClr val="74531F"/>
+                </a:solidFill>
+                <a:highlight>
+                  <a:srgbClr val="FFFFFF"/>
+                </a:highlight>
+                <a:latin typeface="Cascadia Mono" panose="020B0609020000020004" pitchFamily="49" charset="0"/>
+              </a:rPr>
+              <a:t>AsNoTracking</a:t>
+            </a:r>
+            <a:r>
+              <a:rPr lang="en-US" sz="2400" dirty="0">
+                <a:solidFill>
+                  <a:srgbClr val="000000"/>
+                </a:solidFill>
+                <a:highlight>
+                  <a:srgbClr val="FFFFFF"/>
+                </a:highlight>
+                <a:latin typeface="Cascadia Mono" panose="020B0609020000020004" pitchFamily="49" charset="0"/>
+              </a:rPr>
+              <a:t>()</a:t>
+            </a:r>
+          </a:p>
+          <a:p>
+            <a:r>
+              <a:rPr lang="en-US" sz="2400" dirty="0">
+                <a:solidFill>
+                  <a:srgbClr val="000000"/>
+                </a:solidFill>
+                <a:highlight>
+                  <a:srgbClr val="FFFFFF"/>
+                </a:highlight>
+                <a:latin typeface="Cascadia Mono" panose="020B0609020000020004" pitchFamily="49" charset="0"/>
+              </a:rPr>
+              <a:t>    .</a:t>
+            </a:r>
+            <a:r>
+              <a:rPr lang="en-US" sz="2400" dirty="0" err="1">
+                <a:solidFill>
+                  <a:srgbClr val="74531F"/>
+                </a:solidFill>
+                <a:highlight>
+                  <a:srgbClr val="FFFFFF"/>
+                </a:highlight>
+                <a:latin typeface="Cascadia Mono" panose="020B0609020000020004" pitchFamily="49" charset="0"/>
+              </a:rPr>
+              <a:t>ToListAsync</a:t>
+            </a:r>
+            <a:r>
+              <a:rPr lang="en-US" sz="2400" dirty="0">
+                <a:solidFill>
+                  <a:srgbClr val="000000"/>
+                </a:solidFill>
+                <a:highlight>
+                  <a:srgbClr val="FFFFFF"/>
+                </a:highlight>
+                <a:latin typeface="Cascadia Mono" panose="020B0609020000020004" pitchFamily="49" charset="0"/>
+              </a:rPr>
+              <a:t>();</a:t>
+            </a:r>
+            <a:endParaRPr lang="ru-RU" sz="2400" dirty="0"/>
+          </a:p>
+        </p:txBody>
+      </p:sp>
+    </p:spTree>
+    <p:extLst>
+      <p:ext uri="{BB962C8B-B14F-4D97-AF65-F5344CB8AC3E}">
+        <p14:creationId xmlns:p14="http://schemas.microsoft.com/office/powerpoint/2010/main" val="3760856941"/>
+      </p:ext>
+    </p:extLst>
+  </p:cSld>
+  <p:clrMapOvr>
+    <a:masterClrMapping/>
+  </p:clrMapOvr>
+  <p:timing>
+    <p:tnLst>
+      <p:par>
+        <p:cTn id="1" dur="indefinite" restart="never" nodeType="tmRoot"/>
+      </p:par>
+    </p:tnLst>
+  </p:timing>
+</p:sld>
+</file>
+
 <file path=ppt/slides/slide3.xml><?xml version="1.0" encoding="utf-8"?>
 <p:sld xmlns:a="http://schemas.openxmlformats.org/drawingml/2006/main" xmlns:r="http://schemas.openxmlformats.org/officeDocument/2006/relationships" xmlns:p="http://schemas.openxmlformats.org/presentationml/2006/main">
   <p:cSld>
@@ -4607,6 +13936,175 @@
     <p:extLst>
       <p:ext uri="{BB962C8B-B14F-4D97-AF65-F5344CB8AC3E}">
         <p14:creationId xmlns:p14="http://schemas.microsoft.com/office/powerpoint/2010/main" val="1073089060"/>
+      </p:ext>
+    </p:extLst>
+  </p:cSld>
+  <p:clrMapOvr>
+    <a:masterClrMapping/>
+  </p:clrMapOvr>
+  <p:timing>
+    <p:tnLst>
+      <p:par>
+        <p:cTn id="1" dur="indefinite" restart="never" nodeType="tmRoot"/>
+      </p:par>
+    </p:tnLst>
+  </p:timing>
+</p:sld>
+</file>
+
+<file path=ppt/slides/slide30.xml><?xml version="1.0" encoding="utf-8"?>
+<p:sld xmlns:a="http://schemas.openxmlformats.org/drawingml/2006/main" xmlns:r="http://schemas.openxmlformats.org/officeDocument/2006/relationships" xmlns:p="http://schemas.openxmlformats.org/presentationml/2006/main">
+  <p:cSld>
+    <p:spTree>
+      <p:nvGrpSpPr>
+        <p:cNvPr id="1" name=""/>
+        <p:cNvGrpSpPr/>
+        <p:nvPr/>
+      </p:nvGrpSpPr>
+      <p:grpSpPr>
+        <a:xfrm>
+          <a:off x="0" y="0"/>
+          <a:ext cx="0" cy="0"/>
+          <a:chOff x="0" y="0"/>
+          <a:chExt cx="0" cy="0"/>
+        </a:xfrm>
+      </p:grpSpPr>
+      <p:sp>
+        <p:nvSpPr>
+          <p:cNvPr id="7" name="Прямоугольник 6"/>
+          <p:cNvSpPr/>
+          <p:nvPr/>
+        </p:nvSpPr>
+        <p:spPr>
+          <a:xfrm>
+            <a:off x="0" y="0"/>
+            <a:ext cx="12192000" cy="5078313"/>
+          </a:xfrm>
+          <a:prstGeom prst="rect">
+            <a:avLst/>
+          </a:prstGeom>
+        </p:spPr>
+        <p:txBody>
+          <a:bodyPr wrap="square" lIns="360000" rIns="360000">
+            <a:spAutoFit/>
+          </a:bodyPr>
+          <a:lstStyle/>
+          <a:p>
+            <a:pPr>
+              <a:lnSpc>
+                <a:spcPct val="150000"/>
+              </a:lnSpc>
+            </a:pPr>
+            <a:r>
+              <a:rPr lang="ru-RU" sz="2400" dirty="0"/>
+              <a:t>Работа с базой данных — это «медленная» операция (сеть, диск). Чтобы приложение не «зависало», все методы CRUD имеют асинхронные версии.</a:t>
+            </a:r>
+          </a:p>
+          <a:p>
+            <a:pPr marL="457200" indent="-457200">
+              <a:lnSpc>
+                <a:spcPct val="150000"/>
+              </a:lnSpc>
+              <a:buFont typeface="Arial" panose="020B0604020202020204" pitchFamily="34" charset="0"/>
+              <a:buChar char="•"/>
+            </a:pPr>
+            <a:r>
+              <a:rPr lang="ru-RU" sz="2400" dirty="0" err="1"/>
+              <a:t>Add</a:t>
+            </a:r>
+            <a:r>
+              <a:rPr lang="ru-RU" sz="2400" b="1" dirty="0" err="1"/>
+              <a:t>Async</a:t>
+            </a:r>
+            <a:r>
+              <a:rPr lang="ru-RU" sz="2400" dirty="0"/>
+              <a:t>()</a:t>
+            </a:r>
+          </a:p>
+          <a:p>
+            <a:pPr marL="457200" indent="-457200">
+              <a:lnSpc>
+                <a:spcPct val="150000"/>
+              </a:lnSpc>
+              <a:buFont typeface="Arial" panose="020B0604020202020204" pitchFamily="34" charset="0"/>
+              <a:buChar char="•"/>
+            </a:pPr>
+            <a:r>
+              <a:rPr lang="ru-RU" sz="2400" dirty="0" err="1"/>
+              <a:t>SaveChanges</a:t>
+            </a:r>
+            <a:r>
+              <a:rPr lang="ru-RU" sz="2400" b="1" dirty="0" err="1"/>
+              <a:t>Async</a:t>
+            </a:r>
+            <a:r>
+              <a:rPr lang="ru-RU" sz="2400" dirty="0"/>
+              <a:t>()</a:t>
+            </a:r>
+          </a:p>
+          <a:p>
+            <a:pPr marL="457200" indent="-457200">
+              <a:lnSpc>
+                <a:spcPct val="150000"/>
+              </a:lnSpc>
+              <a:buFont typeface="Arial" panose="020B0604020202020204" pitchFamily="34" charset="0"/>
+              <a:buChar char="•"/>
+            </a:pPr>
+            <a:r>
+              <a:rPr lang="ru-RU" sz="2400" dirty="0" err="1"/>
+              <a:t>ToList</a:t>
+            </a:r>
+            <a:r>
+              <a:rPr lang="ru-RU" sz="2400" b="1" dirty="0" err="1"/>
+              <a:t>Async</a:t>
+            </a:r>
+            <a:r>
+              <a:rPr lang="ru-RU" sz="2400" dirty="0"/>
+              <a:t>()</a:t>
+            </a:r>
+          </a:p>
+          <a:p>
+            <a:pPr marL="457200" indent="-457200">
+              <a:lnSpc>
+                <a:spcPct val="150000"/>
+              </a:lnSpc>
+              <a:buFont typeface="Arial" panose="020B0604020202020204" pitchFamily="34" charset="0"/>
+              <a:buChar char="•"/>
+            </a:pPr>
+            <a:r>
+              <a:rPr lang="ru-RU" sz="2400" dirty="0" err="1"/>
+              <a:t>FirstOrDefault</a:t>
+            </a:r>
+            <a:r>
+              <a:rPr lang="ru-RU" sz="2400" b="1" dirty="0" err="1"/>
+              <a:t>Async</a:t>
+            </a:r>
+            <a:r>
+              <a:rPr lang="ru-RU" sz="2400" dirty="0"/>
+              <a:t>()</a:t>
+            </a:r>
+          </a:p>
+          <a:p>
+            <a:pPr>
+              <a:lnSpc>
+                <a:spcPct val="150000"/>
+              </a:lnSpc>
+            </a:pPr>
+            <a:r>
+              <a:rPr lang="ru-RU" sz="2400" b="1" dirty="0"/>
+              <a:t>Стандарт индустрии:</a:t>
+            </a:r>
+            <a:r>
+              <a:rPr lang="ru-RU" sz="2400" dirty="0"/>
+              <a:t> Всегда использовать асинхронные методы при работе с внешними ресурсами (БД, API).</a:t>
+            </a:r>
+          </a:p>
+        </p:txBody>
+      </p:sp>
+    </p:spTree>
+    <p:extLst>
+      <p:ext uri="{BB962C8B-B14F-4D97-AF65-F5344CB8AC3E}">
+        <p14:creationId xmlns:p14="http://schemas.microsoft.com/office/powerpoint/2010/main" val="4130971480"/>
       </p:ext>
     </p:extLst>
   </p:cSld>
@@ -4667,8 +14165,12 @@
               </a:lnSpc>
             </a:pPr>
             <a:r>
-              <a:rPr lang="ru-RU" sz="2400" b="1" dirty="0"/>
-              <a:t>EF </a:t>
+              <a:rPr lang="en-US" sz="2400" b="1" dirty="0" smtClean="0"/>
+              <a:t>Entity Framework (EF)</a:t>
+            </a:r>
+            <a:r>
+              <a:rPr lang="ru-RU" sz="2400" b="1" dirty="0" smtClean="0"/>
+              <a:t> </a:t>
             </a:r>
             <a:r>
               <a:rPr lang="ru-RU" sz="2400" b="1" dirty="0" err="1"/>
@@ -4909,7 +14411,7 @@
         <p:spPr>
           <a:xfrm>
             <a:off x="0" y="0"/>
-            <a:ext cx="12192000" cy="5706177"/>
+            <a:ext cx="12192000" cy="6186309"/>
           </a:xfrm>
           <a:prstGeom prst="rect">
             <a:avLst/>
@@ -4921,6 +14423,18 @@
           </a:bodyPr>
           <a:lstStyle/>
           <a:p>
+            <a:pPr algn="ctr">
+              <a:lnSpc>
+                <a:spcPct val="130000"/>
+              </a:lnSpc>
+            </a:pPr>
+            <a:r>
+              <a:rPr lang="ru-RU" sz="2400" b="1" dirty="0" smtClean="0"/>
+              <a:t>Что хотим?</a:t>
+            </a:r>
+            <a:endParaRPr lang="en-US" sz="2400" b="1" dirty="0" smtClean="0"/>
+          </a:p>
+          <a:p>
             <a:pPr>
               <a:lnSpc>
                 <a:spcPct val="130000"/>
@@ -4928,7 +14442,11 @@
             </a:pPr>
             <a:r>
               <a:rPr lang="ru-RU" sz="2400" dirty="0" smtClean="0"/>
-              <a:t>Вместо написания</a:t>
+              <a:t>Вместо </a:t>
+            </a:r>
+            <a:r>
+              <a:rPr lang="ru-RU" sz="2400" dirty="0" smtClean="0"/>
+              <a:t>написания</a:t>
             </a:r>
             <a:endParaRPr lang="en-US" sz="2400" dirty="0" smtClean="0"/>
           </a:p>
@@ -5730,15 +15248,6 @@
               </a:rPr>
               <a:t>Проектирование моделей (Модель БД)</a:t>
             </a:r>
-            <a:endParaRPr lang="ru-RU" sz="2800" b="1" dirty="0">
-              <a:solidFill>
-                <a:schemeClr val="tx2">
-                  <a:lumMod val="50000"/>
-                </a:schemeClr>
-              </a:solidFill>
-              <a:latin typeface="Bookman Old Style" panose="02050604050505020204" pitchFamily="18" charset="0"/>
-              <a:cs typeface="Times New Roman" panose="02020603050405020304" pitchFamily="18" charset="0"/>
-            </a:endParaRPr>
           </a:p>
         </p:txBody>
       </p:sp>
